--- a/assets/docs/aulas/aula07_papeis_workflow_slides.pptx
+++ b/assets/docs/aulas/aula07_papeis_workflow_slides.pptx
@@ -20,6 +20,8 @@
     <p:sldId id="268" r:id="rId19"/>
     <p:sldId id="269" r:id="rId20"/>
     <p:sldId id="270" r:id="rId21"/>
+    <p:sldId id="271" r:id="rId22"/>
+    <p:sldId id="272" r:id="rId23"/>
   </p:sldIdLst>
   <p:notesMasterIdLst>
     <p:notesMasterId r:id="rId14"/>
@@ -1044,7 +1046,7 @@
                 <a:cs typeface="Georgia"/>
                 <a:ea typeface="Georgia"/>
               </a:rPr>
-              <a:t>Equipes · Labirinto de Moedas 2D · pastas Godot e pasta compartilhada</a:t>
+              <a:t>Individual ou dupla · arte da moeda × coleta · diário compartilhado</a:t>
             </a:r>
           </a:p>
         </p:txBody>
@@ -1433,7 +1435,7 @@
                 <a:cs typeface="Cinzel"/>
                 <a:ea typeface="Cinzel"/>
               </a:rPr>
-              <a:t>Trio de sala</a:t>
+              <a:t>Ponte prática — 2 encontros</a:t>
             </a:r>
           </a:p>
         </p:txBody>
@@ -1446,8 +1448,8 @@
         </p:nvSpPr>
         <p:spPr>
           <a:xfrm>
-            <a:off x="457200" y="1188720"/>
-            <a:ext cx="2743200" cy="2560320"/>
+            <a:off x="502920" y="1143000"/>
+            <a:ext cx="8138160" cy="2880360"/>
           </a:xfrm>
           <a:prstGeom prst="roundRect">
             <a:avLst/>
@@ -1491,8 +1493,8 @@
         </p:nvSpPr>
         <p:spPr>
           <a:xfrm>
-            <a:off x="640080" y="1371600"/>
-            <a:ext cx="2377440" cy="2286000"/>
+            <a:off x="822960" y="1417320"/>
+            <a:ext cx="7498079" cy="2468880"/>
           </a:xfrm>
           <a:prstGeom prst="rect">
             <a:avLst/>
@@ -1507,11 +1509,11 @@
           <a:p>
             <a:pPr algn="ctr">
               <a:spcAft>
-                <a:spcPts val="1000"/>
-              </a:spcAft>
-            </a:pPr>
-            <a:r>
-              <a:rPr sz="1400" b="1">
+                <a:spcPts val="1400"/>
+              </a:spcAft>
+            </a:pPr>
+            <a:r>
+              <a:rPr sz="1800" b="1">
                 <a:solidFill>
                   <a:srgbClr val="F2D59A"/>
                 </a:solidFill>
@@ -1519,17 +1521,17 @@
                 <a:cs typeface="Cinzel"/>
                 <a:ea typeface="Cinzel"/>
               </a:rPr>
-              <a:t>CENÁRIO</a:t>
+              <a:t>Oficina em dois encontros · individual ou dupla</a:t>
             </a:r>
           </a:p>
           <a:p>
             <a:pPr algn="ctr">
               <a:spcAft>
-                <a:spcPts val="200"/>
-              </a:spcAft>
-            </a:pPr>
-            <a:r>
-              <a:rPr sz="1200" b="0">
+                <a:spcPts val="800"/>
+              </a:spcAft>
+            </a:pPr>
+            <a:r>
+              <a:rPr sz="1400" b="0">
                 <a:solidFill>
                   <a:srgbClr val="ECE1D1"/>
                 </a:solidFill>
@@ -1537,17 +1539,17 @@
                 <a:cs typeface="Georgia"/>
                 <a:ea typeface="Georgia"/>
               </a:rPr>
-              <a:t>Arte</a:t>
+              <a:t>E1: teoria · convite · arte no LibreSprite</a:t>
             </a:r>
           </a:p>
           <a:p>
             <a:pPr algn="ctr">
               <a:spcAft>
-                <a:spcPts val="200"/>
-              </a:spcAft>
-            </a:pPr>
-            <a:r>
-              <a:rPr sz="1200" b="0">
+                <a:spcPts val="600"/>
+              </a:spcAft>
+            </a:pPr>
+            <a:r>
+              <a:rPr sz="1400" b="0">
                 <a:solidFill>
                   <a:srgbClr val="ECE1D1"/>
                 </a:solidFill>
@@ -1555,312 +1557,14 @@
                 <a:cs typeface="Georgia"/>
                 <a:ea typeface="Georgia"/>
               </a:rPr>
-              <a:t>cenas/cenario.tscn</a:t>
-            </a:r>
-          </a:p>
-          <a:p>
-            <a:pPr algn="ctr">
-              <a:spcAft>
-                <a:spcPts val="200"/>
-              </a:spcAft>
-            </a:pPr>
-            <a:r>
-              <a:rPr sz="1200" b="0">
-                <a:solidFill>
-                  <a:srgbClr val="ECE1D1"/>
-                </a:solidFill>
-                <a:latin typeface="Georgia"/>
-                <a:cs typeface="Georgia"/>
-                <a:ea typeface="Georgia"/>
-              </a:rPr>
-              <a:t>Node2D</a:t>
-            </a:r>
-          </a:p>
-        </p:txBody>
-      </p:sp>
-      <p:sp>
-        <p:nvSpPr>
-          <p:cNvPr id="9" name="Rounded Rectangle 8"/>
-          <p:cNvSpPr/>
-          <p:nvPr/>
-        </p:nvSpPr>
-        <p:spPr>
-          <a:xfrm>
-            <a:off x="3337560" y="1188720"/>
-            <a:ext cx="2743200" cy="2560320"/>
-          </a:xfrm>
-          <a:prstGeom prst="roundRect">
-            <a:avLst/>
-          </a:prstGeom>
-          <a:solidFill>
-            <a:srgbClr val="18121A"/>
-          </a:solidFill>
-          <a:ln w="15875">
-            <a:solidFill>
-              <a:srgbClr val="7A5C2E"/>
-            </a:solidFill>
-          </a:ln>
-        </p:spPr>
-        <p:style>
-          <a:lnRef idx="1">
-            <a:schemeClr val="accent1"/>
-          </a:lnRef>
-          <a:fillRef idx="3">
-            <a:schemeClr val="accent1"/>
-          </a:fillRef>
-          <a:effectRef idx="2">
-            <a:schemeClr val="accent1"/>
-          </a:effectRef>
-          <a:fontRef idx="minor">
-            <a:schemeClr val="lt1"/>
-          </a:fontRef>
-        </p:style>
-        <p:txBody>
-          <a:bodyPr rtlCol="0" anchor="ctr"/>
-          <a:lstStyle/>
-          <a:p>
-            <a:pPr algn="ctr"/>
-          </a:p>
-        </p:txBody>
-      </p:sp>
-      <p:sp>
-        <p:nvSpPr>
-          <p:cNvPr id="10" name="TextBox 9"/>
-          <p:cNvSpPr txBox="1"/>
-          <p:nvPr/>
-        </p:nvSpPr>
-        <p:spPr>
-          <a:xfrm>
-            <a:off x="3520440" y="1371600"/>
-            <a:ext cx="2377440" cy="2286000"/>
-          </a:xfrm>
-          <a:prstGeom prst="rect">
-            <a:avLst/>
-          </a:prstGeom>
-          <a:noFill/>
-        </p:spPr>
-        <p:txBody>
-          <a:bodyPr wrap="square">
-            <a:spAutoFit/>
-          </a:bodyPr>
-          <a:lstStyle/>
-          <a:p>
-            <a:pPr algn="ctr">
-              <a:spcAft>
-                <a:spcPts val="1000"/>
-              </a:spcAft>
-            </a:pPr>
-            <a:r>
-              <a:rPr sz="1400" b="1">
-                <a:solidFill>
-                  <a:srgbClr val="F2D59A"/>
-                </a:solidFill>
-                <a:latin typeface="Cinzel"/>
-                <a:cs typeface="Cinzel"/>
-                <a:ea typeface="Cinzel"/>
-              </a:rPr>
-              <a:t>MOEDAS</a:t>
-            </a:r>
-          </a:p>
-          <a:p>
-            <a:pPr algn="ctr">
-              <a:spcAft>
-                <a:spcPts val="200"/>
-              </a:spcAft>
-            </a:pPr>
-            <a:r>
-              <a:rPr sz="1200" b="0">
-                <a:solidFill>
-                  <a:srgbClr val="ECE1D1"/>
-                </a:solidFill>
-                <a:latin typeface="Georgia"/>
-                <a:cs typeface="Georgia"/>
-                <a:ea typeface="Georgia"/>
-              </a:rPr>
-              <a:t>Game Design</a:t>
-            </a:r>
-          </a:p>
-          <a:p>
-            <a:pPr algn="ctr">
-              <a:spcAft>
-                <a:spcPts val="200"/>
-              </a:spcAft>
-            </a:pPr>
-            <a:r>
-              <a:rPr sz="1200" b="0">
-                <a:solidFill>
-                  <a:srgbClr val="ECE1D1"/>
-                </a:solidFill>
-                <a:latin typeface="Georgia"/>
-                <a:cs typeface="Georgia"/>
-                <a:ea typeface="Georgia"/>
-              </a:rPr>
-              <a:t>cenas/moeda.tscn</a:t>
-            </a:r>
-          </a:p>
-          <a:p>
-            <a:pPr algn="ctr">
-              <a:spcAft>
-                <a:spcPts val="200"/>
-              </a:spcAft>
-            </a:pPr>
-            <a:r>
-              <a:rPr sz="1200" b="0">
-                <a:solidFill>
-                  <a:srgbClr val="ECE1D1"/>
-                </a:solidFill>
-                <a:latin typeface="Georgia"/>
-                <a:cs typeface="Georgia"/>
-                <a:ea typeface="Georgia"/>
-              </a:rPr>
-              <a:t>Area2D</a:t>
-            </a:r>
-          </a:p>
-        </p:txBody>
-      </p:sp>
-      <p:sp>
-        <p:nvSpPr>
-          <p:cNvPr id="11" name="Rounded Rectangle 10"/>
-          <p:cNvSpPr/>
-          <p:nvPr/>
-        </p:nvSpPr>
-        <p:spPr>
-          <a:xfrm>
-            <a:off x="6217920" y="1188720"/>
-            <a:ext cx="2743200" cy="2560320"/>
-          </a:xfrm>
-          <a:prstGeom prst="roundRect">
-            <a:avLst/>
-          </a:prstGeom>
-          <a:solidFill>
-            <a:srgbClr val="18121A"/>
-          </a:solidFill>
-          <a:ln w="15875">
-            <a:solidFill>
-              <a:srgbClr val="7A5C2E"/>
-            </a:solidFill>
-          </a:ln>
-        </p:spPr>
-        <p:style>
-          <a:lnRef idx="1">
-            <a:schemeClr val="accent1"/>
-          </a:lnRef>
-          <a:fillRef idx="3">
-            <a:schemeClr val="accent1"/>
-          </a:fillRef>
-          <a:effectRef idx="2">
-            <a:schemeClr val="accent1"/>
-          </a:effectRef>
-          <a:fontRef idx="minor">
-            <a:schemeClr val="lt1"/>
-          </a:fontRef>
-        </p:style>
-        <p:txBody>
-          <a:bodyPr rtlCol="0" anchor="ctr"/>
-          <a:lstStyle/>
-          <a:p>
-            <a:pPr algn="ctr"/>
-          </a:p>
-        </p:txBody>
-      </p:sp>
-      <p:sp>
-        <p:nvSpPr>
-          <p:cNvPr id="12" name="TextBox 11"/>
-          <p:cNvSpPr txBox="1"/>
-          <p:nvPr/>
-        </p:nvSpPr>
-        <p:spPr>
-          <a:xfrm>
-            <a:off x="6400800" y="1371600"/>
-            <a:ext cx="2377440" cy="2286000"/>
-          </a:xfrm>
-          <a:prstGeom prst="rect">
-            <a:avLst/>
-          </a:prstGeom>
-          <a:noFill/>
-        </p:spPr>
-        <p:txBody>
-          <a:bodyPr wrap="square">
-            <a:spAutoFit/>
-          </a:bodyPr>
-          <a:lstStyle/>
-          <a:p>
-            <a:pPr algn="ctr">
-              <a:spcAft>
-                <a:spcPts val="1000"/>
-              </a:spcAft>
-            </a:pPr>
-            <a:r>
-              <a:rPr sz="1400" b="1">
-                <a:solidFill>
-                  <a:srgbClr val="F2D59A"/>
-                </a:solidFill>
-                <a:latin typeface="Cinzel"/>
-                <a:cs typeface="Cinzel"/>
-                <a:ea typeface="Cinzel"/>
-              </a:rPr>
-              <a:t>PLAYER</a:t>
-            </a:r>
-          </a:p>
-          <a:p>
-            <a:pPr algn="ctr">
-              <a:spcAft>
-                <a:spcPts val="200"/>
-              </a:spcAft>
-            </a:pPr>
-            <a:r>
-              <a:rPr sz="1200" b="0">
-                <a:solidFill>
-                  <a:srgbClr val="ECE1D1"/>
-                </a:solidFill>
-                <a:latin typeface="Georgia"/>
-                <a:cs typeface="Georgia"/>
-                <a:ea typeface="Georgia"/>
-              </a:rPr>
-              <a:t>Programação</a:t>
-            </a:r>
-          </a:p>
-          <a:p>
-            <a:pPr algn="ctr">
-              <a:spcAft>
-                <a:spcPts val="200"/>
-              </a:spcAft>
-            </a:pPr>
-            <a:r>
-              <a:rPr sz="1200" b="0">
-                <a:solidFill>
-                  <a:srgbClr val="ECE1D1"/>
-                </a:solidFill>
-                <a:latin typeface="Georgia"/>
-                <a:cs typeface="Georgia"/>
-                <a:ea typeface="Georgia"/>
-              </a:rPr>
-              <a:t>cenas/player.tscn</a:t>
-            </a:r>
-          </a:p>
-          <a:p>
-            <a:pPr algn="ctr">
-              <a:spcAft>
-                <a:spcPts val="200"/>
-              </a:spcAft>
-            </a:pPr>
-            <a:r>
-              <a:rPr sz="1200" b="0">
-                <a:solidFill>
-                  <a:srgbClr val="ECE1D1"/>
-                </a:solidFill>
-                <a:latin typeface="Georgia"/>
-                <a:cs typeface="Georgia"/>
-                <a:ea typeface="Georgia"/>
-              </a:rPr>
-              <a:t>CharacterBody2D</a:t>
-            </a:r>
-          </a:p>
-        </p:txBody>
-      </p:sp>
-      <p:sp>
-        <p:nvSpPr>
-          <p:cNvPr id="13" name="TextBox 12"/>
+              <a:t>E2: Godot local · coleta · diário · Altar</a:t>
+            </a:r>
+          </a:p>
+        </p:txBody>
+      </p:sp>
+      <p:sp>
+        <p:nvSpPr>
+          <p:cNvPr id="9" name="TextBox 8"/>
           <p:cNvSpPr txBox="1"/>
           <p:nvPr/>
         </p:nvSpPr>
@@ -2138,7 +1842,7 @@
                 <a:cs typeface="Cinzel"/>
                 <a:ea typeface="Cinzel"/>
               </a:rPr>
-              <a:t>Quadro + cronograma</a:t>
+              <a:t>Estúdio → sala (dupla ou solo)</a:t>
             </a:r>
           </a:p>
         </p:txBody>
@@ -2151,8 +1855,8 @@
         </p:nvSpPr>
         <p:spPr>
           <a:xfrm>
-            <a:off x="502920" y="1051560"/>
-            <a:ext cx="8138160" cy="530352"/>
+            <a:off x="502920" y="1097280"/>
+            <a:ext cx="3931920" cy="2880360"/>
           </a:xfrm>
           <a:prstGeom prst="roundRect">
             <a:avLst/>
@@ -2196,8 +1900,8 @@
         </p:nvSpPr>
         <p:spPr>
           <a:xfrm>
-            <a:off x="777240" y="1143000"/>
-            <a:ext cx="7680960" cy="365760"/>
+            <a:off x="731520" y="1280160"/>
+            <a:ext cx="3474720" cy="2606040"/>
           </a:xfrm>
           <a:prstGeom prst="rect">
             <a:avLst/>
@@ -2210,13 +1914,31 @@
           </a:bodyPr>
           <a:lstStyle/>
           <a:p>
-            <a:pPr algn="l">
+            <a:pPr algn="ctr">
+              <a:spcAft>
+                <a:spcPts val="1000"/>
+              </a:spcAft>
+            </a:pPr>
+            <a:r>
+              <a:rPr sz="1600" b="1">
+                <a:solidFill>
+                  <a:srgbClr val="CFA759"/>
+                </a:solidFill>
+                <a:latin typeface="Cinzel"/>
+                <a:cs typeface="Cinzel"/>
+                <a:ea typeface="Cinzel"/>
+              </a:rPr>
+              <a:t>DUPLA</a:t>
+            </a:r>
+          </a:p>
+          <a:p>
+            <a:pPr algn="ctr">
               <a:spcAft>
                 <a:spcPts val="600"/>
               </a:spcAft>
             </a:pPr>
             <a:r>
-              <a:rPr sz="1500" b="0">
+              <a:rPr sz="1200" b="0">
                 <a:solidFill>
                   <a:srgbClr val="ECE1D1"/>
                 </a:solidFill>
@@ -2224,7 +1946,43 @@
                 <a:cs typeface="Georgia"/>
                 <a:ea typeface="Georgia"/>
               </a:rPr>
-              <a:t>◆  Equipe nomeada + produtor do dia.</a:t>
+              <a:t>Arte da moeda ↔ LibreSprite + moeda.tscn</a:t>
+            </a:r>
+          </a:p>
+          <a:p>
+            <a:pPr algn="ctr">
+              <a:spcAft>
+                <a:spcPts val="800"/>
+              </a:spcAft>
+            </a:pPr>
+            <a:r>
+              <a:rPr sz="1200" b="0">
+                <a:solidFill>
+                  <a:srgbClr val="ECE1D1"/>
+                </a:solidFill>
+                <a:latin typeface="Georgia"/>
+                <a:cs typeface="Georgia"/>
+                <a:ea typeface="Georgia"/>
+              </a:rPr>
+              <a:t>Programação ↔ Player + coleta</a:t>
+            </a:r>
+          </a:p>
+          <a:p>
+            <a:pPr algn="ctr">
+              <a:spcAft>
+                <a:spcPts val="600"/>
+              </a:spcAft>
+            </a:pPr>
+            <a:r>
+              <a:rPr sz="1200" b="0">
+                <a:solidFill>
+                  <a:srgbClr val="AB9C8A"/>
+                </a:solidFill>
+                <a:latin typeface="Georgia"/>
+                <a:cs typeface="Georgia"/>
+                <a:ea typeface="Georgia"/>
+              </a:rPr>
+              <a:t>Convite na própria Oficina.</a:t>
             </a:r>
           </a:p>
         </p:txBody>
@@ -2237,8 +1995,8 @@
         </p:nvSpPr>
         <p:spPr>
           <a:xfrm>
-            <a:off x="502920" y="1691639"/>
-            <a:ext cx="8138160" cy="530352"/>
+            <a:off x="4709160" y="1097280"/>
+            <a:ext cx="3931920" cy="2880360"/>
           </a:xfrm>
           <a:prstGeom prst="roundRect">
             <a:avLst/>
@@ -2282,8 +2040,8 @@
         </p:nvSpPr>
         <p:spPr>
           <a:xfrm>
-            <a:off x="777240" y="1783079"/>
-            <a:ext cx="7680960" cy="365760"/>
+            <a:off x="4937760" y="1280160"/>
+            <a:ext cx="3474720" cy="2606040"/>
           </a:xfrm>
           <a:prstGeom prst="rect">
             <a:avLst/>
@@ -2296,13 +2054,31 @@
           </a:bodyPr>
           <a:lstStyle/>
           <a:p>
-            <a:pPr algn="l">
+            <a:pPr algn="ctr">
+              <a:spcAft>
+                <a:spcPts val="1000"/>
+              </a:spcAft>
+            </a:pPr>
+            <a:r>
+              <a:rPr sz="1600" b="1">
+                <a:solidFill>
+                  <a:srgbClr val="CFA759"/>
+                </a:solidFill>
+                <a:latin typeface="Cinzel"/>
+                <a:cs typeface="Cinzel"/>
+                <a:ea typeface="Cinzel"/>
+              </a:rPr>
+              <a:t>INDIVIDUAL</a:t>
+            </a:r>
+          </a:p>
+          <a:p>
+            <a:pPr algn="ctr">
               <a:spcAft>
                 <a:spcPts val="600"/>
               </a:spcAft>
             </a:pPr>
             <a:r>
-              <a:rPr sz="1500" b="0">
+              <a:rPr sz="1200" b="0">
                 <a:solidFill>
                   <a:srgbClr val="ECE1D1"/>
                 </a:solidFill>
@@ -2310,85 +2086,17 @@
                 <a:cs typeface="Georgia"/>
                 <a:ea typeface="Georgia"/>
               </a:rPr>
-              <a:t>◆  Três entregas com responsável (cenário · moedas · player).</a:t>
-            </a:r>
-          </a:p>
-        </p:txBody>
-      </p:sp>
-      <p:sp>
-        <p:nvSpPr>
-          <p:cNvPr id="11" name="Rounded Rectangle 10"/>
-          <p:cNvSpPr/>
-          <p:nvPr/>
-        </p:nvSpPr>
-        <p:spPr>
-          <a:xfrm>
-            <a:off x="502920" y="2331720"/>
-            <a:ext cx="8138160" cy="530352"/>
-          </a:xfrm>
-          <a:prstGeom prst="roundRect">
-            <a:avLst/>
-          </a:prstGeom>
-          <a:solidFill>
-            <a:srgbClr val="18121A"/>
-          </a:solidFill>
-          <a:ln w="15875">
-            <a:solidFill>
-              <a:srgbClr val="7A5C2E"/>
-            </a:solidFill>
-          </a:ln>
-        </p:spPr>
-        <p:style>
-          <a:lnRef idx="1">
-            <a:schemeClr val="accent1"/>
-          </a:lnRef>
-          <a:fillRef idx="3">
-            <a:schemeClr val="accent1"/>
-          </a:fillRef>
-          <a:effectRef idx="2">
-            <a:schemeClr val="accent1"/>
-          </a:effectRef>
-          <a:fontRef idx="minor">
-            <a:schemeClr val="lt1"/>
-          </a:fontRef>
-        </p:style>
-        <p:txBody>
-          <a:bodyPr rtlCol="0" anchor="ctr"/>
-          <a:lstStyle/>
-          <a:p>
-            <a:pPr algn="ctr"/>
-          </a:p>
-        </p:txBody>
-      </p:sp>
-      <p:sp>
-        <p:nvSpPr>
-          <p:cNvPr id="12" name="TextBox 11"/>
-          <p:cNvSpPr txBox="1"/>
-          <p:nvPr/>
-        </p:nvSpPr>
-        <p:spPr>
-          <a:xfrm>
-            <a:off x="777240" y="2423160"/>
-            <a:ext cx="7680960" cy="365760"/>
-          </a:xfrm>
-          <a:prstGeom prst="rect">
-            <a:avLst/>
-          </a:prstGeom>
-          <a:noFill/>
-        </p:spPr>
-        <p:txBody>
-          <a:bodyPr wrap="square">
-            <a:spAutoFit/>
-          </a:bodyPr>
-          <a:lstStyle/>
-          <a:p>
-            <a:pPr algn="l">
-              <a:spcAft>
-                <a:spcPts val="600"/>
-              </a:spcAft>
-            </a:pPr>
-            <a:r>
-              <a:rPr sz="1500" b="0">
+              <a:t>Você faz os dois ofícios</a:t>
+            </a:r>
+          </a:p>
+          <a:p>
+            <a:pPr algn="ctr">
+              <a:spcAft>
+                <a:spcPts val="800"/>
+              </a:spcAft>
+            </a:pPr>
+            <a:r>
+              <a:rPr sz="1200" b="0">
                 <a:solidFill>
                   <a:srgbClr val="ECE1D1"/>
                 </a:solidFill>
@@ -2396,100 +2104,32 @@
                 <a:cs typeface="Georgia"/>
                 <a:ea typeface="Georgia"/>
               </a:rPr>
-              <a:t>◆  ≥3 itens FORA DO ESCOPO (cercado).</a:t>
-            </a:r>
-          </a:p>
-        </p:txBody>
-      </p:sp>
-      <p:sp>
-        <p:nvSpPr>
-          <p:cNvPr id="13" name="Rounded Rectangle 12"/>
-          <p:cNvSpPr/>
-          <p:nvPr/>
-        </p:nvSpPr>
-        <p:spPr>
-          <a:xfrm>
-            <a:off x="502920" y="2971799"/>
-            <a:ext cx="8138160" cy="530352"/>
-          </a:xfrm>
-          <a:prstGeom prst="roundRect">
-            <a:avLst/>
-          </a:prstGeom>
-          <a:solidFill>
-            <a:srgbClr val="18121A"/>
-          </a:solidFill>
-          <a:ln w="15875">
-            <a:solidFill>
-              <a:srgbClr val="7A5C2E"/>
-            </a:solidFill>
-          </a:ln>
-        </p:spPr>
-        <p:style>
-          <a:lnRef idx="1">
-            <a:schemeClr val="accent1"/>
-          </a:lnRef>
-          <a:fillRef idx="3">
-            <a:schemeClr val="accent1"/>
-          </a:fillRef>
-          <a:effectRef idx="2">
-            <a:schemeClr val="accent1"/>
-          </a:effectRef>
-          <a:fontRef idx="minor">
-            <a:schemeClr val="lt1"/>
-          </a:fontRef>
-        </p:style>
-        <p:txBody>
-          <a:bodyPr rtlCol="0" anchor="ctr"/>
-          <a:lstStyle/>
-          <a:p>
-            <a:pPr algn="ctr"/>
-          </a:p>
-        </p:txBody>
-      </p:sp>
-      <p:sp>
-        <p:nvSpPr>
-          <p:cNvPr id="14" name="TextBox 13"/>
-          <p:cNvSpPr txBox="1"/>
-          <p:nvPr/>
-        </p:nvSpPr>
-        <p:spPr>
-          <a:xfrm>
-            <a:off x="777240" y="3063239"/>
-            <a:ext cx="7680960" cy="365760"/>
-          </a:xfrm>
-          <a:prstGeom prst="rect">
-            <a:avLst/>
-          </a:prstGeom>
-          <a:noFill/>
-        </p:spPr>
-        <p:txBody>
-          <a:bodyPr wrap="square">
-            <a:spAutoFit/>
-          </a:bodyPr>
-          <a:lstStyle/>
-          <a:p>
-            <a:pPr algn="l">
+              <a:t>(arte no E1 · Godot no E2).</a:t>
+            </a:r>
+          </a:p>
+          <a:p>
+            <a:pPr algn="ctr">
               <a:spcAft>
                 <a:spcPts val="600"/>
               </a:spcAft>
             </a:pPr>
             <a:r>
-              <a:rPr sz="1500" b="0">
-                <a:solidFill>
-                  <a:srgbClr val="ECE1D1"/>
+              <a:rPr sz="1200" b="0">
+                <a:solidFill>
+                  <a:srgbClr val="AB9C8A"/>
                 </a:solidFill>
                 <a:latin typeface="Georgia"/>
                 <a:cs typeface="Georgia"/>
                 <a:ea typeface="Georgia"/>
               </a:rPr>
-              <a:t>◆  ≥3 tarefas no cronograma com dono e alvo (07 / 08+).</a:t>
-            </a:r>
-          </a:p>
-        </p:txBody>
-      </p:sp>
-      <p:sp>
-        <p:nvSpPr>
-          <p:cNvPr id="15" name="TextBox 14"/>
+              <a:t>Só 1 ou 2 pessoas — sem trio.</a:t>
+            </a:r>
+          </a:p>
+        </p:txBody>
+      </p:sp>
+      <p:sp>
+        <p:nvSpPr>
+          <p:cNvPr id="11" name="TextBox 10"/>
           <p:cNvSpPr txBox="1"/>
           <p:nvPr/>
         </p:nvSpPr>
@@ -2767,7 +2407,7 @@
                 <a:cs typeface="Cinzel"/>
                 <a:ea typeface="Cinzel"/>
               </a:rPr>
-              <a:t>Pastas Godot (contrato)</a:t>
+              <a:t>Ofícios da sala</a:t>
             </a:r>
           </a:p>
         </p:txBody>
@@ -2780,8 +2420,8 @@
         </p:nvSpPr>
         <p:spPr>
           <a:xfrm>
-            <a:off x="502920" y="1051560"/>
-            <a:ext cx="8138160" cy="2971800"/>
+            <a:off x="457200" y="1188720"/>
+            <a:ext cx="2743200" cy="2560320"/>
           </a:xfrm>
           <a:prstGeom prst="roundRect">
             <a:avLst/>
@@ -2825,8 +2465,8 @@
         </p:nvSpPr>
         <p:spPr>
           <a:xfrm>
-            <a:off x="822960" y="1234440"/>
-            <a:ext cx="7498079" cy="2651760"/>
+            <a:off x="640080" y="1371600"/>
+            <a:ext cx="2377440" cy="2286000"/>
           </a:xfrm>
           <a:prstGeom prst="rect">
             <a:avLst/>
@@ -2839,13 +2479,13 @@
           </a:bodyPr>
           <a:lstStyle/>
           <a:p>
-            <a:pPr algn="l">
-              <a:spcAft>
-                <a:spcPts val="600"/>
-              </a:spcAft>
-            </a:pPr>
-            <a:r>
-              <a:rPr sz="1400" b="1">
+            <a:pPr algn="ctr">
+              <a:spcAft>
+                <a:spcPts val="1000"/>
+              </a:spcAft>
+            </a:pPr>
+            <a:r>
+              <a:rPr sz="1300" b="1">
                 <a:solidFill>
                   <a:srgbClr val="F2D59A"/>
                 </a:solidFill>
@@ -2853,17 +2493,17 @@
                 <a:cs typeface="Cinzel"/>
                 <a:ea typeface="Cinzel"/>
               </a:rPr>
-              <a:t>LabirintoDeMoedas/</a:t>
-            </a:r>
-          </a:p>
-          <a:p>
-            <a:pPr algn="l">
-              <a:spcAft>
-                <a:spcPts val="400"/>
-              </a:spcAft>
-            </a:pPr>
-            <a:r>
-              <a:rPr sz="1300" b="0">
+              <a:t>ARTE DA MOEDA</a:t>
+            </a:r>
+          </a:p>
+          <a:p>
+            <a:pPr algn="ctr">
+              <a:spcAft>
+                <a:spcPts val="200"/>
+              </a:spcAft>
+            </a:pPr>
+            <a:r>
+              <a:rPr sz="1200" b="0">
                 <a:solidFill>
                   <a:srgbClr val="ECE1D1"/>
                 </a:solidFill>
@@ -2871,17 +2511,17 @@
                 <a:cs typeface="Georgia"/>
                 <a:ea typeface="Georgia"/>
               </a:rPr>
-              <a:t>cenas/  player.tscn · moeda.tscn · cenario.tscn</a:t>
-            </a:r>
-          </a:p>
-          <a:p>
-            <a:pPr algn="l">
-              <a:spcAft>
-                <a:spcPts val="1000"/>
-              </a:spcAft>
-            </a:pPr>
-            <a:r>
-              <a:rPr sz="1300" b="0">
+              <a:t>E1: LibreSprite</a:t>
+            </a:r>
+          </a:p>
+          <a:p>
+            <a:pPr algn="ctr">
+              <a:spcAft>
+                <a:spcPts val="200"/>
+              </a:spcAft>
+            </a:pPr>
+            <a:r>
+              <a:rPr sz="1200" b="0">
                 <a:solidFill>
                   <a:srgbClr val="ECE1D1"/>
                 </a:solidFill>
@@ -2889,32 +2529,312 @@
                 <a:cs typeface="Georgia"/>
                 <a:ea typeface="Georgia"/>
               </a:rPr>
-              <a:t>sprites/ · audio/ · scripts/ · ui/</a:t>
-            </a:r>
-          </a:p>
-          <a:p>
-            <a:pPr algn="l">
-              <a:spcAft>
-                <a:spcPts val="600"/>
+              <a:t>E2: moeda.tscn</a:t>
+            </a:r>
+          </a:p>
+          <a:p>
+            <a:pPr algn="ctr">
+              <a:spcAft>
+                <a:spcPts val="200"/>
               </a:spcAft>
             </a:pPr>
             <a:r>
               <a:rPr sz="1200" b="0">
                 <a:solidFill>
-                  <a:srgbClr val="AB9C8A"/>
+                  <a:srgbClr val="ECE1D1"/>
                 </a:solidFill>
                 <a:latin typeface="Georgia"/>
                 <a:cs typeface="Georgia"/>
                 <a:ea typeface="Georgia"/>
               </a:rPr>
-              <a:t>Projeto NOVO · stubs só · sem movimento/coleta hoje.</a:t>
-            </a:r>
-          </a:p>
-        </p:txBody>
-      </p:sp>
-      <p:sp>
-        <p:nvSpPr>
-          <p:cNvPr id="9" name="TextBox 8"/>
+              <a:t>+ Area2D</a:t>
+            </a:r>
+          </a:p>
+        </p:txBody>
+      </p:sp>
+      <p:sp>
+        <p:nvSpPr>
+          <p:cNvPr id="9" name="Rounded Rectangle 8"/>
+          <p:cNvSpPr/>
+          <p:nvPr/>
+        </p:nvSpPr>
+        <p:spPr>
+          <a:xfrm>
+            <a:off x="3337560" y="1188720"/>
+            <a:ext cx="2743200" cy="2560320"/>
+          </a:xfrm>
+          <a:prstGeom prst="roundRect">
+            <a:avLst/>
+          </a:prstGeom>
+          <a:solidFill>
+            <a:srgbClr val="18121A"/>
+          </a:solidFill>
+          <a:ln w="15875">
+            <a:solidFill>
+              <a:srgbClr val="7A5C2E"/>
+            </a:solidFill>
+          </a:ln>
+        </p:spPr>
+        <p:style>
+          <a:lnRef idx="1">
+            <a:schemeClr val="accent1"/>
+          </a:lnRef>
+          <a:fillRef idx="3">
+            <a:schemeClr val="accent1"/>
+          </a:fillRef>
+          <a:effectRef idx="2">
+            <a:schemeClr val="accent1"/>
+          </a:effectRef>
+          <a:fontRef idx="minor">
+            <a:schemeClr val="lt1"/>
+          </a:fontRef>
+        </p:style>
+        <p:txBody>
+          <a:bodyPr rtlCol="0" anchor="ctr"/>
+          <a:lstStyle/>
+          <a:p>
+            <a:pPr algn="ctr"/>
+          </a:p>
+        </p:txBody>
+      </p:sp>
+      <p:sp>
+        <p:nvSpPr>
+          <p:cNvPr id="10" name="TextBox 9"/>
+          <p:cNvSpPr txBox="1"/>
+          <p:nvPr/>
+        </p:nvSpPr>
+        <p:spPr>
+          <a:xfrm>
+            <a:off x="3520440" y="1371600"/>
+            <a:ext cx="2377440" cy="2286000"/>
+          </a:xfrm>
+          <a:prstGeom prst="rect">
+            <a:avLst/>
+          </a:prstGeom>
+          <a:noFill/>
+        </p:spPr>
+        <p:txBody>
+          <a:bodyPr wrap="square">
+            <a:spAutoFit/>
+          </a:bodyPr>
+          <a:lstStyle/>
+          <a:p>
+            <a:pPr algn="ctr">
+              <a:spcAft>
+                <a:spcPts val="1000"/>
+              </a:spcAft>
+            </a:pPr>
+            <a:r>
+              <a:rPr sz="1300" b="1">
+                <a:solidFill>
+                  <a:srgbClr val="F2D59A"/>
+                </a:solidFill>
+                <a:latin typeface="Cinzel"/>
+                <a:cs typeface="Cinzel"/>
+                <a:ea typeface="Cinzel"/>
+              </a:rPr>
+              <a:t>PROGRAMAÇÃO</a:t>
+            </a:r>
+          </a:p>
+          <a:p>
+            <a:pPr algn="ctr">
+              <a:spcAft>
+                <a:spcPts val="200"/>
+              </a:spcAft>
+            </a:pPr>
+            <a:r>
+              <a:rPr sz="1200" b="0">
+                <a:solidFill>
+                  <a:srgbClr val="ECE1D1"/>
+                </a:solidFill>
+                <a:latin typeface="Georgia"/>
+                <a:cs typeface="Georgia"/>
+                <a:ea typeface="Georgia"/>
+              </a:rPr>
+              <a:t>E2: Player (M1)</a:t>
+            </a:r>
+          </a:p>
+          <a:p>
+            <a:pPr algn="ctr">
+              <a:spcAft>
+                <a:spcPts val="200"/>
+              </a:spcAft>
+            </a:pPr>
+            <a:r>
+              <a:rPr sz="1200" b="0">
+                <a:solidFill>
+                  <a:srgbClr val="ECE1D1"/>
+                </a:solidFill>
+                <a:latin typeface="Georgia"/>
+                <a:cs typeface="Georgia"/>
+                <a:ea typeface="Georgia"/>
+              </a:rPr>
+              <a:t>body_entered</a:t>
+            </a:r>
+          </a:p>
+          <a:p>
+            <a:pPr algn="ctr">
+              <a:spcAft>
+                <a:spcPts val="200"/>
+              </a:spcAft>
+            </a:pPr>
+            <a:r>
+              <a:rPr sz="1200" b="0">
+                <a:solidFill>
+                  <a:srgbClr val="ECE1D1"/>
+                </a:solidFill>
+                <a:latin typeface="Georgia"/>
+                <a:cs typeface="Georgia"/>
+                <a:ea typeface="Georgia"/>
+              </a:rPr>
+              <a:t>coleta / conta 1</a:t>
+            </a:r>
+          </a:p>
+        </p:txBody>
+      </p:sp>
+      <p:sp>
+        <p:nvSpPr>
+          <p:cNvPr id="11" name="Rounded Rectangle 10"/>
+          <p:cNvSpPr/>
+          <p:nvPr/>
+        </p:nvSpPr>
+        <p:spPr>
+          <a:xfrm>
+            <a:off x="6217920" y="1188720"/>
+            <a:ext cx="2743200" cy="2560320"/>
+          </a:xfrm>
+          <a:prstGeom prst="roundRect">
+            <a:avLst/>
+          </a:prstGeom>
+          <a:solidFill>
+            <a:srgbClr val="18121A"/>
+          </a:solidFill>
+          <a:ln w="15875">
+            <a:solidFill>
+              <a:srgbClr val="7A5C2E"/>
+            </a:solidFill>
+          </a:ln>
+        </p:spPr>
+        <p:style>
+          <a:lnRef idx="1">
+            <a:schemeClr val="accent1"/>
+          </a:lnRef>
+          <a:fillRef idx="3">
+            <a:schemeClr val="accent1"/>
+          </a:fillRef>
+          <a:effectRef idx="2">
+            <a:schemeClr val="accent1"/>
+          </a:effectRef>
+          <a:fontRef idx="minor">
+            <a:schemeClr val="lt1"/>
+          </a:fontRef>
+        </p:style>
+        <p:txBody>
+          <a:bodyPr rtlCol="0" anchor="ctr"/>
+          <a:lstStyle/>
+          <a:p>
+            <a:pPr algn="ctr"/>
+          </a:p>
+        </p:txBody>
+      </p:sp>
+      <p:sp>
+        <p:nvSpPr>
+          <p:cNvPr id="12" name="TextBox 11"/>
+          <p:cNvSpPr txBox="1"/>
+          <p:nvPr/>
+        </p:nvSpPr>
+        <p:spPr>
+          <a:xfrm>
+            <a:off x="6400800" y="1371600"/>
+            <a:ext cx="2377440" cy="2286000"/>
+          </a:xfrm>
+          <a:prstGeom prst="rect">
+            <a:avLst/>
+          </a:prstGeom>
+          <a:noFill/>
+        </p:spPr>
+        <p:txBody>
+          <a:bodyPr wrap="square">
+            <a:spAutoFit/>
+          </a:bodyPr>
+          <a:lstStyle/>
+          <a:p>
+            <a:pPr algn="ctr">
+              <a:spcAft>
+                <a:spcPts val="1000"/>
+              </a:spcAft>
+            </a:pPr>
+            <a:r>
+              <a:rPr sz="1300" b="1">
+                <a:solidFill>
+                  <a:srgbClr val="F2D59A"/>
+                </a:solidFill>
+                <a:latin typeface="Cinzel"/>
+                <a:cs typeface="Cinzel"/>
+                <a:ea typeface="Cinzel"/>
+              </a:rPr>
+              <a:t>SOLO</a:t>
+            </a:r>
+          </a:p>
+          <a:p>
+            <a:pPr algn="ctr">
+              <a:spcAft>
+                <a:spcPts val="200"/>
+              </a:spcAft>
+            </a:pPr>
+            <a:r>
+              <a:rPr sz="1200" b="0">
+                <a:solidFill>
+                  <a:srgbClr val="ECE1D1"/>
+                </a:solidFill>
+                <a:latin typeface="Georgia"/>
+                <a:cs typeface="Georgia"/>
+                <a:ea typeface="Georgia"/>
+              </a:rPr>
+              <a:t>Os dois ofícios</a:t>
+            </a:r>
+          </a:p>
+          <a:p>
+            <a:pPr algn="ctr">
+              <a:spcAft>
+                <a:spcPts val="200"/>
+              </a:spcAft>
+            </a:pPr>
+            <a:r>
+              <a:rPr sz="1200" b="0">
+                <a:solidFill>
+                  <a:srgbClr val="ECE1D1"/>
+                </a:solidFill>
+                <a:latin typeface="Georgia"/>
+                <a:cs typeface="Georgia"/>
+                <a:ea typeface="Georgia"/>
+              </a:rPr>
+              <a:t>arte no E1</a:t>
+            </a:r>
+          </a:p>
+          <a:p>
+            <a:pPr algn="ctr">
+              <a:spcAft>
+                <a:spcPts val="200"/>
+              </a:spcAft>
+            </a:pPr>
+            <a:r>
+              <a:rPr sz="1200" b="0">
+                <a:solidFill>
+                  <a:srgbClr val="ECE1D1"/>
+                </a:solidFill>
+                <a:latin typeface="Georgia"/>
+                <a:cs typeface="Georgia"/>
+                <a:ea typeface="Georgia"/>
+              </a:rPr>
+              <a:t>Godot no E2</a:t>
+            </a:r>
+          </a:p>
+        </p:txBody>
+      </p:sp>
+      <p:sp>
+        <p:nvSpPr>
+          <p:cNvPr id="13" name="TextBox 12"/>
           <p:cNvSpPr txBox="1"/>
           <p:nvPr/>
         </p:nvSpPr>
@@ -3192,7 +3112,7 @@
                 <a:cs typeface="Cinzel"/>
                 <a:ea typeface="Cinzel"/>
               </a:rPr>
-              <a:t>Pasta compartilhada</a:t>
+              <a:t>Diário compartilhado</a:t>
             </a:r>
           </a:p>
         </p:txBody>
@@ -3205,8 +3125,8 @@
         </p:nvSpPr>
         <p:spPr>
           <a:xfrm>
-            <a:off x="502920" y="960120"/>
-            <a:ext cx="8138160" cy="411480"/>
+            <a:off x="502920" y="1051560"/>
+            <a:ext cx="8138160" cy="530352"/>
           </a:xfrm>
           <a:prstGeom prst="roundRect">
             <a:avLst/>
@@ -3250,8 +3170,8 @@
         </p:nvSpPr>
         <p:spPr>
           <a:xfrm>
-            <a:off x="731520" y="1005840"/>
-            <a:ext cx="7680960" cy="320040"/>
+            <a:off x="777240" y="1143000"/>
+            <a:ext cx="7680960" cy="365760"/>
           </a:xfrm>
           <a:prstGeom prst="rect">
             <a:avLst/>
@@ -3270,7 +3190,7 @@
               </a:spcAft>
             </a:pPr>
             <a:r>
-              <a:rPr sz="1200" b="0">
+              <a:rPr sz="1500" b="0">
                 <a:solidFill>
                   <a:srgbClr val="ECE1D1"/>
                 </a:solidFill>
@@ -3278,7 +3198,7 @@
                 <a:cs typeface="Georgia"/>
                 <a:ea typeface="Georgia"/>
               </a:rPr>
-              <a:t>◆  Uma pasta: LabirintoDeMoedas_&lt;NomeEquipe&gt;.</a:t>
+              <a:t>◆  Substitui anotações + síntese — um texto só.</a:t>
             </a:r>
           </a:p>
         </p:txBody>
@@ -3291,8 +3211,8 @@
         </p:nvSpPr>
         <p:spPr>
           <a:xfrm>
-            <a:off x="502920" y="1435608"/>
-            <a:ext cx="8138160" cy="411480"/>
+            <a:off x="502920" y="1691639"/>
+            <a:ext cx="8138160" cy="530352"/>
           </a:xfrm>
           <a:prstGeom prst="roundRect">
             <a:avLst/>
@@ -3336,8 +3256,8 @@
         </p:nvSpPr>
         <p:spPr>
           <a:xfrm>
-            <a:off x="731520" y="1481328"/>
-            <a:ext cx="7680960" cy="320040"/>
+            <a:off x="777240" y="1783079"/>
+            <a:ext cx="7680960" cy="365760"/>
           </a:xfrm>
           <a:prstGeom prst="rect">
             <a:avLst/>
@@ -3356,7 +3276,7 @@
               </a:spcAft>
             </a:pPr>
             <a:r>
-              <a:rPr sz="1200" b="0">
+              <a:rPr sz="1500" b="0">
                 <a:solidFill>
                   <a:srgbClr val="ECE1D1"/>
                 </a:solidFill>
@@ -3364,7 +3284,7 @@
                 <a:cs typeface="Georgia"/>
                 <a:ea typeface="Georgia"/>
               </a:rPr>
-              <a:t>◆  Avisar no grupo antes de editar uma .tscn.</a:t>
+              <a:t>◆  Em dupla: os dois editam o mesmo diário (autosave + sync).</a:t>
             </a:r>
           </a:p>
         </p:txBody>
@@ -3377,8 +3297,8 @@
         </p:nvSpPr>
         <p:spPr>
           <a:xfrm>
-            <a:off x="502920" y="1911095"/>
-            <a:ext cx="8138160" cy="411480"/>
+            <a:off x="502920" y="2331720"/>
+            <a:ext cx="8138160" cy="530352"/>
           </a:xfrm>
           <a:prstGeom prst="roundRect">
             <a:avLst/>
@@ -3422,8 +3342,8 @@
         </p:nvSpPr>
         <p:spPr>
           <a:xfrm>
-            <a:off x="731520" y="1956815"/>
-            <a:ext cx="7680960" cy="320040"/>
+            <a:off x="777240" y="2423160"/>
+            <a:ext cx="7680960" cy="365760"/>
           </a:xfrm>
           <a:prstGeom prst="rect">
             <a:avLst/>
@@ -3442,7 +3362,7 @@
               </a:spcAft>
             </a:pPr>
             <a:r>
-              <a:rPr sz="1200" b="0">
+              <a:rPr sz="1500" b="0">
                 <a:solidFill>
                   <a:srgbClr val="ECE1D1"/>
                 </a:solidFill>
@@ -3450,7 +3370,7 @@
                 <a:cs typeface="Georgia"/>
                 <a:ea typeface="Georgia"/>
               </a:rPr>
-              <a:t>◆  Um dono por cena nesta fase.</a:t>
+              <a:t>◆  Seções: ofícios · entregas · cercado · versionamento.</a:t>
             </a:r>
           </a:p>
         </p:txBody>
@@ -3463,8 +3383,8 @@
         </p:nvSpPr>
         <p:spPr>
           <a:xfrm>
-            <a:off x="502920" y="2386584"/>
-            <a:ext cx="8138160" cy="411480"/>
+            <a:off x="502920" y="2971799"/>
+            <a:ext cx="8138160" cy="530352"/>
           </a:xfrm>
           <a:prstGeom prst="roundRect">
             <a:avLst/>
@@ -3508,8 +3428,8 @@
         </p:nvSpPr>
         <p:spPr>
           <a:xfrm>
-            <a:off x="731520" y="2432304"/>
-            <a:ext cx="7680960" cy="320040"/>
+            <a:off x="777240" y="3063239"/>
+            <a:ext cx="7680960" cy="365760"/>
           </a:xfrm>
           <a:prstGeom prst="rect">
             <a:avLst/>
@@ -3528,7 +3448,7 @@
               </a:spcAft>
             </a:pPr>
             <a:r>
-              <a:rPr sz="1200" b="0">
+              <a:rPr sz="1500" b="0">
                 <a:solidFill>
                   <a:srgbClr val="ECE1D1"/>
                 </a:solidFill>
@@ -3536,186 +3456,14 @@
                 <a:cs typeface="Georgia"/>
                 <a:ea typeface="Georgia"/>
               </a:rPr>
-              <a:t>◆  ZIP datado no fim: backup_AAAA-MM-DD_HHMM.zip.</a:t>
-            </a:r>
-          </a:p>
-        </p:txBody>
-      </p:sp>
-      <p:sp>
-        <p:nvSpPr>
-          <p:cNvPr id="15" name="Rounded Rectangle 14"/>
-          <p:cNvSpPr/>
-          <p:nvPr/>
-        </p:nvSpPr>
-        <p:spPr>
-          <a:xfrm>
-            <a:off x="502920" y="2862072"/>
-            <a:ext cx="8138160" cy="411480"/>
-          </a:xfrm>
-          <a:prstGeom prst="roundRect">
-            <a:avLst/>
-          </a:prstGeom>
-          <a:solidFill>
-            <a:srgbClr val="18121A"/>
-          </a:solidFill>
-          <a:ln w="15875">
-            <a:solidFill>
-              <a:srgbClr val="7A5C2E"/>
-            </a:solidFill>
-          </a:ln>
-        </p:spPr>
-        <p:style>
-          <a:lnRef idx="1">
-            <a:schemeClr val="accent1"/>
-          </a:lnRef>
-          <a:fillRef idx="3">
-            <a:schemeClr val="accent1"/>
-          </a:fillRef>
-          <a:effectRef idx="2">
-            <a:schemeClr val="accent1"/>
-          </a:effectRef>
-          <a:fontRef idx="minor">
-            <a:schemeClr val="lt1"/>
-          </a:fontRef>
-        </p:style>
-        <p:txBody>
-          <a:bodyPr rtlCol="0" anchor="ctr"/>
-          <a:lstStyle/>
-          <a:p>
-            <a:pPr algn="ctr"/>
-          </a:p>
-        </p:txBody>
-      </p:sp>
-      <p:sp>
-        <p:nvSpPr>
-          <p:cNvPr id="16" name="TextBox 15"/>
-          <p:cNvSpPr txBox="1"/>
-          <p:nvPr/>
-        </p:nvSpPr>
-        <p:spPr>
-          <a:xfrm>
-            <a:off x="731520" y="2907792"/>
-            <a:ext cx="7680960" cy="320040"/>
-          </a:xfrm>
-          <a:prstGeom prst="rect">
-            <a:avLst/>
-          </a:prstGeom>
-          <a:noFill/>
-        </p:spPr>
-        <p:txBody>
-          <a:bodyPr wrap="square">
-            <a:spAutoFit/>
-          </a:bodyPr>
-          <a:lstStyle/>
-          <a:p>
-            <a:pPr algn="l">
-              <a:spcAft>
-                <a:spcPts val="600"/>
-              </a:spcAft>
-            </a:pPr>
-            <a:r>
-              <a:rPr sz="1200" b="0">
-                <a:solidFill>
-                  <a:srgbClr val="ECE1D1"/>
-                </a:solidFill>
-                <a:latin typeface="Georgia"/>
-                <a:cs typeface="Georgia"/>
-                <a:ea typeface="Georgia"/>
-              </a:rPr>
-              <a:t>◆  Não sync obsessivo de .godot/ (cache local).</a:t>
-            </a:r>
-          </a:p>
-        </p:txBody>
-      </p:sp>
-      <p:sp>
-        <p:nvSpPr>
-          <p:cNvPr id="17" name="Rounded Rectangle 16"/>
-          <p:cNvSpPr/>
-          <p:nvPr/>
-        </p:nvSpPr>
-        <p:spPr>
-          <a:xfrm>
-            <a:off x="502920" y="3337560"/>
-            <a:ext cx="8138160" cy="411480"/>
-          </a:xfrm>
-          <a:prstGeom prst="roundRect">
-            <a:avLst/>
-          </a:prstGeom>
-          <a:solidFill>
-            <a:srgbClr val="18121A"/>
-          </a:solidFill>
-          <a:ln w="15875">
-            <a:solidFill>
-              <a:srgbClr val="7A5C2E"/>
-            </a:solidFill>
-          </a:ln>
-        </p:spPr>
-        <p:style>
-          <a:lnRef idx="1">
-            <a:schemeClr val="accent1"/>
-          </a:lnRef>
-          <a:fillRef idx="3">
-            <a:schemeClr val="accent1"/>
-          </a:fillRef>
-          <a:effectRef idx="2">
-            <a:schemeClr val="accent1"/>
-          </a:effectRef>
-          <a:fontRef idx="minor">
-            <a:schemeClr val="lt1"/>
-          </a:fontRef>
-        </p:style>
-        <p:txBody>
-          <a:bodyPr rtlCol="0" anchor="ctr"/>
-          <a:lstStyle/>
-          <a:p>
-            <a:pPr algn="ctr"/>
-          </a:p>
-        </p:txBody>
-      </p:sp>
-      <p:sp>
-        <p:nvSpPr>
-          <p:cNvPr id="18" name="TextBox 17"/>
-          <p:cNvSpPr txBox="1"/>
-          <p:nvPr/>
-        </p:nvSpPr>
-        <p:spPr>
-          <a:xfrm>
-            <a:off x="731520" y="3383280"/>
-            <a:ext cx="7680960" cy="320040"/>
-          </a:xfrm>
-          <a:prstGeom prst="rect">
-            <a:avLst/>
-          </a:prstGeom>
-          <a:noFill/>
-        </p:spPr>
-        <p:txBody>
-          <a:bodyPr wrap="square">
-            <a:spAutoFit/>
-          </a:bodyPr>
-          <a:lstStyle/>
-          <a:p>
-            <a:pPr algn="l">
-              <a:spcAft>
-                <a:spcPts val="600"/>
-              </a:spcAft>
-            </a:pPr>
-            <a:r>
-              <a:rPr sz="1200" b="0">
-                <a:solidFill>
-                  <a:srgbClr val="ECE1D1"/>
-                </a:solidFill>
-                <a:latin typeface="Georgia"/>
-                <a:cs typeface="Georgia"/>
-                <a:ea typeface="Georgia"/>
-              </a:rPr>
-              <a:t>◆  Git existe — só teaser; não é obrigatório hoje.</a:t>
-            </a:r>
-          </a:p>
-        </p:txBody>
-      </p:sp>
-      <p:sp>
-        <p:nvSpPr>
-          <p:cNvPr id="19" name="TextBox 18"/>
+              <a:t>◆  Cada aluno finaliza o próprio envio no Encontro 2.</a:t>
+            </a:r>
+          </a:p>
+        </p:txBody>
+      </p:sp>
+      <p:sp>
+        <p:nvSpPr>
+          <p:cNvPr id="15" name="TextBox 14"/>
           <p:cNvSpPr txBox="1"/>
           <p:nvPr/>
         </p:nvSpPr>
@@ -3993,7 +3741,7 @@
                 <a:cs typeface="Cinzel"/>
                 <a:ea typeface="Cinzel"/>
               </a:rPr>
-              <a:t>Checklist do artefato</a:t>
+              <a:t>Pastas Godot (contrato)</a:t>
             </a:r>
           </a:p>
         </p:txBody>
@@ -4006,8 +3754,8 @@
         </p:nvSpPr>
         <p:spPr>
           <a:xfrm>
-            <a:off x="502920" y="960120"/>
-            <a:ext cx="8138160" cy="411480"/>
+            <a:off x="502920" y="1051560"/>
+            <a:ext cx="8138160" cy="2971800"/>
           </a:xfrm>
           <a:prstGeom prst="roundRect">
             <a:avLst/>
@@ -4051,8 +3799,8 @@
         </p:nvSpPr>
         <p:spPr>
           <a:xfrm>
-            <a:off x="731520" y="1005840"/>
-            <a:ext cx="7680960" cy="320040"/>
+            <a:off x="822960" y="1234440"/>
+            <a:ext cx="7498079" cy="2651760"/>
           </a:xfrm>
           <a:prstGeom prst="rect">
             <a:avLst/>
@@ -4071,7 +3819,25 @@
               </a:spcAft>
             </a:pPr>
             <a:r>
-              <a:rPr sz="1200" b="0">
+              <a:rPr sz="1400" b="1">
+                <a:solidFill>
+                  <a:srgbClr val="F2D59A"/>
+                </a:solidFill>
+                <a:latin typeface="Cinzel"/>
+                <a:cs typeface="Cinzel"/>
+                <a:ea typeface="Cinzel"/>
+              </a:rPr>
+              <a:t>LabirintoDeMoedas/</a:t>
+            </a:r>
+          </a:p>
+          <a:p>
+            <a:pPr algn="l">
+              <a:spcAft>
+                <a:spcPts val="400"/>
+              </a:spcAft>
+            </a:pPr>
+            <a:r>
+              <a:rPr sz="1300" b="0">
                 <a:solidFill>
                   <a:srgbClr val="ECE1D1"/>
                 </a:solidFill>
@@ -4079,85 +3845,17 @@
                 <a:cs typeface="Georgia"/>
                 <a:ea typeface="Georgia"/>
               </a:rPr>
-              <a:t>□  Equipe de 3 + produtor do dia.</a:t>
-            </a:r>
-          </a:p>
-        </p:txBody>
-      </p:sp>
-      <p:sp>
-        <p:nvSpPr>
-          <p:cNvPr id="9" name="Rounded Rectangle 8"/>
-          <p:cNvSpPr/>
-          <p:nvPr/>
-        </p:nvSpPr>
-        <p:spPr>
-          <a:xfrm>
-            <a:off x="502920" y="1435608"/>
-            <a:ext cx="8138160" cy="411480"/>
-          </a:xfrm>
-          <a:prstGeom prst="roundRect">
-            <a:avLst/>
-          </a:prstGeom>
-          <a:solidFill>
-            <a:srgbClr val="18121A"/>
-          </a:solidFill>
-          <a:ln w="15875">
-            <a:solidFill>
-              <a:srgbClr val="7A5C2E"/>
-            </a:solidFill>
-          </a:ln>
-        </p:spPr>
-        <p:style>
-          <a:lnRef idx="1">
-            <a:schemeClr val="accent1"/>
-          </a:lnRef>
-          <a:fillRef idx="3">
-            <a:schemeClr val="accent1"/>
-          </a:fillRef>
-          <a:effectRef idx="2">
-            <a:schemeClr val="accent1"/>
-          </a:effectRef>
-          <a:fontRef idx="minor">
-            <a:schemeClr val="lt1"/>
-          </a:fontRef>
-        </p:style>
-        <p:txBody>
-          <a:bodyPr rtlCol="0" anchor="ctr"/>
-          <a:lstStyle/>
-          <a:p>
-            <a:pPr algn="ctr"/>
-          </a:p>
-        </p:txBody>
-      </p:sp>
-      <p:sp>
-        <p:nvSpPr>
-          <p:cNvPr id="10" name="TextBox 9"/>
-          <p:cNvSpPr txBox="1"/>
-          <p:nvPr/>
-        </p:nvSpPr>
-        <p:spPr>
-          <a:xfrm>
-            <a:off x="731520" y="1481328"/>
-            <a:ext cx="7680960" cy="320040"/>
-          </a:xfrm>
-          <a:prstGeom prst="rect">
-            <a:avLst/>
-          </a:prstGeom>
-          <a:noFill/>
-        </p:spPr>
-        <p:txBody>
-          <a:bodyPr wrap="square">
-            <a:spAutoFit/>
-          </a:bodyPr>
-          <a:lstStyle/>
+              <a:t>cenas/  player.tscn · moeda.tscn · cenario.tscn (stub)</a:t>
+            </a:r>
+          </a:p>
           <a:p>
             <a:pPr algn="l">
               <a:spcAft>
-                <a:spcPts val="600"/>
-              </a:spcAft>
-            </a:pPr>
-            <a:r>
-              <a:rPr sz="1200" b="0">
+                <a:spcPts val="1000"/>
+              </a:spcAft>
+            </a:pPr>
+            <a:r>
+              <a:rPr sz="1300" b="0">
                 <a:solidFill>
                   <a:srgbClr val="ECE1D1"/>
                 </a:solidFill>
@@ -4165,77 +3863,9 @@
                 <a:cs typeface="Georgia"/>
                 <a:ea typeface="Georgia"/>
               </a:rPr>
-              <a:t>□  Quadro: cenário · moedas · player com responsáveis.</a:t>
-            </a:r>
-          </a:p>
-        </p:txBody>
-      </p:sp>
-      <p:sp>
-        <p:nvSpPr>
-          <p:cNvPr id="11" name="Rounded Rectangle 10"/>
-          <p:cNvSpPr/>
-          <p:nvPr/>
-        </p:nvSpPr>
-        <p:spPr>
-          <a:xfrm>
-            <a:off x="502920" y="1911095"/>
-            <a:ext cx="8138160" cy="411480"/>
-          </a:xfrm>
-          <a:prstGeom prst="roundRect">
-            <a:avLst/>
-          </a:prstGeom>
-          <a:solidFill>
-            <a:srgbClr val="18121A"/>
-          </a:solidFill>
-          <a:ln w="15875">
-            <a:solidFill>
-              <a:srgbClr val="7A5C2E"/>
-            </a:solidFill>
-          </a:ln>
-        </p:spPr>
-        <p:style>
-          <a:lnRef idx="1">
-            <a:schemeClr val="accent1"/>
-          </a:lnRef>
-          <a:fillRef idx="3">
-            <a:schemeClr val="accent1"/>
-          </a:fillRef>
-          <a:effectRef idx="2">
-            <a:schemeClr val="accent1"/>
-          </a:effectRef>
-          <a:fontRef idx="minor">
-            <a:schemeClr val="lt1"/>
-          </a:fontRef>
-        </p:style>
-        <p:txBody>
-          <a:bodyPr rtlCol="0" anchor="ctr"/>
-          <a:lstStyle/>
-          <a:p>
-            <a:pPr algn="ctr"/>
-          </a:p>
-        </p:txBody>
-      </p:sp>
-      <p:sp>
-        <p:nvSpPr>
-          <p:cNvPr id="12" name="TextBox 11"/>
-          <p:cNvSpPr txBox="1"/>
-          <p:nvPr/>
-        </p:nvSpPr>
-        <p:spPr>
-          <a:xfrm>
-            <a:off x="731520" y="1956815"/>
-            <a:ext cx="7680960" cy="320040"/>
-          </a:xfrm>
-          <a:prstGeom prst="rect">
-            <a:avLst/>
-          </a:prstGeom>
-          <a:noFill/>
-        </p:spPr>
-        <p:txBody>
-          <a:bodyPr wrap="square">
-            <a:spAutoFit/>
-          </a:bodyPr>
-          <a:lstStyle/>
+              <a:t>sprites/ · audio/ · scripts/ · ui/</a:t>
+            </a:r>
+          </a:p>
           <a:p>
             <a:pPr algn="l">
               <a:spcAft>
@@ -4245,278 +3875,20 @@
             <a:r>
               <a:rPr sz="1200" b="0">
                 <a:solidFill>
-                  <a:srgbClr val="ECE1D1"/>
+                  <a:srgbClr val="AB9C8A"/>
                 </a:solidFill>
                 <a:latin typeface="Georgia"/>
                 <a:cs typeface="Georgia"/>
                 <a:ea typeface="Georgia"/>
               </a:rPr>
-              <a:t>□  ≥3 itens fora do escopo + ≥3 tarefas no cronograma.</a:t>
-            </a:r>
-          </a:p>
-        </p:txBody>
-      </p:sp>
-      <p:sp>
-        <p:nvSpPr>
-          <p:cNvPr id="13" name="Rounded Rectangle 12"/>
-          <p:cNvSpPr/>
-          <p:nvPr/>
-        </p:nvSpPr>
-        <p:spPr>
-          <a:xfrm>
-            <a:off x="502920" y="2386584"/>
-            <a:ext cx="8138160" cy="411480"/>
-          </a:xfrm>
-          <a:prstGeom prst="roundRect">
-            <a:avLst/>
-          </a:prstGeom>
-          <a:solidFill>
-            <a:srgbClr val="18121A"/>
-          </a:solidFill>
-          <a:ln w="15875">
-            <a:solidFill>
-              <a:srgbClr val="7A5C2E"/>
-            </a:solidFill>
-          </a:ln>
-        </p:spPr>
-        <p:style>
-          <a:lnRef idx="1">
-            <a:schemeClr val="accent1"/>
-          </a:lnRef>
-          <a:fillRef idx="3">
-            <a:schemeClr val="accent1"/>
-          </a:fillRef>
-          <a:effectRef idx="2">
-            <a:schemeClr val="accent1"/>
-          </a:effectRef>
-          <a:fontRef idx="minor">
-            <a:schemeClr val="lt1"/>
-          </a:fontRef>
-        </p:style>
-        <p:txBody>
-          <a:bodyPr rtlCol="0" anchor="ctr"/>
-          <a:lstStyle/>
-          <a:p>
-            <a:pPr algn="ctr"/>
-          </a:p>
-        </p:txBody>
-      </p:sp>
-      <p:sp>
-        <p:nvSpPr>
-          <p:cNvPr id="14" name="TextBox 13"/>
-          <p:cNvSpPr txBox="1"/>
-          <p:nvPr/>
-        </p:nvSpPr>
-        <p:spPr>
-          <a:xfrm>
-            <a:off x="731520" y="2432304"/>
-            <a:ext cx="7680960" cy="320040"/>
-          </a:xfrm>
-          <a:prstGeom prst="rect">
-            <a:avLst/>
-          </a:prstGeom>
-          <a:noFill/>
-        </p:spPr>
-        <p:txBody>
-          <a:bodyPr wrap="square">
-            <a:spAutoFit/>
-          </a:bodyPr>
-          <a:lstStyle/>
-          <a:p>
-            <a:pPr algn="l">
-              <a:spcAft>
-                <a:spcPts val="600"/>
-              </a:spcAft>
-            </a:pPr>
-            <a:r>
-              <a:rPr sz="1200" b="0">
-                <a:solidFill>
-                  <a:srgbClr val="ECE1D1"/>
-                </a:solidFill>
-                <a:latin typeface="Georgia"/>
-                <a:cs typeface="Georgia"/>
-                <a:ea typeface="Georgia"/>
-              </a:rPr>
-              <a:t>□  Projeto LabirintoDeMoedas + três cenas-esqueleto.</a:t>
-            </a:r>
-          </a:p>
-        </p:txBody>
-      </p:sp>
-      <p:sp>
-        <p:nvSpPr>
-          <p:cNvPr id="15" name="Rounded Rectangle 14"/>
-          <p:cNvSpPr/>
-          <p:nvPr/>
-        </p:nvSpPr>
-        <p:spPr>
-          <a:xfrm>
-            <a:off x="502920" y="2862072"/>
-            <a:ext cx="8138160" cy="411480"/>
-          </a:xfrm>
-          <a:prstGeom prst="roundRect">
-            <a:avLst/>
-          </a:prstGeom>
-          <a:solidFill>
-            <a:srgbClr val="18121A"/>
-          </a:solidFill>
-          <a:ln w="15875">
-            <a:solidFill>
-              <a:srgbClr val="7A5C2E"/>
-            </a:solidFill>
-          </a:ln>
-        </p:spPr>
-        <p:style>
-          <a:lnRef idx="1">
-            <a:schemeClr val="accent1"/>
-          </a:lnRef>
-          <a:fillRef idx="3">
-            <a:schemeClr val="accent1"/>
-          </a:fillRef>
-          <a:effectRef idx="2">
-            <a:schemeClr val="accent1"/>
-          </a:effectRef>
-          <a:fontRef idx="minor">
-            <a:schemeClr val="lt1"/>
-          </a:fontRef>
-        </p:style>
-        <p:txBody>
-          <a:bodyPr rtlCol="0" anchor="ctr"/>
-          <a:lstStyle/>
-          <a:p>
-            <a:pPr algn="ctr"/>
-          </a:p>
-        </p:txBody>
-      </p:sp>
-      <p:sp>
-        <p:nvSpPr>
-          <p:cNvPr id="16" name="TextBox 15"/>
-          <p:cNvSpPr txBox="1"/>
-          <p:nvPr/>
-        </p:nvSpPr>
-        <p:spPr>
-          <a:xfrm>
-            <a:off x="731520" y="2907792"/>
-            <a:ext cx="7680960" cy="320040"/>
-          </a:xfrm>
-          <a:prstGeom prst="rect">
-            <a:avLst/>
-          </a:prstGeom>
-          <a:noFill/>
-        </p:spPr>
-        <p:txBody>
-          <a:bodyPr wrap="square">
-            <a:spAutoFit/>
-          </a:bodyPr>
-          <a:lstStyle/>
-          <a:p>
-            <a:pPr algn="l">
-              <a:spcAft>
-                <a:spcPts val="600"/>
-              </a:spcAft>
-            </a:pPr>
-            <a:r>
-              <a:rPr sz="1200" b="0">
-                <a:solidFill>
-                  <a:srgbClr val="ECE1D1"/>
-                </a:solidFill>
-                <a:latin typeface="Georgia"/>
-                <a:cs typeface="Georgia"/>
-                <a:ea typeface="Georgia"/>
-              </a:rPr>
-              <a:t>□  Pasta compartilhada ou ZIP de backup.</a:t>
-            </a:r>
-          </a:p>
-        </p:txBody>
-      </p:sp>
-      <p:sp>
-        <p:nvSpPr>
-          <p:cNvPr id="17" name="Rounded Rectangle 16"/>
-          <p:cNvSpPr/>
-          <p:nvPr/>
-        </p:nvSpPr>
-        <p:spPr>
-          <a:xfrm>
-            <a:off x="502920" y="3337560"/>
-            <a:ext cx="8138160" cy="411480"/>
-          </a:xfrm>
-          <a:prstGeom prst="roundRect">
-            <a:avLst/>
-          </a:prstGeom>
-          <a:solidFill>
-            <a:srgbClr val="18121A"/>
-          </a:solidFill>
-          <a:ln w="15875">
-            <a:solidFill>
-              <a:srgbClr val="7A5C2E"/>
-            </a:solidFill>
-          </a:ln>
-        </p:spPr>
-        <p:style>
-          <a:lnRef idx="1">
-            <a:schemeClr val="accent1"/>
-          </a:lnRef>
-          <a:fillRef idx="3">
-            <a:schemeClr val="accent1"/>
-          </a:fillRef>
-          <a:effectRef idx="2">
-            <a:schemeClr val="accent1"/>
-          </a:effectRef>
-          <a:fontRef idx="minor">
-            <a:schemeClr val="lt1"/>
-          </a:fontRef>
-        </p:style>
-        <p:txBody>
-          <a:bodyPr rtlCol="0" anchor="ctr"/>
-          <a:lstStyle/>
-          <a:p>
-            <a:pPr algn="ctr"/>
-          </a:p>
-        </p:txBody>
-      </p:sp>
-      <p:sp>
-        <p:nvSpPr>
-          <p:cNvPr id="18" name="TextBox 17"/>
-          <p:cNvSpPr txBox="1"/>
-          <p:nvPr/>
-        </p:nvSpPr>
-        <p:spPr>
-          <a:xfrm>
-            <a:off x="731520" y="3383280"/>
-            <a:ext cx="7680960" cy="320040"/>
-          </a:xfrm>
-          <a:prstGeom prst="rect">
-            <a:avLst/>
-          </a:prstGeom>
-          <a:noFill/>
-        </p:spPr>
-        <p:txBody>
-          <a:bodyPr wrap="square">
-            <a:spAutoFit/>
-          </a:bodyPr>
-          <a:lstStyle/>
-          <a:p>
-            <a:pPr algn="l">
-              <a:spcAft>
-                <a:spcPts val="600"/>
-              </a:spcAft>
-            </a:pPr>
-            <a:r>
-              <a:rPr sz="1200" b="0">
-                <a:solidFill>
-                  <a:srgbClr val="ECE1D1"/>
-                </a:solidFill>
-                <a:latin typeface="Georgia"/>
-                <a:cs typeface="Georgia"/>
-                <a:ea typeface="Georgia"/>
-              </a:rPr>
-              <a:t>□  Anotações + síntese enviadas na página aula7.</a:t>
-            </a:r>
-          </a:p>
-        </p:txBody>
-      </p:sp>
-      <p:sp>
-        <p:nvSpPr>
-          <p:cNvPr id="19" name="TextBox 18"/>
+              <a:t>MVP: sprite + movimento M1 + coleta (Area2D).</a:t>
+            </a:r>
+          </a:p>
+        </p:txBody>
+      </p:sp>
+      <p:sp>
+        <p:nvSpPr>
+          <p:cNvPr id="9" name="TextBox 8"/>
           <p:cNvSpPr txBox="1"/>
           <p:nvPr/>
         </p:nvSpPr>
@@ -4794,7 +4166,7 @@
                 <a:cs typeface="Cinzel"/>
                 <a:ea typeface="Cinzel"/>
               </a:rPr>
-              <a:t>Fechamento e Altar</a:t>
+              <a:t>Projeto local (sem pasta sync)</a:t>
             </a:r>
           </a:p>
         </p:txBody>
@@ -4807,8 +4179,8 @@
         </p:nvSpPr>
         <p:spPr>
           <a:xfrm>
-            <a:off x="502920" y="1143000"/>
-            <a:ext cx="8138160" cy="2880360"/>
+            <a:off x="502920" y="1005840"/>
+            <a:ext cx="8138160" cy="438912"/>
           </a:xfrm>
           <a:prstGeom prst="roundRect">
             <a:avLst/>
@@ -4852,8 +4224,8 @@
         </p:nvSpPr>
         <p:spPr>
           <a:xfrm>
-            <a:off x="822960" y="1417320"/>
-            <a:ext cx="7498079" cy="2468880"/>
+            <a:off x="731520" y="1051560"/>
+            <a:ext cx="7680960" cy="347472"/>
           </a:xfrm>
           <a:prstGeom prst="rect">
             <a:avLst/>
@@ -4866,27 +4238,724 @@
           </a:bodyPr>
           <a:lstStyle/>
           <a:p>
-            <a:pPr algn="ctr">
-              <a:spcAft>
-                <a:spcPts val="1200"/>
-              </a:spcAft>
-            </a:pPr>
-            <a:r>
-              <a:rPr sz="1500" b="1">
-                <a:solidFill>
-                  <a:srgbClr val="F2D59A"/>
+            <a:pPr algn="l">
+              <a:spcAft>
+                <a:spcPts val="600"/>
+              </a:spcAft>
+            </a:pPr>
+            <a:r>
+              <a:rPr sz="1300" b="0">
+                <a:solidFill>
+                  <a:srgbClr val="ECE1D1"/>
+                </a:solidFill>
+                <a:latin typeface="Georgia"/>
+                <a:cs typeface="Georgia"/>
+                <a:ea typeface="Georgia"/>
+              </a:rPr>
+              <a:t>◆  Godot só na máquina local — sem Drive/OneDrive no projeto.</a:t>
+            </a:r>
+          </a:p>
+        </p:txBody>
+      </p:sp>
+      <p:sp>
+        <p:nvSpPr>
+          <p:cNvPr id="9" name="Rounded Rectangle 8"/>
+          <p:cNvSpPr/>
+          <p:nvPr/>
+        </p:nvSpPr>
+        <p:spPr>
+          <a:xfrm>
+            <a:off x="502920" y="1508760"/>
+            <a:ext cx="8138160" cy="438912"/>
+          </a:xfrm>
+          <a:prstGeom prst="roundRect">
+            <a:avLst/>
+          </a:prstGeom>
+          <a:solidFill>
+            <a:srgbClr val="18121A"/>
+          </a:solidFill>
+          <a:ln w="15875">
+            <a:solidFill>
+              <a:srgbClr val="7A5C2E"/>
+            </a:solidFill>
+          </a:ln>
+        </p:spPr>
+        <p:style>
+          <a:lnRef idx="1">
+            <a:schemeClr val="accent1"/>
+          </a:lnRef>
+          <a:fillRef idx="3">
+            <a:schemeClr val="accent1"/>
+          </a:fillRef>
+          <a:effectRef idx="2">
+            <a:schemeClr val="accent1"/>
+          </a:effectRef>
+          <a:fontRef idx="minor">
+            <a:schemeClr val="lt1"/>
+          </a:fontRef>
+        </p:style>
+        <p:txBody>
+          <a:bodyPr rtlCol="0" anchor="ctr"/>
+          <a:lstStyle/>
+          <a:p>
+            <a:pPr algn="ctr"/>
+          </a:p>
+        </p:txBody>
+      </p:sp>
+      <p:sp>
+        <p:nvSpPr>
+          <p:cNvPr id="10" name="TextBox 9"/>
+          <p:cNvSpPr txBox="1"/>
+          <p:nvPr/>
+        </p:nvSpPr>
+        <p:spPr>
+          <a:xfrm>
+            <a:off x="731520" y="1554480"/>
+            <a:ext cx="7680960" cy="347472"/>
+          </a:xfrm>
+          <a:prstGeom prst="rect">
+            <a:avLst/>
+          </a:prstGeom>
+          <a:noFill/>
+        </p:spPr>
+        <p:txBody>
+          <a:bodyPr wrap="square">
+            <a:spAutoFit/>
+          </a:bodyPr>
+          <a:lstStyle/>
+          <a:p>
+            <a:pPr algn="l">
+              <a:spcAft>
+                <a:spcPts val="600"/>
+              </a:spcAft>
+            </a:pPr>
+            <a:r>
+              <a:rPr sz="1300" b="0">
+                <a:solidFill>
+                  <a:srgbClr val="ECE1D1"/>
+                </a:solidFill>
+                <a:latin typeface="Georgia"/>
+                <a:cs typeface="Georgia"/>
+                <a:ea typeface="Georgia"/>
+              </a:rPr>
+              <a:t>◆  PNG do LibreSprite → sprites/ no Encontro 2.</a:t>
+            </a:r>
+          </a:p>
+        </p:txBody>
+      </p:sp>
+      <p:sp>
+        <p:nvSpPr>
+          <p:cNvPr id="11" name="Rounded Rectangle 10"/>
+          <p:cNvSpPr/>
+          <p:nvPr/>
+        </p:nvSpPr>
+        <p:spPr>
+          <a:xfrm>
+            <a:off x="502920" y="2011680"/>
+            <a:ext cx="8138160" cy="438912"/>
+          </a:xfrm>
+          <a:prstGeom prst="roundRect">
+            <a:avLst/>
+          </a:prstGeom>
+          <a:solidFill>
+            <a:srgbClr val="18121A"/>
+          </a:solidFill>
+          <a:ln w="15875">
+            <a:solidFill>
+              <a:srgbClr val="7A5C2E"/>
+            </a:solidFill>
+          </a:ln>
+        </p:spPr>
+        <p:style>
+          <a:lnRef idx="1">
+            <a:schemeClr val="accent1"/>
+          </a:lnRef>
+          <a:fillRef idx="3">
+            <a:schemeClr val="accent1"/>
+          </a:fillRef>
+          <a:effectRef idx="2">
+            <a:schemeClr val="accent1"/>
+          </a:effectRef>
+          <a:fontRef idx="minor">
+            <a:schemeClr val="lt1"/>
+          </a:fontRef>
+        </p:style>
+        <p:txBody>
+          <a:bodyPr rtlCol="0" anchor="ctr"/>
+          <a:lstStyle/>
+          <a:p>
+            <a:pPr algn="ctr"/>
+          </a:p>
+        </p:txBody>
+      </p:sp>
+      <p:sp>
+        <p:nvSpPr>
+          <p:cNvPr id="12" name="TextBox 11"/>
+          <p:cNvSpPr txBox="1"/>
+          <p:nvPr/>
+        </p:nvSpPr>
+        <p:spPr>
+          <a:xfrm>
+            <a:off x="731520" y="2057400"/>
+            <a:ext cx="7680960" cy="347472"/>
+          </a:xfrm>
+          <a:prstGeom prst="rect">
+            <a:avLst/>
+          </a:prstGeom>
+          <a:noFill/>
+        </p:spPr>
+        <p:txBody>
+          <a:bodyPr wrap="square">
+            <a:spAutoFit/>
+          </a:bodyPr>
+          <a:lstStyle/>
+          <a:p>
+            <a:pPr algn="l">
+              <a:spcAft>
+                <a:spcPts val="600"/>
+              </a:spcAft>
+            </a:pPr>
+            <a:r>
+              <a:rPr sz="1300" b="0">
+                <a:solidFill>
+                  <a:srgbClr val="ECE1D1"/>
+                </a:solidFill>
+                <a:latin typeface="Georgia"/>
+                <a:cs typeface="Georgia"/>
+                <a:ea typeface="Georgia"/>
+              </a:rPr>
+              <a:t>◆  Na dupla: cada um na cena do seu ofício.</a:t>
+            </a:r>
+          </a:p>
+        </p:txBody>
+      </p:sp>
+      <p:sp>
+        <p:nvSpPr>
+          <p:cNvPr id="13" name="Rounded Rectangle 12"/>
+          <p:cNvSpPr/>
+          <p:nvPr/>
+        </p:nvSpPr>
+        <p:spPr>
+          <a:xfrm>
+            <a:off x="502920" y="2514600"/>
+            <a:ext cx="8138160" cy="438912"/>
+          </a:xfrm>
+          <a:prstGeom prst="roundRect">
+            <a:avLst/>
+          </a:prstGeom>
+          <a:solidFill>
+            <a:srgbClr val="18121A"/>
+          </a:solidFill>
+          <a:ln w="15875">
+            <a:solidFill>
+              <a:srgbClr val="7A5C2E"/>
+            </a:solidFill>
+          </a:ln>
+        </p:spPr>
+        <p:style>
+          <a:lnRef idx="1">
+            <a:schemeClr val="accent1"/>
+          </a:lnRef>
+          <a:fillRef idx="3">
+            <a:schemeClr val="accent1"/>
+          </a:fillRef>
+          <a:effectRef idx="2">
+            <a:schemeClr val="accent1"/>
+          </a:effectRef>
+          <a:fontRef idx="minor">
+            <a:schemeClr val="lt1"/>
+          </a:fontRef>
+        </p:style>
+        <p:txBody>
+          <a:bodyPr rtlCol="0" anchor="ctr"/>
+          <a:lstStyle/>
+          <a:p>
+            <a:pPr algn="ctr"/>
+          </a:p>
+        </p:txBody>
+      </p:sp>
+      <p:sp>
+        <p:nvSpPr>
+          <p:cNvPr id="14" name="TextBox 13"/>
+          <p:cNvSpPr txBox="1"/>
+          <p:nvPr/>
+        </p:nvSpPr>
+        <p:spPr>
+          <a:xfrm>
+            <a:off x="731520" y="2560320"/>
+            <a:ext cx="7680960" cy="347472"/>
+          </a:xfrm>
+          <a:prstGeom prst="rect">
+            <a:avLst/>
+          </a:prstGeom>
+          <a:noFill/>
+        </p:spPr>
+        <p:txBody>
+          <a:bodyPr wrap="square">
+            <a:spAutoFit/>
+          </a:bodyPr>
+          <a:lstStyle/>
+          <a:p>
+            <a:pPr algn="l">
+              <a:spcAft>
+                <a:spcPts val="600"/>
+              </a:spcAft>
+            </a:pPr>
+            <a:r>
+              <a:rPr sz="1300" b="0">
+                <a:solidFill>
+                  <a:srgbClr val="ECE1D1"/>
+                </a:solidFill>
+                <a:latin typeface="Georgia"/>
+                <a:cs typeface="Georgia"/>
+                <a:ea typeface="Georgia"/>
+              </a:rPr>
+              <a:t>◆  Nomes canônicos: player.tscn · moeda.tscn.</a:t>
+            </a:r>
+          </a:p>
+        </p:txBody>
+      </p:sp>
+      <p:sp>
+        <p:nvSpPr>
+          <p:cNvPr id="15" name="Rounded Rectangle 14"/>
+          <p:cNvSpPr/>
+          <p:nvPr/>
+        </p:nvSpPr>
+        <p:spPr>
+          <a:xfrm>
+            <a:off x="502920" y="3017520"/>
+            <a:ext cx="8138160" cy="438912"/>
+          </a:xfrm>
+          <a:prstGeom prst="roundRect">
+            <a:avLst/>
+          </a:prstGeom>
+          <a:solidFill>
+            <a:srgbClr val="18121A"/>
+          </a:solidFill>
+          <a:ln w="15875">
+            <a:solidFill>
+              <a:srgbClr val="7A5C2E"/>
+            </a:solidFill>
+          </a:ln>
+        </p:spPr>
+        <p:style>
+          <a:lnRef idx="1">
+            <a:schemeClr val="accent1"/>
+          </a:lnRef>
+          <a:fillRef idx="3">
+            <a:schemeClr val="accent1"/>
+          </a:fillRef>
+          <a:effectRef idx="2">
+            <a:schemeClr val="accent1"/>
+          </a:effectRef>
+          <a:fontRef idx="minor">
+            <a:schemeClr val="lt1"/>
+          </a:fontRef>
+        </p:style>
+        <p:txBody>
+          <a:bodyPr rtlCol="0" anchor="ctr"/>
+          <a:lstStyle/>
+          <a:p>
+            <a:pPr algn="ctr"/>
+          </a:p>
+        </p:txBody>
+      </p:sp>
+      <p:sp>
+        <p:nvSpPr>
+          <p:cNvPr id="16" name="TextBox 15"/>
+          <p:cNvSpPr txBox="1"/>
+          <p:nvPr/>
+        </p:nvSpPr>
+        <p:spPr>
+          <a:xfrm>
+            <a:off x="731520" y="3063240"/>
+            <a:ext cx="7680960" cy="347472"/>
+          </a:xfrm>
+          <a:prstGeom prst="rect">
+            <a:avLst/>
+          </a:prstGeom>
+          <a:noFill/>
+        </p:spPr>
+        <p:txBody>
+          <a:bodyPr wrap="square">
+            <a:spAutoFit/>
+          </a:bodyPr>
+          <a:lstStyle/>
+          <a:p>
+            <a:pPr algn="l">
+              <a:spcAft>
+                <a:spcPts val="600"/>
+              </a:spcAft>
+            </a:pPr>
+            <a:r>
+              <a:rPr sz="1300" b="0">
+                <a:solidFill>
+                  <a:srgbClr val="ECE1D1"/>
+                </a:solidFill>
+                <a:latin typeface="Georgia"/>
+                <a:cs typeface="Georgia"/>
+                <a:ea typeface="Georgia"/>
+              </a:rPr>
+              <a:t>◆  Pasta .godot/ é cache local — não versionar.</a:t>
+            </a:r>
+          </a:p>
+        </p:txBody>
+      </p:sp>
+      <p:sp>
+        <p:nvSpPr>
+          <p:cNvPr id="17" name="TextBox 16"/>
+          <p:cNvSpPr txBox="1"/>
+          <p:nvPr/>
+        </p:nvSpPr>
+        <p:spPr>
+          <a:xfrm>
+            <a:off x="457200" y="4732020"/>
+            <a:ext cx="8229600" cy="274320"/>
+          </a:xfrm>
+          <a:prstGeom prst="rect">
+            <a:avLst/>
+          </a:prstGeom>
+          <a:noFill/>
+        </p:spPr>
+        <p:txBody>
+          <a:bodyPr wrap="square">
+            <a:spAutoFit/>
+          </a:bodyPr>
+          <a:lstStyle/>
+          <a:p>
+            <a:pPr algn="l">
+              <a:spcAft>
+                <a:spcPts val="600"/>
+              </a:spcAft>
+            </a:pPr>
+            <a:r>
+              <a:rPr sz="1000" b="0">
+                <a:solidFill>
+                  <a:srgbClr val="AB9C8A"/>
                 </a:solidFill>
                 <a:latin typeface="Cinzel"/>
                 <a:cs typeface="Cinzel"/>
                 <a:ea typeface="Cinzel"/>
               </a:rPr>
-              <a:t>FIM DA AULA 07: CARTÓGRAFO DA EQUIPE</a:t>
-            </a:r>
-          </a:p>
-          <a:p>
-            <a:pPr algn="ctr">
-              <a:spcAft>
-                <a:spcPts val="1000"/>
+              <a:t>AULA 07 | MÓDULO 2</a:t>
+            </a:r>
+          </a:p>
+        </p:txBody>
+      </p:sp>
+    </p:spTree>
+  </p:cSld>
+  <p:clrMapOvr>
+    <a:masterClrMapping/>
+  </p:clrMapOvr>
+</p:sld>
+</file>
+
+<file path=ppt/slides/slide16.xml><?xml version="1.0" encoding="utf-8"?>
+<p:sld xmlns:a="http://schemas.openxmlformats.org/drawingml/2006/main" xmlns:p="http://schemas.openxmlformats.org/presentationml/2006/main" xmlns:r="http://schemas.openxmlformats.org/officeDocument/2006/relationships">
+  <p:cSld>
+    <p:spTree>
+      <p:nvGrpSpPr>
+        <p:cNvPr id="1" name=""/>
+        <p:cNvGrpSpPr/>
+        <p:nvPr/>
+      </p:nvGrpSpPr>
+      <p:grpSpPr/>
+      <p:sp>
+        <p:nvSpPr>
+          <p:cNvPr id="2" name="Rectangle 1"/>
+          <p:cNvSpPr/>
+          <p:nvPr/>
+        </p:nvSpPr>
+        <p:spPr>
+          <a:xfrm>
+            <a:off x="0" y="0"/>
+            <a:ext cx="9144000" cy="5143500"/>
+          </a:xfrm>
+          <a:prstGeom prst="rect">
+            <a:avLst/>
+          </a:prstGeom>
+          <a:solidFill>
+            <a:srgbClr val="0D0A10"/>
+          </a:solidFill>
+          <a:ln>
+            <a:noFill/>
+          </a:ln>
+        </p:spPr>
+        <p:style>
+          <a:lnRef idx="1">
+            <a:schemeClr val="accent1"/>
+          </a:lnRef>
+          <a:fillRef idx="3">
+            <a:schemeClr val="accent1"/>
+          </a:fillRef>
+          <a:effectRef idx="2">
+            <a:schemeClr val="accent1"/>
+          </a:effectRef>
+          <a:fontRef idx="minor">
+            <a:schemeClr val="lt1"/>
+          </a:fontRef>
+        </p:style>
+        <p:txBody>
+          <a:bodyPr rtlCol="0" anchor="ctr"/>
+          <a:lstStyle/>
+          <a:p>
+            <a:pPr algn="ctr"/>
+          </a:p>
+        </p:txBody>
+      </p:sp>
+      <p:sp>
+        <p:nvSpPr>
+          <p:cNvPr id="3" name="Rectangle 2"/>
+          <p:cNvSpPr/>
+          <p:nvPr/>
+        </p:nvSpPr>
+        <p:spPr>
+          <a:xfrm>
+            <a:off x="0" y="0"/>
+            <a:ext cx="9144000" cy="54864"/>
+          </a:xfrm>
+          <a:prstGeom prst="rect">
+            <a:avLst/>
+          </a:prstGeom>
+          <a:solidFill>
+            <a:srgbClr val="7A5C2E"/>
+          </a:solidFill>
+          <a:ln>
+            <a:noFill/>
+          </a:ln>
+        </p:spPr>
+        <p:style>
+          <a:lnRef idx="1">
+            <a:schemeClr val="accent1"/>
+          </a:lnRef>
+          <a:fillRef idx="3">
+            <a:schemeClr val="accent1"/>
+          </a:fillRef>
+          <a:effectRef idx="2">
+            <a:schemeClr val="accent1"/>
+          </a:effectRef>
+          <a:fontRef idx="minor">
+            <a:schemeClr val="lt1"/>
+          </a:fontRef>
+        </p:style>
+        <p:txBody>
+          <a:bodyPr rtlCol="0" anchor="ctr"/>
+          <a:lstStyle/>
+          <a:p>
+            <a:pPr algn="ctr"/>
+          </a:p>
+        </p:txBody>
+      </p:sp>
+      <p:sp>
+        <p:nvSpPr>
+          <p:cNvPr id="4" name="Rectangle 3"/>
+          <p:cNvSpPr/>
+          <p:nvPr/>
+        </p:nvSpPr>
+        <p:spPr>
+          <a:xfrm>
+            <a:off x="0" y="5070348"/>
+            <a:ext cx="9144000" cy="73152"/>
+          </a:xfrm>
+          <a:prstGeom prst="rect">
+            <a:avLst/>
+          </a:prstGeom>
+          <a:solidFill>
+            <a:srgbClr val="7A5C2E"/>
+          </a:solidFill>
+          <a:ln>
+            <a:noFill/>
+          </a:ln>
+        </p:spPr>
+        <p:style>
+          <a:lnRef idx="1">
+            <a:schemeClr val="accent1"/>
+          </a:lnRef>
+          <a:fillRef idx="3">
+            <a:schemeClr val="accent1"/>
+          </a:fillRef>
+          <a:effectRef idx="2">
+            <a:schemeClr val="accent1"/>
+          </a:effectRef>
+          <a:fontRef idx="minor">
+            <a:schemeClr val="lt1"/>
+          </a:fontRef>
+        </p:style>
+        <p:txBody>
+          <a:bodyPr rtlCol="0" anchor="ctr"/>
+          <a:lstStyle/>
+          <a:p>
+            <a:pPr algn="ctr"/>
+          </a:p>
+        </p:txBody>
+      </p:sp>
+      <p:sp>
+        <p:nvSpPr>
+          <p:cNvPr id="5" name="Rounded Rectangle 4"/>
+          <p:cNvSpPr/>
+          <p:nvPr/>
+        </p:nvSpPr>
+        <p:spPr>
+          <a:xfrm>
+            <a:off x="411480" y="256032"/>
+            <a:ext cx="640080" cy="384048"/>
+          </a:xfrm>
+          <a:prstGeom prst="roundRect">
+            <a:avLst/>
+          </a:prstGeom>
+          <a:solidFill>
+            <a:srgbClr val="7A1F2B"/>
+          </a:solidFill>
+          <a:ln w="12700">
+            <a:solidFill>
+              <a:srgbClr val="CFA759"/>
+            </a:solidFill>
+          </a:ln>
+        </p:spPr>
+        <p:style>
+          <a:lnRef idx="1">
+            <a:schemeClr val="accent1"/>
+          </a:lnRef>
+          <a:fillRef idx="3">
+            <a:schemeClr val="accent1"/>
+          </a:fillRef>
+          <a:effectRef idx="2">
+            <a:schemeClr val="accent1"/>
+          </a:effectRef>
+          <a:fontRef idx="minor">
+            <a:schemeClr val="lt1"/>
+          </a:fontRef>
+        </p:style>
+        <p:txBody>
+          <a:bodyPr rtlCol="0" anchor="ctr" wrap="none"/>
+          <a:lstStyle/>
+          <a:p>
+            <a:pPr algn="ctr"/>
+            <a:r>
+              <a:rPr sz="1400" b="1">
+                <a:solidFill>
+                  <a:srgbClr val="F2D59A"/>
+                </a:solidFill>
+                <a:latin typeface="Cinzel"/>
+                <a:cs typeface="Cinzel"/>
+                <a:ea typeface="Cinzel"/>
+              </a:rPr>
+              <a:t>15</a:t>
+            </a:r>
+          </a:p>
+        </p:txBody>
+      </p:sp>
+      <p:sp>
+        <p:nvSpPr>
+          <p:cNvPr id="6" name="TextBox 5"/>
+          <p:cNvSpPr txBox="1"/>
+          <p:nvPr/>
+        </p:nvSpPr>
+        <p:spPr>
+          <a:xfrm>
+            <a:off x="1234440" y="256032"/>
+            <a:ext cx="7498079" cy="502920"/>
+          </a:xfrm>
+          <a:prstGeom prst="rect">
+            <a:avLst/>
+          </a:prstGeom>
+          <a:noFill/>
+        </p:spPr>
+        <p:txBody>
+          <a:bodyPr wrap="square">
+            <a:spAutoFit/>
+          </a:bodyPr>
+          <a:lstStyle/>
+          <a:p>
+            <a:pPr algn="l">
+              <a:spcAft>
+                <a:spcPts val="600"/>
+              </a:spcAft>
+            </a:pPr>
+            <a:r>
+              <a:rPr sz="2200" b="1">
+                <a:solidFill>
+                  <a:srgbClr val="F2D59A"/>
+                </a:solidFill>
+                <a:latin typeface="Cinzel"/>
+                <a:cs typeface="Cinzel"/>
+                <a:ea typeface="Cinzel"/>
+              </a:rPr>
+              <a:t>Checklist do artefato</a:t>
+            </a:r>
+          </a:p>
+        </p:txBody>
+      </p:sp>
+      <p:sp>
+        <p:nvSpPr>
+          <p:cNvPr id="7" name="Rounded Rectangle 6"/>
+          <p:cNvSpPr/>
+          <p:nvPr/>
+        </p:nvSpPr>
+        <p:spPr>
+          <a:xfrm>
+            <a:off x="502920" y="1005840"/>
+            <a:ext cx="8138160" cy="438912"/>
+          </a:xfrm>
+          <a:prstGeom prst="roundRect">
+            <a:avLst/>
+          </a:prstGeom>
+          <a:solidFill>
+            <a:srgbClr val="18121A"/>
+          </a:solidFill>
+          <a:ln w="15875">
+            <a:solidFill>
+              <a:srgbClr val="7A5C2E"/>
+            </a:solidFill>
+          </a:ln>
+        </p:spPr>
+        <p:style>
+          <a:lnRef idx="1">
+            <a:schemeClr val="accent1"/>
+          </a:lnRef>
+          <a:fillRef idx="3">
+            <a:schemeClr val="accent1"/>
+          </a:fillRef>
+          <a:effectRef idx="2">
+            <a:schemeClr val="accent1"/>
+          </a:effectRef>
+          <a:fontRef idx="minor">
+            <a:schemeClr val="lt1"/>
+          </a:fontRef>
+        </p:style>
+        <p:txBody>
+          <a:bodyPr rtlCol="0" anchor="ctr"/>
+          <a:lstStyle/>
+          <a:p>
+            <a:pPr algn="ctr"/>
+          </a:p>
+        </p:txBody>
+      </p:sp>
+      <p:sp>
+        <p:nvSpPr>
+          <p:cNvPr id="8" name="TextBox 7"/>
+          <p:cNvSpPr txBox="1"/>
+          <p:nvPr/>
+        </p:nvSpPr>
+        <p:spPr>
+          <a:xfrm>
+            <a:off x="731520" y="1051560"/>
+            <a:ext cx="7680960" cy="347472"/>
+          </a:xfrm>
+          <a:prstGeom prst="rect">
+            <a:avLst/>
+          </a:prstGeom>
+          <a:noFill/>
+        </p:spPr>
+        <p:txBody>
+          <a:bodyPr wrap="square">
+            <a:spAutoFit/>
+          </a:bodyPr>
+          <a:lstStyle/>
+          <a:p>
+            <a:pPr algn="l">
+              <a:spcAft>
+                <a:spcPts val="600"/>
               </a:spcAft>
             </a:pPr>
             <a:r>
@@ -4898,29 +4967,165 @@
                 <a:cs typeface="Georgia"/>
                 <a:ea typeface="Georgia"/>
               </a:rPr>
-              <a:t>Um labirinto pequeno e terminado ensina mais que um mundo aberto abandonado.</a:t>
-            </a:r>
-          </a:p>
-          <a:p>
-            <a:pPr algn="ctr">
-              <a:spcAft>
-                <a:spcPts val="1200"/>
+              <a:t>□  Solo ou dupla com ofícios definidos na Oficina.</a:t>
+            </a:r>
+          </a:p>
+        </p:txBody>
+      </p:sp>
+      <p:sp>
+        <p:nvSpPr>
+          <p:cNvPr id="9" name="Rounded Rectangle 8"/>
+          <p:cNvSpPr/>
+          <p:nvPr/>
+        </p:nvSpPr>
+        <p:spPr>
+          <a:xfrm>
+            <a:off x="502920" y="1508760"/>
+            <a:ext cx="8138160" cy="438912"/>
+          </a:xfrm>
+          <a:prstGeom prst="roundRect">
+            <a:avLst/>
+          </a:prstGeom>
+          <a:solidFill>
+            <a:srgbClr val="18121A"/>
+          </a:solidFill>
+          <a:ln w="15875">
+            <a:solidFill>
+              <a:srgbClr val="7A5C2E"/>
+            </a:solidFill>
+          </a:ln>
+        </p:spPr>
+        <p:style>
+          <a:lnRef idx="1">
+            <a:schemeClr val="accent1"/>
+          </a:lnRef>
+          <a:fillRef idx="3">
+            <a:schemeClr val="accent1"/>
+          </a:fillRef>
+          <a:effectRef idx="2">
+            <a:schemeClr val="accent1"/>
+          </a:effectRef>
+          <a:fontRef idx="minor">
+            <a:schemeClr val="lt1"/>
+          </a:fontRef>
+        </p:style>
+        <p:txBody>
+          <a:bodyPr rtlCol="0" anchor="ctr"/>
+          <a:lstStyle/>
+          <a:p>
+            <a:pPr algn="ctr"/>
+          </a:p>
+        </p:txBody>
+      </p:sp>
+      <p:sp>
+        <p:nvSpPr>
+          <p:cNvPr id="10" name="TextBox 9"/>
+          <p:cNvSpPr txBox="1"/>
+          <p:nvPr/>
+        </p:nvSpPr>
+        <p:spPr>
+          <a:xfrm>
+            <a:off x="731520" y="1554480"/>
+            <a:ext cx="7680960" cy="347472"/>
+          </a:xfrm>
+          <a:prstGeom prst="rect">
+            <a:avLst/>
+          </a:prstGeom>
+          <a:noFill/>
+        </p:spPr>
+        <p:txBody>
+          <a:bodyPr wrap="square">
+            <a:spAutoFit/>
+          </a:bodyPr>
+          <a:lstStyle/>
+          <a:p>
+            <a:pPr algn="l">
+              <a:spcAft>
+                <a:spcPts val="600"/>
               </a:spcAft>
             </a:pPr>
             <a:r>
               <a:rPr sz="1300" b="0">
                 <a:solidFill>
-                  <a:srgbClr val="AB9C8A"/>
+                  <a:srgbClr val="ECE1D1"/>
                 </a:solidFill>
                 <a:latin typeface="Georgia"/>
                 <a:cs typeface="Georgia"/>
                 <a:ea typeface="Georgia"/>
               </a:rPr>
-              <a:t>Envie as anotações. Leve o código ao Altar quando o Mestre liberar.</a:t>
-            </a:r>
-          </a:p>
-          <a:p>
-            <a:pPr algn="ctr">
+              <a:t>□  E1: sprite LibreSprite · E2: moeda.tscn + coleta.</a:t>
+            </a:r>
+          </a:p>
+        </p:txBody>
+      </p:sp>
+      <p:sp>
+        <p:nvSpPr>
+          <p:cNvPr id="11" name="Rounded Rectangle 10"/>
+          <p:cNvSpPr/>
+          <p:nvPr/>
+        </p:nvSpPr>
+        <p:spPr>
+          <a:xfrm>
+            <a:off x="502920" y="2011680"/>
+            <a:ext cx="8138160" cy="438912"/>
+          </a:xfrm>
+          <a:prstGeom prst="roundRect">
+            <a:avLst/>
+          </a:prstGeom>
+          <a:solidFill>
+            <a:srgbClr val="18121A"/>
+          </a:solidFill>
+          <a:ln w="15875">
+            <a:solidFill>
+              <a:srgbClr val="7A5C2E"/>
+            </a:solidFill>
+          </a:ln>
+        </p:spPr>
+        <p:style>
+          <a:lnRef idx="1">
+            <a:schemeClr val="accent1"/>
+          </a:lnRef>
+          <a:fillRef idx="3">
+            <a:schemeClr val="accent1"/>
+          </a:fillRef>
+          <a:effectRef idx="2">
+            <a:schemeClr val="accent1"/>
+          </a:effectRef>
+          <a:fontRef idx="minor">
+            <a:schemeClr val="lt1"/>
+          </a:fontRef>
+        </p:style>
+        <p:txBody>
+          <a:bodyPr rtlCol="0" anchor="ctr"/>
+          <a:lstStyle/>
+          <a:p>
+            <a:pPr algn="ctr"/>
+          </a:p>
+        </p:txBody>
+      </p:sp>
+      <p:sp>
+        <p:nvSpPr>
+          <p:cNvPr id="12" name="TextBox 11"/>
+          <p:cNvSpPr txBox="1"/>
+          <p:nvPr/>
+        </p:nvSpPr>
+        <p:spPr>
+          <a:xfrm>
+            <a:off x="731520" y="2057400"/>
+            <a:ext cx="7680960" cy="347472"/>
+          </a:xfrm>
+          <a:prstGeom prst="rect">
+            <a:avLst/>
+          </a:prstGeom>
+          <a:noFill/>
+        </p:spPr>
+        <p:txBody>
+          <a:bodyPr wrap="square">
+            <a:spAutoFit/>
+          </a:bodyPr>
+          <a:lstStyle/>
+          <a:p>
+            <a:pPr algn="l">
               <a:spcAft>
                 <a:spcPts val="600"/>
               </a:spcAft>
@@ -4928,13 +5133,610 @@
             <a:r>
               <a:rPr sz="1300" b="0">
                 <a:solidFill>
-                  <a:srgbClr val="AB9C8A"/>
+                  <a:srgbClr val="ECE1D1"/>
                 </a:solidFill>
                 <a:latin typeface="Georgia"/>
                 <a:cs typeface="Georgia"/>
                 <a:ea typeface="Georgia"/>
               </a:rPr>
-              <a:t>Próxima trilha: construir o Labirinto (Aula 08+).</a:t>
+              <a:t>□  ≥3 itens fora do escopo no diário.</a:t>
+            </a:r>
+          </a:p>
+        </p:txBody>
+      </p:sp>
+      <p:sp>
+        <p:nvSpPr>
+          <p:cNvPr id="13" name="Rounded Rectangle 12"/>
+          <p:cNvSpPr/>
+          <p:nvPr/>
+        </p:nvSpPr>
+        <p:spPr>
+          <a:xfrm>
+            <a:off x="502920" y="2514600"/>
+            <a:ext cx="8138160" cy="438912"/>
+          </a:xfrm>
+          <a:prstGeom prst="roundRect">
+            <a:avLst/>
+          </a:prstGeom>
+          <a:solidFill>
+            <a:srgbClr val="18121A"/>
+          </a:solidFill>
+          <a:ln w="15875">
+            <a:solidFill>
+              <a:srgbClr val="7A5C2E"/>
+            </a:solidFill>
+          </a:ln>
+        </p:spPr>
+        <p:style>
+          <a:lnRef idx="1">
+            <a:schemeClr val="accent1"/>
+          </a:lnRef>
+          <a:fillRef idx="3">
+            <a:schemeClr val="accent1"/>
+          </a:fillRef>
+          <a:effectRef idx="2">
+            <a:schemeClr val="accent1"/>
+          </a:effectRef>
+          <a:fontRef idx="minor">
+            <a:schemeClr val="lt1"/>
+          </a:fontRef>
+        </p:style>
+        <p:txBody>
+          <a:bodyPr rtlCol="0" anchor="ctr"/>
+          <a:lstStyle/>
+          <a:p>
+            <a:pPr algn="ctr"/>
+          </a:p>
+        </p:txBody>
+      </p:sp>
+      <p:sp>
+        <p:nvSpPr>
+          <p:cNvPr id="14" name="TextBox 13"/>
+          <p:cNvSpPr txBox="1"/>
+          <p:nvPr/>
+        </p:nvSpPr>
+        <p:spPr>
+          <a:xfrm>
+            <a:off x="731520" y="2560320"/>
+            <a:ext cx="7680960" cy="347472"/>
+          </a:xfrm>
+          <a:prstGeom prst="rect">
+            <a:avLst/>
+          </a:prstGeom>
+          <a:noFill/>
+        </p:spPr>
+        <p:txBody>
+          <a:bodyPr wrap="square">
+            <a:spAutoFit/>
+          </a:bodyPr>
+          <a:lstStyle/>
+          <a:p>
+            <a:pPr algn="l">
+              <a:spcAft>
+                <a:spcPts val="600"/>
+              </a:spcAft>
+            </a:pPr>
+            <a:r>
+              <a:rPr sz="1300" b="0">
+                <a:solidFill>
+                  <a:srgbClr val="ECE1D1"/>
+                </a:solidFill>
+                <a:latin typeface="Georgia"/>
+                <a:cs typeface="Georgia"/>
+                <a:ea typeface="Georgia"/>
+              </a:rPr>
+              <a:t>□  Projeto Godot local (sem pasta sync).</a:t>
+            </a:r>
+          </a:p>
+        </p:txBody>
+      </p:sp>
+      <p:sp>
+        <p:nvSpPr>
+          <p:cNvPr id="15" name="Rounded Rectangle 14"/>
+          <p:cNvSpPr/>
+          <p:nvPr/>
+        </p:nvSpPr>
+        <p:spPr>
+          <a:xfrm>
+            <a:off x="502920" y="3017520"/>
+            <a:ext cx="8138160" cy="438912"/>
+          </a:xfrm>
+          <a:prstGeom prst="roundRect">
+            <a:avLst/>
+          </a:prstGeom>
+          <a:solidFill>
+            <a:srgbClr val="18121A"/>
+          </a:solidFill>
+          <a:ln w="15875">
+            <a:solidFill>
+              <a:srgbClr val="7A5C2E"/>
+            </a:solidFill>
+          </a:ln>
+        </p:spPr>
+        <p:style>
+          <a:lnRef idx="1">
+            <a:schemeClr val="accent1"/>
+          </a:lnRef>
+          <a:fillRef idx="3">
+            <a:schemeClr val="accent1"/>
+          </a:fillRef>
+          <a:effectRef idx="2">
+            <a:schemeClr val="accent1"/>
+          </a:effectRef>
+          <a:fontRef idx="minor">
+            <a:schemeClr val="lt1"/>
+          </a:fontRef>
+        </p:style>
+        <p:txBody>
+          <a:bodyPr rtlCol="0" anchor="ctr"/>
+          <a:lstStyle/>
+          <a:p>
+            <a:pPr algn="ctr"/>
+          </a:p>
+        </p:txBody>
+      </p:sp>
+      <p:sp>
+        <p:nvSpPr>
+          <p:cNvPr id="16" name="TextBox 15"/>
+          <p:cNvSpPr txBox="1"/>
+          <p:nvPr/>
+        </p:nvSpPr>
+        <p:spPr>
+          <a:xfrm>
+            <a:off x="731520" y="3063240"/>
+            <a:ext cx="7680960" cy="347472"/>
+          </a:xfrm>
+          <a:prstGeom prst="rect">
+            <a:avLst/>
+          </a:prstGeom>
+          <a:noFill/>
+        </p:spPr>
+        <p:txBody>
+          <a:bodyPr wrap="square">
+            <a:spAutoFit/>
+          </a:bodyPr>
+          <a:lstStyle/>
+          <a:p>
+            <a:pPr algn="l">
+              <a:spcAft>
+                <a:spcPts val="600"/>
+              </a:spcAft>
+            </a:pPr>
+            <a:r>
+              <a:rPr sz="1300" b="0">
+                <a:solidFill>
+                  <a:srgbClr val="ECE1D1"/>
+                </a:solidFill>
+                <a:latin typeface="Georgia"/>
+                <a:cs typeface="Georgia"/>
+                <a:ea typeface="Georgia"/>
+              </a:rPr>
+              <a:t>□  Diário finalizado (envio individual) + Altar.</a:t>
+            </a:r>
+          </a:p>
+        </p:txBody>
+      </p:sp>
+      <p:sp>
+        <p:nvSpPr>
+          <p:cNvPr id="17" name="TextBox 16"/>
+          <p:cNvSpPr txBox="1"/>
+          <p:nvPr/>
+        </p:nvSpPr>
+        <p:spPr>
+          <a:xfrm>
+            <a:off x="457200" y="4732020"/>
+            <a:ext cx="8229600" cy="274320"/>
+          </a:xfrm>
+          <a:prstGeom prst="rect">
+            <a:avLst/>
+          </a:prstGeom>
+          <a:noFill/>
+        </p:spPr>
+        <p:txBody>
+          <a:bodyPr wrap="square">
+            <a:spAutoFit/>
+          </a:bodyPr>
+          <a:lstStyle/>
+          <a:p>
+            <a:pPr algn="l">
+              <a:spcAft>
+                <a:spcPts val="600"/>
+              </a:spcAft>
+            </a:pPr>
+            <a:r>
+              <a:rPr sz="1000" b="0">
+                <a:solidFill>
+                  <a:srgbClr val="AB9C8A"/>
+                </a:solidFill>
+                <a:latin typeface="Cinzel"/>
+                <a:cs typeface="Cinzel"/>
+                <a:ea typeface="Cinzel"/>
+              </a:rPr>
+              <a:t>AULA 07 | MÓDULO 2</a:t>
+            </a:r>
+          </a:p>
+        </p:txBody>
+      </p:sp>
+    </p:spTree>
+  </p:cSld>
+  <p:clrMapOvr>
+    <a:masterClrMapping/>
+  </p:clrMapOvr>
+</p:sld>
+</file>
+
+<file path=ppt/slides/slide17.xml><?xml version="1.0" encoding="utf-8"?>
+<p:sld xmlns:a="http://schemas.openxmlformats.org/drawingml/2006/main" xmlns:p="http://schemas.openxmlformats.org/presentationml/2006/main" xmlns:r="http://schemas.openxmlformats.org/officeDocument/2006/relationships">
+  <p:cSld>
+    <p:spTree>
+      <p:nvGrpSpPr>
+        <p:cNvPr id="1" name=""/>
+        <p:cNvGrpSpPr/>
+        <p:nvPr/>
+      </p:nvGrpSpPr>
+      <p:grpSpPr/>
+      <p:sp>
+        <p:nvSpPr>
+          <p:cNvPr id="2" name="Rectangle 1"/>
+          <p:cNvSpPr/>
+          <p:nvPr/>
+        </p:nvSpPr>
+        <p:spPr>
+          <a:xfrm>
+            <a:off x="0" y="0"/>
+            <a:ext cx="9144000" cy="5143500"/>
+          </a:xfrm>
+          <a:prstGeom prst="rect">
+            <a:avLst/>
+          </a:prstGeom>
+          <a:solidFill>
+            <a:srgbClr val="0D0A10"/>
+          </a:solidFill>
+          <a:ln>
+            <a:noFill/>
+          </a:ln>
+        </p:spPr>
+        <p:style>
+          <a:lnRef idx="1">
+            <a:schemeClr val="accent1"/>
+          </a:lnRef>
+          <a:fillRef idx="3">
+            <a:schemeClr val="accent1"/>
+          </a:fillRef>
+          <a:effectRef idx="2">
+            <a:schemeClr val="accent1"/>
+          </a:effectRef>
+          <a:fontRef idx="minor">
+            <a:schemeClr val="lt1"/>
+          </a:fontRef>
+        </p:style>
+        <p:txBody>
+          <a:bodyPr rtlCol="0" anchor="ctr"/>
+          <a:lstStyle/>
+          <a:p>
+            <a:pPr algn="ctr"/>
+          </a:p>
+        </p:txBody>
+      </p:sp>
+      <p:sp>
+        <p:nvSpPr>
+          <p:cNvPr id="3" name="Rectangle 2"/>
+          <p:cNvSpPr/>
+          <p:nvPr/>
+        </p:nvSpPr>
+        <p:spPr>
+          <a:xfrm>
+            <a:off x="0" y="0"/>
+            <a:ext cx="9144000" cy="54864"/>
+          </a:xfrm>
+          <a:prstGeom prst="rect">
+            <a:avLst/>
+          </a:prstGeom>
+          <a:solidFill>
+            <a:srgbClr val="7A5C2E"/>
+          </a:solidFill>
+          <a:ln>
+            <a:noFill/>
+          </a:ln>
+        </p:spPr>
+        <p:style>
+          <a:lnRef idx="1">
+            <a:schemeClr val="accent1"/>
+          </a:lnRef>
+          <a:fillRef idx="3">
+            <a:schemeClr val="accent1"/>
+          </a:fillRef>
+          <a:effectRef idx="2">
+            <a:schemeClr val="accent1"/>
+          </a:effectRef>
+          <a:fontRef idx="minor">
+            <a:schemeClr val="lt1"/>
+          </a:fontRef>
+        </p:style>
+        <p:txBody>
+          <a:bodyPr rtlCol="0" anchor="ctr"/>
+          <a:lstStyle/>
+          <a:p>
+            <a:pPr algn="ctr"/>
+          </a:p>
+        </p:txBody>
+      </p:sp>
+      <p:sp>
+        <p:nvSpPr>
+          <p:cNvPr id="4" name="Rectangle 3"/>
+          <p:cNvSpPr/>
+          <p:nvPr/>
+        </p:nvSpPr>
+        <p:spPr>
+          <a:xfrm>
+            <a:off x="0" y="5070348"/>
+            <a:ext cx="9144000" cy="73152"/>
+          </a:xfrm>
+          <a:prstGeom prst="rect">
+            <a:avLst/>
+          </a:prstGeom>
+          <a:solidFill>
+            <a:srgbClr val="7A5C2E"/>
+          </a:solidFill>
+          <a:ln>
+            <a:noFill/>
+          </a:ln>
+        </p:spPr>
+        <p:style>
+          <a:lnRef idx="1">
+            <a:schemeClr val="accent1"/>
+          </a:lnRef>
+          <a:fillRef idx="3">
+            <a:schemeClr val="accent1"/>
+          </a:fillRef>
+          <a:effectRef idx="2">
+            <a:schemeClr val="accent1"/>
+          </a:effectRef>
+          <a:fontRef idx="minor">
+            <a:schemeClr val="lt1"/>
+          </a:fontRef>
+        </p:style>
+        <p:txBody>
+          <a:bodyPr rtlCol="0" anchor="ctr"/>
+          <a:lstStyle/>
+          <a:p>
+            <a:pPr algn="ctr"/>
+          </a:p>
+        </p:txBody>
+      </p:sp>
+      <p:sp>
+        <p:nvSpPr>
+          <p:cNvPr id="5" name="Rounded Rectangle 4"/>
+          <p:cNvSpPr/>
+          <p:nvPr/>
+        </p:nvSpPr>
+        <p:spPr>
+          <a:xfrm>
+            <a:off x="411480" y="256032"/>
+            <a:ext cx="640080" cy="384048"/>
+          </a:xfrm>
+          <a:prstGeom prst="roundRect">
+            <a:avLst/>
+          </a:prstGeom>
+          <a:solidFill>
+            <a:srgbClr val="7A1F2B"/>
+          </a:solidFill>
+          <a:ln w="12700">
+            <a:solidFill>
+              <a:srgbClr val="CFA759"/>
+            </a:solidFill>
+          </a:ln>
+        </p:spPr>
+        <p:style>
+          <a:lnRef idx="1">
+            <a:schemeClr val="accent1"/>
+          </a:lnRef>
+          <a:fillRef idx="3">
+            <a:schemeClr val="accent1"/>
+          </a:fillRef>
+          <a:effectRef idx="2">
+            <a:schemeClr val="accent1"/>
+          </a:effectRef>
+          <a:fontRef idx="minor">
+            <a:schemeClr val="lt1"/>
+          </a:fontRef>
+        </p:style>
+        <p:txBody>
+          <a:bodyPr rtlCol="0" anchor="ctr" wrap="none"/>
+          <a:lstStyle/>
+          <a:p>
+            <a:pPr algn="ctr"/>
+            <a:r>
+              <a:rPr sz="1400" b="1">
+                <a:solidFill>
+                  <a:srgbClr val="F2D59A"/>
+                </a:solidFill>
+                <a:latin typeface="Cinzel"/>
+                <a:cs typeface="Cinzel"/>
+                <a:ea typeface="Cinzel"/>
+              </a:rPr>
+              <a:t>16</a:t>
+            </a:r>
+          </a:p>
+        </p:txBody>
+      </p:sp>
+      <p:sp>
+        <p:nvSpPr>
+          <p:cNvPr id="6" name="TextBox 5"/>
+          <p:cNvSpPr txBox="1"/>
+          <p:nvPr/>
+        </p:nvSpPr>
+        <p:spPr>
+          <a:xfrm>
+            <a:off x="1234440" y="256032"/>
+            <a:ext cx="7498079" cy="502920"/>
+          </a:xfrm>
+          <a:prstGeom prst="rect">
+            <a:avLst/>
+          </a:prstGeom>
+          <a:noFill/>
+        </p:spPr>
+        <p:txBody>
+          <a:bodyPr wrap="square">
+            <a:spAutoFit/>
+          </a:bodyPr>
+          <a:lstStyle/>
+          <a:p>
+            <a:pPr algn="l">
+              <a:spcAft>
+                <a:spcPts val="600"/>
+              </a:spcAft>
+            </a:pPr>
+            <a:r>
+              <a:rPr sz="2200" b="1">
+                <a:solidFill>
+                  <a:srgbClr val="F2D59A"/>
+                </a:solidFill>
+                <a:latin typeface="Cinzel"/>
+                <a:cs typeface="Cinzel"/>
+                <a:ea typeface="Cinzel"/>
+              </a:rPr>
+              <a:t>Fechamento e Altar</a:t>
+            </a:r>
+          </a:p>
+        </p:txBody>
+      </p:sp>
+      <p:sp>
+        <p:nvSpPr>
+          <p:cNvPr id="7" name="Rounded Rectangle 6"/>
+          <p:cNvSpPr/>
+          <p:nvPr/>
+        </p:nvSpPr>
+        <p:spPr>
+          <a:xfrm>
+            <a:off x="502920" y="1143000"/>
+            <a:ext cx="8138160" cy="2880360"/>
+          </a:xfrm>
+          <a:prstGeom prst="roundRect">
+            <a:avLst/>
+          </a:prstGeom>
+          <a:solidFill>
+            <a:srgbClr val="18121A"/>
+          </a:solidFill>
+          <a:ln w="15875">
+            <a:solidFill>
+              <a:srgbClr val="7A5C2E"/>
+            </a:solidFill>
+          </a:ln>
+        </p:spPr>
+        <p:style>
+          <a:lnRef idx="1">
+            <a:schemeClr val="accent1"/>
+          </a:lnRef>
+          <a:fillRef idx="3">
+            <a:schemeClr val="accent1"/>
+          </a:fillRef>
+          <a:effectRef idx="2">
+            <a:schemeClr val="accent1"/>
+          </a:effectRef>
+          <a:fontRef idx="minor">
+            <a:schemeClr val="lt1"/>
+          </a:fontRef>
+        </p:style>
+        <p:txBody>
+          <a:bodyPr rtlCol="0" anchor="ctr"/>
+          <a:lstStyle/>
+          <a:p>
+            <a:pPr algn="ctr"/>
+          </a:p>
+        </p:txBody>
+      </p:sp>
+      <p:sp>
+        <p:nvSpPr>
+          <p:cNvPr id="8" name="TextBox 7"/>
+          <p:cNvSpPr txBox="1"/>
+          <p:nvPr/>
+        </p:nvSpPr>
+        <p:spPr>
+          <a:xfrm>
+            <a:off x="822960" y="1417320"/>
+            <a:ext cx="7498079" cy="2468880"/>
+          </a:xfrm>
+          <a:prstGeom prst="rect">
+            <a:avLst/>
+          </a:prstGeom>
+          <a:noFill/>
+        </p:spPr>
+        <p:txBody>
+          <a:bodyPr wrap="square">
+            <a:spAutoFit/>
+          </a:bodyPr>
+          <a:lstStyle/>
+          <a:p>
+            <a:pPr algn="ctr">
+              <a:spcAft>
+                <a:spcPts val="1200"/>
+              </a:spcAft>
+            </a:pPr>
+            <a:r>
+              <a:rPr sz="1500" b="1">
+                <a:solidFill>
+                  <a:srgbClr val="F2D59A"/>
+                </a:solidFill>
+                <a:latin typeface="Cinzel"/>
+                <a:cs typeface="Cinzel"/>
+                <a:ea typeface="Cinzel"/>
+              </a:rPr>
+              <a:t>FIM DA AULA 07: CARTÓGRAFO DA DUPLA</a:t>
+            </a:r>
+          </a:p>
+          <a:p>
+            <a:pPr algn="ctr">
+              <a:spcAft>
+                <a:spcPts val="1000"/>
+              </a:spcAft>
+            </a:pPr>
+            <a:r>
+              <a:rPr sz="1300" b="0">
+                <a:solidFill>
+                  <a:srgbClr val="ECE1D1"/>
+                </a:solidFill>
+                <a:latin typeface="Georgia"/>
+                <a:cs typeface="Georgia"/>
+                <a:ea typeface="Georgia"/>
+              </a:rPr>
+              <a:t>Um labirinto pequeno e terminado ensina mais que um mundo aberto abandonado.</a:t>
+            </a:r>
+          </a:p>
+          <a:p>
+            <a:pPr algn="ctr">
+              <a:spcAft>
+                <a:spcPts val="1200"/>
+              </a:spcAft>
+            </a:pPr>
+            <a:r>
+              <a:rPr sz="1300" b="0">
+                <a:solidFill>
+                  <a:srgbClr val="AB9C8A"/>
+                </a:solidFill>
+                <a:latin typeface="Georgia"/>
+                <a:cs typeface="Georgia"/>
+                <a:ea typeface="Georgia"/>
+              </a:rPr>
+              <a:t>Finalize o diário. Leve o código ao Altar quando o Mestre liberar.</a:t>
+            </a:r>
+          </a:p>
+          <a:p>
+            <a:pPr algn="ctr">
+              <a:spcAft>
+                <a:spcPts val="600"/>
+              </a:spcAft>
+            </a:pPr>
+            <a:r>
+              <a:rPr sz="1300" b="0">
+                <a:solidFill>
+                  <a:srgbClr val="AB9C8A"/>
+                </a:solidFill>
+                <a:latin typeface="Georgia"/>
+                <a:cs typeface="Georgia"/>
+                <a:ea typeface="Georgia"/>
+              </a:rPr>
+              <a:t>Próxima trilha: expandir o Labirinto (Aula 08+).</a:t>
             </a:r>
           </a:p>
         </p:txBody>
@@ -5341,7 +6143,7 @@
                 <a:cs typeface="Georgia"/>
                 <a:ea typeface="Georgia"/>
               </a:rPr>
-              <a:t>(GDScript UI)</a:t>
+              <a:t>(2 encontros)</a:t>
             </a:r>
           </a:p>
         </p:txBody>
@@ -5486,7 +6288,7 @@
                 <a:cs typeface="Georgia"/>
                 <a:ea typeface="Georgia"/>
               </a:rPr>
-              <a:t>Equipe + escopo</a:t>
+              <a:t>Papéis + coleta</a:t>
             </a:r>
           </a:p>
           <a:p>
@@ -5504,7 +6306,7 @@
                 <a:cs typeface="Georgia"/>
                 <a:ea typeface="Georgia"/>
               </a:rPr>
-              <a:t>+ pastas</a:t>
+              <a:t>(2 encontros)</a:t>
             </a:r>
           </a:p>
         </p:txBody>
@@ -5649,7 +6451,7 @@
                 <a:cs typeface="Georgia"/>
                 <a:ea typeface="Georgia"/>
               </a:rPr>
-              <a:t>Construir o</a:t>
+              <a:t>Expandir o</a:t>
             </a:r>
           </a:p>
           <a:p>
@@ -6010,8 +6812,8 @@
         </p:nvSpPr>
         <p:spPr>
           <a:xfrm>
-            <a:off x="822960" y="1737360"/>
-            <a:ext cx="7498079" cy="1828800"/>
+            <a:off x="822960" y="1554480"/>
+            <a:ext cx="7498079" cy="2103120"/>
           </a:xfrm>
           <a:prstGeom prst="rect">
             <a:avLst/>
@@ -6044,7 +6846,7 @@
           <a:p>
             <a:pPr algn="ctr">
               <a:spcAft>
-                <a:spcPts val="1400"/>
+                <a:spcPts val="1200"/>
               </a:spcAft>
             </a:pPr>
             <a:r>
@@ -6066,7 +6868,7 @@
               </a:spcAft>
             </a:pPr>
             <a:r>
-              <a:rPr sz="1400" b="0">
+              <a:rPr sz="1300" b="0">
                 <a:solidFill>
                   <a:srgbClr val="AB9C8A"/>
                 </a:solidFill>
@@ -6074,7 +6876,7 @@
                 <a:cs typeface="Georgia"/>
                 <a:ea typeface="Georgia"/>
               </a:rPr>
-              <a:t>Scope Creep · quadro de equipe · versionamento visual na Godot.</a:t>
+              <a:t>Scope Creep · individual ou dupla · arte da moeda × coleta · diário compartilhado.</a:t>
             </a:r>
           </a:p>
         </p:txBody>
@@ -6359,7 +7161,7 @@
                 <a:cs typeface="Cinzel"/>
                 <a:ea typeface="Cinzel"/>
               </a:rPr>
-              <a:t>Cinco ofícios do estúdio</a:t>
+              <a:t>Cinco ofícios — entregável e falha típica</a:t>
             </a:r>
           </a:p>
         </p:txBody>
@@ -6372,8 +7174,8 @@
         </p:nvSpPr>
         <p:spPr>
           <a:xfrm>
-            <a:off x="320040" y="1097280"/>
-            <a:ext cx="1691640" cy="2926080"/>
+            <a:off x="274320" y="1051560"/>
+            <a:ext cx="1719072" cy="3063240"/>
           </a:xfrm>
           <a:prstGeom prst="roundRect">
             <a:avLst/>
@@ -6417,8 +7219,8 @@
         </p:nvSpPr>
         <p:spPr>
           <a:xfrm>
-            <a:off x="411480" y="1280160"/>
-            <a:ext cx="1508760" cy="2651760"/>
+            <a:off x="347472" y="1188720"/>
+            <a:ext cx="1572768" cy="2788920"/>
           </a:xfrm>
           <a:prstGeom prst="rect">
             <a:avLst/>
@@ -6433,11 +7235,11 @@
           <a:p>
             <a:pPr algn="ctr">
               <a:spcAft>
-                <a:spcPts val="1000"/>
-              </a:spcAft>
-            </a:pPr>
-            <a:r>
-              <a:rPr sz="1100" b="1">
+                <a:spcPts val="800"/>
+              </a:spcAft>
+            </a:pPr>
+            <a:r>
+              <a:rPr sz="1000" b="1">
                 <a:solidFill>
                   <a:srgbClr val="F2D59A"/>
                 </a:solidFill>
@@ -6455,7 +7257,7 @@
               </a:spcAft>
             </a:pPr>
             <a:r>
-              <a:rPr sz="1100" b="0">
+              <a:rPr sz="1000" b="0">
                 <a:solidFill>
                   <a:srgbClr val="ECE1D1"/>
                 </a:solidFill>
@@ -6463,7 +7265,7 @@
                 <a:cs typeface="Georgia"/>
                 <a:ea typeface="Georgia"/>
               </a:rPr>
-              <a:t>O que é divertido?</a:t>
+              <a:t>Entrega: regras / GDD</a:t>
             </a:r>
           </a:p>
           <a:p>
@@ -6473,7 +7275,7 @@
               </a:spcAft>
             </a:pPr>
             <a:r>
-              <a:rPr sz="1100" b="0">
+              <a:rPr sz="1000" b="0">
                 <a:solidFill>
                   <a:srgbClr val="ECE1D1"/>
                 </a:solidFill>
@@ -6481,7 +7283,25 @@
                 <a:cs typeface="Georgia"/>
                 <a:ea typeface="Georgia"/>
               </a:rPr>
-              <a:t>Regras · GDD · loops</a:t>
+              <a:t>Falha: “a gente vê</a:t>
+            </a:r>
+          </a:p>
+          <a:p>
+            <a:pPr algn="ctr">
+              <a:spcAft>
+                <a:spcPts val="200"/>
+              </a:spcAft>
+            </a:pPr>
+            <a:r>
+              <a:rPr sz="1000" b="0">
+                <a:solidFill>
+                  <a:srgbClr val="ECE1D1"/>
+                </a:solidFill>
+                <a:latin typeface="Georgia"/>
+                <a:cs typeface="Georgia"/>
+                <a:ea typeface="Georgia"/>
+              </a:rPr>
+              <a:t>depois se é divertido”</a:t>
             </a:r>
           </a:p>
         </p:txBody>
@@ -6494,8 +7314,8 @@
         </p:nvSpPr>
         <p:spPr>
           <a:xfrm>
-            <a:off x="2103120" y="1097280"/>
-            <a:ext cx="1691640" cy="2926080"/>
+            <a:off x="2066543" y="1051560"/>
+            <a:ext cx="1719072" cy="3063240"/>
           </a:xfrm>
           <a:prstGeom prst="roundRect">
             <a:avLst/>
@@ -6539,8 +7359,8 @@
         </p:nvSpPr>
         <p:spPr>
           <a:xfrm>
-            <a:off x="2194560" y="1280160"/>
-            <a:ext cx="1508760" cy="2651760"/>
+            <a:off x="2139695" y="1188720"/>
+            <a:ext cx="1572768" cy="2788920"/>
           </a:xfrm>
           <a:prstGeom prst="rect">
             <a:avLst/>
@@ -6555,11 +7375,11 @@
           <a:p>
             <a:pPr algn="ctr">
               <a:spcAft>
-                <a:spcPts val="1000"/>
-              </a:spcAft>
-            </a:pPr>
-            <a:r>
-              <a:rPr sz="1100" b="1">
+                <a:spcPts val="800"/>
+              </a:spcAft>
+            </a:pPr>
+            <a:r>
+              <a:rPr sz="1000" b="1">
                 <a:solidFill>
                   <a:srgbClr val="F2D59A"/>
                 </a:solidFill>
@@ -6577,7 +7397,7 @@
               </a:spcAft>
             </a:pPr>
             <a:r>
-              <a:rPr sz="1100" b="0">
+              <a:rPr sz="1000" b="0">
                 <a:solidFill>
                   <a:srgbClr val="ECE1D1"/>
                 </a:solidFill>
@@ -6585,7 +7405,7 @@
                 <a:cs typeface="Georgia"/>
                 <a:ea typeface="Georgia"/>
               </a:rPr>
-              <a:t>Como funciona?</a:t>
+              <a:t>Entrega: cena que</a:t>
             </a:r>
           </a:p>
           <a:p>
@@ -6595,7 +7415,7 @@
               </a:spcAft>
             </a:pPr>
             <a:r>
-              <a:rPr sz="1100" b="0">
+              <a:rPr sz="1000" b="0">
                 <a:solidFill>
                   <a:srgbClr val="ECE1D1"/>
                 </a:solidFill>
@@ -6603,7 +7423,43 @@
                 <a:cs typeface="Georgia"/>
                 <a:ea typeface="Georgia"/>
               </a:rPr>
-              <a:t>Scripts · cenas · bugs</a:t>
+              <a:t>funciona</a:t>
+            </a:r>
+          </a:p>
+          <a:p>
+            <a:pPr algn="ctr">
+              <a:spcAft>
+                <a:spcPts val="200"/>
+              </a:spcAft>
+            </a:pPr>
+            <a:r>
+              <a:rPr sz="1000" b="0">
+                <a:solidFill>
+                  <a:srgbClr val="ECE1D1"/>
+                </a:solidFill>
+                <a:latin typeface="Georgia"/>
+                <a:cs typeface="Georgia"/>
+                <a:ea typeface="Georgia"/>
+              </a:rPr>
+              <a:t>Falha: script sem</a:t>
+            </a:r>
+          </a:p>
+          <a:p>
+            <a:pPr algn="ctr">
+              <a:spcAft>
+                <a:spcPts val="200"/>
+              </a:spcAft>
+            </a:pPr>
+            <a:r>
+              <a:rPr sz="1000" b="0">
+                <a:solidFill>
+                  <a:srgbClr val="ECE1D1"/>
+                </a:solidFill>
+                <a:latin typeface="Georgia"/>
+                <a:cs typeface="Georgia"/>
+                <a:ea typeface="Georgia"/>
+              </a:rPr>
+              <a:t>dono da .tscn</a:t>
             </a:r>
           </a:p>
         </p:txBody>
@@ -6616,8 +7472,8 @@
         </p:nvSpPr>
         <p:spPr>
           <a:xfrm>
-            <a:off x="3886200" y="1097280"/>
-            <a:ext cx="1691640" cy="2926080"/>
+            <a:off x="3858768" y="1051560"/>
+            <a:ext cx="1719072" cy="3063240"/>
           </a:xfrm>
           <a:prstGeom prst="roundRect">
             <a:avLst/>
@@ -6661,8 +7517,8 @@
         </p:nvSpPr>
         <p:spPr>
           <a:xfrm>
-            <a:off x="3977640" y="1280160"/>
-            <a:ext cx="1508760" cy="2651760"/>
+            <a:off x="3931920" y="1188720"/>
+            <a:ext cx="1572768" cy="2788920"/>
           </a:xfrm>
           <a:prstGeom prst="rect">
             <a:avLst/>
@@ -6677,11 +7533,11 @@
           <a:p>
             <a:pPr algn="ctr">
               <a:spcAft>
-                <a:spcPts val="1000"/>
-              </a:spcAft>
-            </a:pPr>
-            <a:r>
-              <a:rPr sz="1100" b="1">
+                <a:spcPts val="800"/>
+              </a:spcAft>
+            </a:pPr>
+            <a:r>
+              <a:rPr sz="1000" b="1">
                 <a:solidFill>
                   <a:srgbClr val="F2D59A"/>
                 </a:solidFill>
@@ -6699,7 +7555,7 @@
               </a:spcAft>
             </a:pPr>
             <a:r>
-              <a:rPr sz="1100" b="0">
+              <a:rPr sz="1000" b="0">
                 <a:solidFill>
                   <a:srgbClr val="ECE1D1"/>
                 </a:solidFill>
@@ -6707,7 +7563,7 @@
                 <a:cs typeface="Georgia"/>
                 <a:ea typeface="Georgia"/>
               </a:rPr>
-              <a:t>O que se vê?</a:t>
+              <a:t>Entrega: sprite / cena</a:t>
             </a:r>
           </a:p>
           <a:p>
@@ -6717,7 +7573,7 @@
               </a:spcAft>
             </a:pPr>
             <a:r>
-              <a:rPr sz="1100" b="0">
+              <a:rPr sz="1000" b="0">
                 <a:solidFill>
                   <a:srgbClr val="ECE1D1"/>
                 </a:solidFill>
@@ -6725,7 +7581,43 @@
                 <a:cs typeface="Georgia"/>
                 <a:ea typeface="Georgia"/>
               </a:rPr>
-              <a:t>Sprites · tiles · UI</a:t>
+              <a:t>visível</a:t>
+            </a:r>
+          </a:p>
+          <a:p>
+            <a:pPr algn="ctr">
+              <a:spcAft>
+                <a:spcPts val="200"/>
+              </a:spcAft>
+            </a:pPr>
+            <a:r>
+              <a:rPr sz="1000" b="0">
+                <a:solidFill>
+                  <a:srgbClr val="ECE1D1"/>
+                </a:solidFill>
+                <a:latin typeface="Georgia"/>
+                <a:cs typeface="Georgia"/>
+                <a:ea typeface="Georgia"/>
+              </a:rPr>
+              <a:t>Falha: arte sem</a:t>
+            </a:r>
+          </a:p>
+          <a:p>
+            <a:pPr algn="ctr">
+              <a:spcAft>
+                <a:spcPts val="200"/>
+              </a:spcAft>
+            </a:pPr>
+            <a:r>
+              <a:rPr sz="1000" b="0">
+                <a:solidFill>
+                  <a:srgbClr val="ECE1D1"/>
+                </a:solidFill>
+                <a:latin typeface="Georgia"/>
+                <a:cs typeface="Georgia"/>
+                <a:ea typeface="Georgia"/>
+              </a:rPr>
+              <a:t>nome de arquivo</a:t>
             </a:r>
           </a:p>
         </p:txBody>
@@ -6738,8 +7630,8 @@
         </p:nvSpPr>
         <p:spPr>
           <a:xfrm>
-            <a:off x="5669279" y="1097280"/>
-            <a:ext cx="1691640" cy="2926080"/>
+            <a:off x="5650992" y="1051560"/>
+            <a:ext cx="1719072" cy="3063240"/>
           </a:xfrm>
           <a:prstGeom prst="roundRect">
             <a:avLst/>
@@ -6783,8 +7675,8 @@
         </p:nvSpPr>
         <p:spPr>
           <a:xfrm>
-            <a:off x="5760719" y="1280160"/>
-            <a:ext cx="1508760" cy="2651760"/>
+            <a:off x="5724144" y="1188720"/>
+            <a:ext cx="1572768" cy="2788920"/>
           </a:xfrm>
           <a:prstGeom prst="rect">
             <a:avLst/>
@@ -6799,11 +7691,11 @@
           <a:p>
             <a:pPr algn="ctr">
               <a:spcAft>
-                <a:spcPts val="1000"/>
-              </a:spcAft>
-            </a:pPr>
-            <a:r>
-              <a:rPr sz="1100" b="1">
+                <a:spcPts val="800"/>
+              </a:spcAft>
+            </a:pPr>
+            <a:r>
+              <a:rPr sz="1000" b="1">
                 <a:solidFill>
                   <a:srgbClr val="F2D59A"/>
                 </a:solidFill>
@@ -6821,7 +7713,7 @@
               </a:spcAft>
             </a:pPr>
             <a:r>
-              <a:rPr sz="1100" b="0">
+              <a:rPr sz="1000" b="0">
                 <a:solidFill>
                   <a:srgbClr val="ECE1D1"/>
                 </a:solidFill>
@@ -6829,7 +7721,7 @@
                 <a:cs typeface="Georgia"/>
                 <a:ea typeface="Georgia"/>
               </a:rPr>
-              <a:t>O que se ouve?</a:t>
+              <a:t>Entrega: SFX/música</a:t>
             </a:r>
           </a:p>
           <a:p>
@@ -6839,7 +7731,7 @@
               </a:spcAft>
             </a:pPr>
             <a:r>
-              <a:rPr sz="1100" b="0">
+              <a:rPr sz="1000" b="0">
                 <a:solidFill>
                   <a:srgbClr val="ECE1D1"/>
                 </a:solidFill>
@@ -6847,7 +7739,25 @@
                 <a:cs typeface="Georgia"/>
                 <a:ea typeface="Georgia"/>
               </a:rPr>
-              <a:t>SFX · música · feedback</a:t>
+              <a:t>Falha: “deixamos</a:t>
+            </a:r>
+          </a:p>
+          <a:p>
+            <a:pPr algn="ctr">
+              <a:spcAft>
+                <a:spcPts val="200"/>
+              </a:spcAft>
+            </a:pPr>
+            <a:r>
+              <a:rPr sz="1000" b="0">
+                <a:solidFill>
+                  <a:srgbClr val="ECE1D1"/>
+                </a:solidFill>
+                <a:latin typeface="Georgia"/>
+                <a:cs typeface="Georgia"/>
+                <a:ea typeface="Georgia"/>
+              </a:rPr>
+              <a:t>silêncio para depois”</a:t>
             </a:r>
           </a:p>
         </p:txBody>
@@ -6860,8 +7770,8 @@
         </p:nvSpPr>
         <p:spPr>
           <a:xfrm>
-            <a:off x="7452360" y="1097280"/>
-            <a:ext cx="1691640" cy="2926080"/>
+            <a:off x="7443216" y="1051560"/>
+            <a:ext cx="1719072" cy="3063240"/>
           </a:xfrm>
           <a:prstGeom prst="roundRect">
             <a:avLst/>
@@ -6905,8 +7815,8 @@
         </p:nvSpPr>
         <p:spPr>
           <a:xfrm>
-            <a:off x="7543800" y="1280160"/>
-            <a:ext cx="1508760" cy="2651760"/>
+            <a:off x="7516368" y="1188720"/>
+            <a:ext cx="1572768" cy="2788920"/>
           </a:xfrm>
           <a:prstGeom prst="rect">
             <a:avLst/>
@@ -6921,11 +7831,11 @@
           <a:p>
             <a:pPr algn="ctr">
               <a:spcAft>
-                <a:spcPts val="1000"/>
-              </a:spcAft>
-            </a:pPr>
-            <a:r>
-              <a:rPr sz="1100" b="1">
+                <a:spcPts val="800"/>
+              </a:spcAft>
+            </a:pPr>
+            <a:r>
+              <a:rPr sz="1000" b="1">
                 <a:solidFill>
                   <a:srgbClr val="F2D59A"/>
                 </a:solidFill>
@@ -6943,7 +7853,7 @@
               </a:spcAft>
             </a:pPr>
             <a:r>
-              <a:rPr sz="1100" b="0">
+              <a:rPr sz="1000" b="0">
                 <a:solidFill>
                   <a:srgbClr val="ECE1D1"/>
                 </a:solidFill>
@@ -6951,7 +7861,7 @@
                 <a:cs typeface="Georgia"/>
                 <a:ea typeface="Georgia"/>
               </a:rPr>
-              <a:t>Quando e até onde?</a:t>
+              <a:t>Entrega: cercado +</a:t>
             </a:r>
           </a:p>
           <a:p>
@@ -6961,7 +7871,7 @@
               </a:spcAft>
             </a:pPr>
             <a:r>
-              <a:rPr sz="1100" b="0">
+              <a:rPr sz="1000" b="0">
                 <a:solidFill>
                   <a:srgbClr val="ECE1D1"/>
                 </a:solidFill>
@@ -6969,7 +7879,43 @@
                 <a:cs typeface="Georgia"/>
                 <a:ea typeface="Georgia"/>
               </a:rPr>
-              <a:t>Cronograma · escopo</a:t>
+              <a:t>sync</a:t>
+            </a:r>
+          </a:p>
+          <a:p>
+            <a:pPr algn="ctr">
+              <a:spcAft>
+                <a:spcPts val="200"/>
+              </a:spcAft>
+            </a:pPr>
+            <a:r>
+              <a:rPr sz="1000" b="0">
+                <a:solidFill>
+                  <a:srgbClr val="ECE1D1"/>
+                </a:solidFill>
+                <a:latin typeface="Georgia"/>
+                <a:cs typeface="Georgia"/>
+                <a:ea typeface="Georgia"/>
+              </a:rPr>
+              <a:t>Falha: ninguém diz</a:t>
+            </a:r>
+          </a:p>
+          <a:p>
+            <a:pPr algn="ctr">
+              <a:spcAft>
+                <a:spcPts val="200"/>
+              </a:spcAft>
+            </a:pPr>
+            <a:r>
+              <a:rPr sz="1000" b="0">
+                <a:solidFill>
+                  <a:srgbClr val="ECE1D1"/>
+                </a:solidFill>
+                <a:latin typeface="Georgia"/>
+                <a:cs typeface="Georgia"/>
+                <a:ea typeface="Georgia"/>
+              </a:rPr>
+              <a:t>não ao Scope Creep</a:t>
             </a:r>
           </a:p>
         </p:txBody>
@@ -7254,7 +8200,7 @@
                 <a:cs typeface="Cinzel"/>
                 <a:ea typeface="Cinzel"/>
               </a:rPr>
-              <a:t>Indie = muitos chapéus</a:t>
+              <a:t>Workflow — o que entra e sai</a:t>
             </a:r>
           </a:p>
         </p:txBody>
@@ -7267,8 +8213,8 @@
         </p:nvSpPr>
         <p:spPr>
           <a:xfrm>
-            <a:off x="502920" y="1143000"/>
-            <a:ext cx="8138160" cy="2880360"/>
+            <a:off x="274320" y="1143000"/>
+            <a:ext cx="1719072" cy="2834640"/>
           </a:xfrm>
           <a:prstGeom prst="roundRect">
             <a:avLst/>
@@ -7312,8 +8258,8 @@
         </p:nvSpPr>
         <p:spPr>
           <a:xfrm>
-            <a:off x="822960" y="1417320"/>
-            <a:ext cx="7498079" cy="2468880"/>
+            <a:off x="347472" y="1325880"/>
+            <a:ext cx="1572768" cy="2560320"/>
           </a:xfrm>
           <a:prstGeom prst="rect">
             <a:avLst/>
@@ -7328,11 +8274,11 @@
           <a:p>
             <a:pPr algn="ctr">
               <a:spcAft>
-                <a:spcPts val="1400"/>
-              </a:spcAft>
-            </a:pPr>
-            <a:r>
-              <a:rPr sz="1800" b="1">
+                <a:spcPts val="800"/>
+              </a:spcAft>
+            </a:pPr>
+            <a:r>
+              <a:rPr sz="1100" b="1">
                 <a:solidFill>
                   <a:srgbClr val="F2D59A"/>
                 </a:solidFill>
@@ -7340,17 +8286,17 @@
                 <a:cs typeface="Cinzel"/>
                 <a:ea typeface="Cinzel"/>
               </a:rPr>
-              <a:t>A mesma pessoa veste vários ofícios.</a:t>
+              <a:t>IDEIA</a:t>
             </a:r>
           </a:p>
           <a:p>
             <a:pPr algn="ctr">
               <a:spcAft>
-                <a:spcPts val="1000"/>
-              </a:spcAft>
-            </a:pPr>
-            <a:r>
-              <a:rPr sz="1500" b="0">
+                <a:spcPts val="200"/>
+              </a:spcAft>
+            </a:pPr>
+            <a:r>
+              <a:rPr sz="1100" b="0">
                 <a:solidFill>
                   <a:srgbClr val="ECE1D1"/>
                 </a:solidFill>
@@ -7358,32 +8304,610 @@
                 <a:cs typeface="Georgia"/>
                 <a:ea typeface="Georgia"/>
               </a:rPr>
-              <a:t>Mesmo assim: nomeie a dona(o) de cada entrega.</a:t>
+              <a:t>Entra: sonho</a:t>
             </a:r>
           </a:p>
           <a:p>
             <a:pPr algn="ctr">
               <a:spcAft>
-                <a:spcPts val="600"/>
-              </a:spcAft>
-            </a:pPr>
-            <a:r>
-              <a:rPr sz="1300" b="0">
-                <a:solidFill>
-                  <a:srgbClr val="AB9C8A"/>
+                <a:spcPts val="200"/>
+              </a:spcAft>
+            </a:pPr>
+            <a:r>
+              <a:rPr sz="1100" b="0">
+                <a:solidFill>
+                  <a:srgbClr val="ECE1D1"/>
                 </a:solidFill>
                 <a:latin typeface="Georgia"/>
                 <a:cs typeface="Georgia"/>
                 <a:ea typeface="Georgia"/>
               </a:rPr>
-              <a:t>Sem dono no quadro, ninguém é responsável.</a:t>
-            </a:r>
-          </a:p>
-        </p:txBody>
-      </p:sp>
-      <p:sp>
-        <p:nvSpPr>
-          <p:cNvPr id="9" name="TextBox 8"/>
+              <a:t>Sai: intenção</a:t>
+            </a:r>
+          </a:p>
+          <a:p>
+            <a:pPr algn="ctr">
+              <a:spcAft>
+                <a:spcPts val="200"/>
+              </a:spcAft>
+            </a:pPr>
+            <a:r>
+              <a:rPr sz="1100" b="0">
+                <a:solidFill>
+                  <a:srgbClr val="ECE1D1"/>
+                </a:solidFill>
+                <a:latin typeface="Georgia"/>
+                <a:cs typeface="Georgia"/>
+                <a:ea typeface="Georgia"/>
+              </a:rPr>
+              <a:t>clara</a:t>
+            </a:r>
+          </a:p>
+        </p:txBody>
+      </p:sp>
+      <p:sp>
+        <p:nvSpPr>
+          <p:cNvPr id="9" name="Rounded Rectangle 8"/>
+          <p:cNvSpPr/>
+          <p:nvPr/>
+        </p:nvSpPr>
+        <p:spPr>
+          <a:xfrm>
+            <a:off x="2066543" y="1143000"/>
+            <a:ext cx="1719072" cy="2834640"/>
+          </a:xfrm>
+          <a:prstGeom prst="roundRect">
+            <a:avLst/>
+          </a:prstGeom>
+          <a:solidFill>
+            <a:srgbClr val="18121A"/>
+          </a:solidFill>
+          <a:ln w="15875">
+            <a:solidFill>
+              <a:srgbClr val="7A5C2E"/>
+            </a:solidFill>
+          </a:ln>
+        </p:spPr>
+        <p:style>
+          <a:lnRef idx="1">
+            <a:schemeClr val="accent1"/>
+          </a:lnRef>
+          <a:fillRef idx="3">
+            <a:schemeClr val="accent1"/>
+          </a:fillRef>
+          <a:effectRef idx="2">
+            <a:schemeClr val="accent1"/>
+          </a:effectRef>
+          <a:fontRef idx="minor">
+            <a:schemeClr val="lt1"/>
+          </a:fontRef>
+        </p:style>
+        <p:txBody>
+          <a:bodyPr rtlCol="0" anchor="ctr"/>
+          <a:lstStyle/>
+          <a:p>
+            <a:pPr algn="ctr"/>
+          </a:p>
+        </p:txBody>
+      </p:sp>
+      <p:sp>
+        <p:nvSpPr>
+          <p:cNvPr id="10" name="TextBox 9"/>
+          <p:cNvSpPr txBox="1"/>
+          <p:nvPr/>
+        </p:nvSpPr>
+        <p:spPr>
+          <a:xfrm>
+            <a:off x="2139695" y="1325880"/>
+            <a:ext cx="1572768" cy="2560320"/>
+          </a:xfrm>
+          <a:prstGeom prst="rect">
+            <a:avLst/>
+          </a:prstGeom>
+          <a:noFill/>
+        </p:spPr>
+        <p:txBody>
+          <a:bodyPr wrap="square">
+            <a:spAutoFit/>
+          </a:bodyPr>
+          <a:lstStyle/>
+          <a:p>
+            <a:pPr algn="ctr">
+              <a:spcAft>
+                <a:spcPts val="800"/>
+              </a:spcAft>
+            </a:pPr>
+            <a:r>
+              <a:rPr sz="1100" b="1">
+                <a:solidFill>
+                  <a:srgbClr val="F2D59A"/>
+                </a:solidFill>
+                <a:latin typeface="Cinzel"/>
+                <a:cs typeface="Cinzel"/>
+                <a:ea typeface="Cinzel"/>
+              </a:rPr>
+              <a:t>MVP</a:t>
+            </a:r>
+          </a:p>
+          <a:p>
+            <a:pPr algn="ctr">
+              <a:spcAft>
+                <a:spcPts val="200"/>
+              </a:spcAft>
+            </a:pPr>
+            <a:r>
+              <a:rPr sz="1100" b="0">
+                <a:solidFill>
+                  <a:srgbClr val="ECE1D1"/>
+                </a:solidFill>
+                <a:latin typeface="Georgia"/>
+                <a:cs typeface="Georgia"/>
+                <a:ea typeface="Georgia"/>
+              </a:rPr>
+              <a:t>Entra: lista</a:t>
+            </a:r>
+          </a:p>
+          <a:p>
+            <a:pPr algn="ctr">
+              <a:spcAft>
+                <a:spcPts val="200"/>
+              </a:spcAft>
+            </a:pPr>
+            <a:r>
+              <a:rPr sz="1100" b="0">
+                <a:solidFill>
+                  <a:srgbClr val="ECE1D1"/>
+                </a:solidFill>
+                <a:latin typeface="Georgia"/>
+                <a:cs typeface="Georgia"/>
+                <a:ea typeface="Georgia"/>
+              </a:rPr>
+              <a:t>Sai: cercado</a:t>
+            </a:r>
+          </a:p>
+          <a:p>
+            <a:pPr algn="ctr">
+              <a:spcAft>
+                <a:spcPts val="200"/>
+              </a:spcAft>
+            </a:pPr>
+            <a:r>
+              <a:rPr sz="1100" b="0">
+                <a:solidFill>
+                  <a:srgbClr val="ECE1D1"/>
+                </a:solidFill>
+                <a:latin typeface="Georgia"/>
+                <a:cs typeface="Georgia"/>
+                <a:ea typeface="Georgia"/>
+              </a:rPr>
+              <a:t>fechado</a:t>
+            </a:r>
+          </a:p>
+        </p:txBody>
+      </p:sp>
+      <p:sp>
+        <p:nvSpPr>
+          <p:cNvPr id="11" name="Rounded Rectangle 10"/>
+          <p:cNvSpPr/>
+          <p:nvPr/>
+        </p:nvSpPr>
+        <p:spPr>
+          <a:xfrm>
+            <a:off x="3858768" y="1143000"/>
+            <a:ext cx="1719072" cy="2834640"/>
+          </a:xfrm>
+          <a:prstGeom prst="roundRect">
+            <a:avLst/>
+          </a:prstGeom>
+          <a:solidFill>
+            <a:srgbClr val="18121A"/>
+          </a:solidFill>
+          <a:ln w="15875">
+            <a:solidFill>
+              <a:srgbClr val="7A5C2E"/>
+            </a:solidFill>
+          </a:ln>
+        </p:spPr>
+        <p:style>
+          <a:lnRef idx="1">
+            <a:schemeClr val="accent1"/>
+          </a:lnRef>
+          <a:fillRef idx="3">
+            <a:schemeClr val="accent1"/>
+          </a:fillRef>
+          <a:effectRef idx="2">
+            <a:schemeClr val="accent1"/>
+          </a:effectRef>
+          <a:fontRef idx="minor">
+            <a:schemeClr val="lt1"/>
+          </a:fontRef>
+        </p:style>
+        <p:txBody>
+          <a:bodyPr rtlCol="0" anchor="ctr"/>
+          <a:lstStyle/>
+          <a:p>
+            <a:pPr algn="ctr"/>
+          </a:p>
+        </p:txBody>
+      </p:sp>
+      <p:sp>
+        <p:nvSpPr>
+          <p:cNvPr id="12" name="TextBox 11"/>
+          <p:cNvSpPr txBox="1"/>
+          <p:nvPr/>
+        </p:nvSpPr>
+        <p:spPr>
+          <a:xfrm>
+            <a:off x="3931920" y="1325880"/>
+            <a:ext cx="1572768" cy="2560320"/>
+          </a:xfrm>
+          <a:prstGeom prst="rect">
+            <a:avLst/>
+          </a:prstGeom>
+          <a:noFill/>
+        </p:spPr>
+        <p:txBody>
+          <a:bodyPr wrap="square">
+            <a:spAutoFit/>
+          </a:bodyPr>
+          <a:lstStyle/>
+          <a:p>
+            <a:pPr algn="ctr">
+              <a:spcAft>
+                <a:spcPts val="800"/>
+              </a:spcAft>
+            </a:pPr>
+            <a:r>
+              <a:rPr sz="1100" b="1">
+                <a:solidFill>
+                  <a:srgbClr val="F2D59A"/>
+                </a:solidFill>
+                <a:latin typeface="Cinzel"/>
+                <a:cs typeface="Cinzel"/>
+                <a:ea typeface="Cinzel"/>
+              </a:rPr>
+              <a:t>PRODUÇÃO</a:t>
+            </a:r>
+          </a:p>
+          <a:p>
+            <a:pPr algn="ctr">
+              <a:spcAft>
+                <a:spcPts val="200"/>
+              </a:spcAft>
+            </a:pPr>
+            <a:r>
+              <a:rPr sz="1100" b="0">
+                <a:solidFill>
+                  <a:srgbClr val="ECE1D1"/>
+                </a:solidFill>
+                <a:latin typeface="Georgia"/>
+                <a:cs typeface="Georgia"/>
+                <a:ea typeface="Georgia"/>
+              </a:rPr>
+              <a:t>Entra: ofício</a:t>
+            </a:r>
+          </a:p>
+          <a:p>
+            <a:pPr algn="ctr">
+              <a:spcAft>
+                <a:spcPts val="200"/>
+              </a:spcAft>
+            </a:pPr>
+            <a:r>
+              <a:rPr sz="1100" b="0">
+                <a:solidFill>
+                  <a:srgbClr val="ECE1D1"/>
+                </a:solidFill>
+                <a:latin typeface="Georgia"/>
+                <a:cs typeface="Georgia"/>
+                <a:ea typeface="Georgia"/>
+              </a:rPr>
+              <a:t>Sai: arquivo</a:t>
+            </a:r>
+          </a:p>
+          <a:p>
+            <a:pPr algn="ctr">
+              <a:spcAft>
+                <a:spcPts val="200"/>
+              </a:spcAft>
+            </a:pPr>
+            <a:r>
+              <a:rPr sz="1100" b="0">
+                <a:solidFill>
+                  <a:srgbClr val="ECE1D1"/>
+                </a:solidFill>
+                <a:latin typeface="Georgia"/>
+                <a:cs typeface="Georgia"/>
+                <a:ea typeface="Georgia"/>
+              </a:rPr>
+              <a:t>com dono</a:t>
+            </a:r>
+          </a:p>
+        </p:txBody>
+      </p:sp>
+      <p:sp>
+        <p:nvSpPr>
+          <p:cNvPr id="13" name="Rounded Rectangle 12"/>
+          <p:cNvSpPr/>
+          <p:nvPr/>
+        </p:nvSpPr>
+        <p:spPr>
+          <a:xfrm>
+            <a:off x="5650992" y="1143000"/>
+            <a:ext cx="1719072" cy="2834640"/>
+          </a:xfrm>
+          <a:prstGeom prst="roundRect">
+            <a:avLst/>
+          </a:prstGeom>
+          <a:solidFill>
+            <a:srgbClr val="18121A"/>
+          </a:solidFill>
+          <a:ln w="15875">
+            <a:solidFill>
+              <a:srgbClr val="7A5C2E"/>
+            </a:solidFill>
+          </a:ln>
+        </p:spPr>
+        <p:style>
+          <a:lnRef idx="1">
+            <a:schemeClr val="accent1"/>
+          </a:lnRef>
+          <a:fillRef idx="3">
+            <a:schemeClr val="accent1"/>
+          </a:fillRef>
+          <a:effectRef idx="2">
+            <a:schemeClr val="accent1"/>
+          </a:effectRef>
+          <a:fontRef idx="minor">
+            <a:schemeClr val="lt1"/>
+          </a:fontRef>
+        </p:style>
+        <p:txBody>
+          <a:bodyPr rtlCol="0" anchor="ctr"/>
+          <a:lstStyle/>
+          <a:p>
+            <a:pPr algn="ctr"/>
+          </a:p>
+        </p:txBody>
+      </p:sp>
+      <p:sp>
+        <p:nvSpPr>
+          <p:cNvPr id="14" name="TextBox 13"/>
+          <p:cNvSpPr txBox="1"/>
+          <p:nvPr/>
+        </p:nvSpPr>
+        <p:spPr>
+          <a:xfrm>
+            <a:off x="5724144" y="1325880"/>
+            <a:ext cx="1572768" cy="2560320"/>
+          </a:xfrm>
+          <a:prstGeom prst="rect">
+            <a:avLst/>
+          </a:prstGeom>
+          <a:noFill/>
+        </p:spPr>
+        <p:txBody>
+          <a:bodyPr wrap="square">
+            <a:spAutoFit/>
+          </a:bodyPr>
+          <a:lstStyle/>
+          <a:p>
+            <a:pPr algn="ctr">
+              <a:spcAft>
+                <a:spcPts val="800"/>
+              </a:spcAft>
+            </a:pPr>
+            <a:r>
+              <a:rPr sz="1100" b="1">
+                <a:solidFill>
+                  <a:srgbClr val="F2D59A"/>
+                </a:solidFill>
+                <a:latin typeface="Cinzel"/>
+                <a:cs typeface="Cinzel"/>
+                <a:ea typeface="Cinzel"/>
+              </a:rPr>
+              <a:t>INTEGRAÇÃO</a:t>
+            </a:r>
+          </a:p>
+          <a:p>
+            <a:pPr algn="ctr">
+              <a:spcAft>
+                <a:spcPts val="200"/>
+              </a:spcAft>
+            </a:pPr>
+            <a:r>
+              <a:rPr sz="1100" b="0">
+                <a:solidFill>
+                  <a:srgbClr val="ECE1D1"/>
+                </a:solidFill>
+                <a:latin typeface="Georgia"/>
+                <a:cs typeface="Georgia"/>
+                <a:ea typeface="Georgia"/>
+              </a:rPr>
+              <a:t>Entra: cenas</a:t>
+            </a:r>
+          </a:p>
+          <a:p>
+            <a:pPr algn="ctr">
+              <a:spcAft>
+                <a:spcPts val="200"/>
+              </a:spcAft>
+            </a:pPr>
+            <a:r>
+              <a:rPr sz="1100" b="0">
+                <a:solidFill>
+                  <a:srgbClr val="ECE1D1"/>
+                </a:solidFill>
+                <a:latin typeface="Georgia"/>
+                <a:cs typeface="Georgia"/>
+                <a:ea typeface="Georgia"/>
+              </a:rPr>
+              <a:t>Sai: um projeto</a:t>
+            </a:r>
+          </a:p>
+          <a:p>
+            <a:pPr algn="ctr">
+              <a:spcAft>
+                <a:spcPts val="200"/>
+              </a:spcAft>
+            </a:pPr>
+            <a:r>
+              <a:rPr sz="1100" b="0">
+                <a:solidFill>
+                  <a:srgbClr val="ECE1D1"/>
+                </a:solidFill>
+                <a:latin typeface="Georgia"/>
+                <a:cs typeface="Georgia"/>
+                <a:ea typeface="Georgia"/>
+              </a:rPr>
+              <a:t>que abre</a:t>
+            </a:r>
+          </a:p>
+        </p:txBody>
+      </p:sp>
+      <p:sp>
+        <p:nvSpPr>
+          <p:cNvPr id="15" name="Rounded Rectangle 14"/>
+          <p:cNvSpPr/>
+          <p:nvPr/>
+        </p:nvSpPr>
+        <p:spPr>
+          <a:xfrm>
+            <a:off x="7443216" y="1143000"/>
+            <a:ext cx="1719072" cy="2834640"/>
+          </a:xfrm>
+          <a:prstGeom prst="roundRect">
+            <a:avLst/>
+          </a:prstGeom>
+          <a:solidFill>
+            <a:srgbClr val="18121A"/>
+          </a:solidFill>
+          <a:ln w="15875">
+            <a:solidFill>
+              <a:srgbClr val="7A5C2E"/>
+            </a:solidFill>
+          </a:ln>
+        </p:spPr>
+        <p:style>
+          <a:lnRef idx="1">
+            <a:schemeClr val="accent1"/>
+          </a:lnRef>
+          <a:fillRef idx="3">
+            <a:schemeClr val="accent1"/>
+          </a:fillRef>
+          <a:effectRef idx="2">
+            <a:schemeClr val="accent1"/>
+          </a:effectRef>
+          <a:fontRef idx="minor">
+            <a:schemeClr val="lt1"/>
+          </a:fontRef>
+        </p:style>
+        <p:txBody>
+          <a:bodyPr rtlCol="0" anchor="ctr"/>
+          <a:lstStyle/>
+          <a:p>
+            <a:pPr algn="ctr"/>
+          </a:p>
+        </p:txBody>
+      </p:sp>
+      <p:sp>
+        <p:nvSpPr>
+          <p:cNvPr id="16" name="TextBox 15"/>
+          <p:cNvSpPr txBox="1"/>
+          <p:nvPr/>
+        </p:nvSpPr>
+        <p:spPr>
+          <a:xfrm>
+            <a:off x="7516368" y="1325880"/>
+            <a:ext cx="1572768" cy="2560320"/>
+          </a:xfrm>
+          <a:prstGeom prst="rect">
+            <a:avLst/>
+          </a:prstGeom>
+          <a:noFill/>
+        </p:spPr>
+        <p:txBody>
+          <a:bodyPr wrap="square">
+            <a:spAutoFit/>
+          </a:bodyPr>
+          <a:lstStyle/>
+          <a:p>
+            <a:pPr algn="ctr">
+              <a:spcAft>
+                <a:spcPts val="800"/>
+              </a:spcAft>
+            </a:pPr>
+            <a:r>
+              <a:rPr sz="1100" b="1">
+                <a:solidFill>
+                  <a:srgbClr val="F2D59A"/>
+                </a:solidFill>
+                <a:latin typeface="Cinzel"/>
+                <a:cs typeface="Cinzel"/>
+                <a:ea typeface="Cinzel"/>
+              </a:rPr>
+              <a:t>PLAYTEST</a:t>
+            </a:r>
+          </a:p>
+          <a:p>
+            <a:pPr algn="ctr">
+              <a:spcAft>
+                <a:spcPts val="200"/>
+              </a:spcAft>
+            </a:pPr>
+            <a:r>
+              <a:rPr sz="1100" b="0">
+                <a:solidFill>
+                  <a:srgbClr val="ECE1D1"/>
+                </a:solidFill>
+                <a:latin typeface="Georgia"/>
+                <a:cs typeface="Georgia"/>
+                <a:ea typeface="Georgia"/>
+              </a:rPr>
+              <a:t>Entra: build</a:t>
+            </a:r>
+          </a:p>
+          <a:p>
+            <a:pPr algn="ctr">
+              <a:spcAft>
+                <a:spcPts val="200"/>
+              </a:spcAft>
+            </a:pPr>
+            <a:r>
+              <a:rPr sz="1100" b="0">
+                <a:solidFill>
+                  <a:srgbClr val="ECE1D1"/>
+                </a:solidFill>
+                <a:latin typeface="Georgia"/>
+                <a:cs typeface="Georgia"/>
+                <a:ea typeface="Georgia"/>
+              </a:rPr>
+              <a:t>Sai: corte ou</a:t>
+            </a:r>
+          </a:p>
+          <a:p>
+            <a:pPr algn="ctr">
+              <a:spcAft>
+                <a:spcPts val="200"/>
+              </a:spcAft>
+            </a:pPr>
+            <a:r>
+              <a:rPr sz="1100" b="0">
+                <a:solidFill>
+                  <a:srgbClr val="ECE1D1"/>
+                </a:solidFill>
+                <a:latin typeface="Georgia"/>
+                <a:cs typeface="Georgia"/>
+                <a:ea typeface="Georgia"/>
+              </a:rPr>
+              <a:t>próximo passo</a:t>
+            </a:r>
+          </a:p>
+        </p:txBody>
+      </p:sp>
+      <p:sp>
+        <p:nvSpPr>
+          <p:cNvPr id="17" name="TextBox 16"/>
           <p:cNvSpPr txBox="1"/>
           <p:nvPr/>
         </p:nvSpPr>
@@ -7661,7 +9185,7 @@
                 <a:cs typeface="Cinzel"/>
                 <a:ea typeface="Cinzel"/>
               </a:rPr>
-              <a:t>Workflow em etapas</a:t>
+              <a:t>Scope Creep no Labirinto</a:t>
             </a:r>
           </a:p>
         </p:txBody>
@@ -7674,8 +9198,8 @@
         </p:nvSpPr>
         <p:spPr>
           <a:xfrm>
-            <a:off x="320040" y="1280160"/>
-            <a:ext cx="1691640" cy="2377440"/>
+            <a:off x="457200" y="1188720"/>
+            <a:ext cx="2743200" cy="2560320"/>
           </a:xfrm>
           <a:prstGeom prst="roundRect">
             <a:avLst/>
@@ -7719,8 +9243,8 @@
         </p:nvSpPr>
         <p:spPr>
           <a:xfrm>
-            <a:off x="411480" y="1508760"/>
-            <a:ext cx="1508760" cy="2011680"/>
+            <a:off x="640080" y="1417320"/>
+            <a:ext cx="2377440" cy="2194560"/>
           </a:xfrm>
           <a:prstGeom prst="rect">
             <a:avLst/>
@@ -7735,7 +9259,7 @@
           <a:p>
             <a:pPr algn="ctr">
               <a:spcAft>
-                <a:spcPts val="1000"/>
+                <a:spcPts val="1200"/>
               </a:spcAft>
             </a:pPr>
             <a:r>
@@ -7747,13 +9271,13 @@
                 <a:cs typeface="Cinzel"/>
                 <a:ea typeface="Cinzel"/>
               </a:rPr>
-              <a:t>IDEIA</a:t>
+              <a:t>EXEMPLO RUIM</a:t>
             </a:r>
           </a:p>
           <a:p>
             <a:pPr algn="ctr">
               <a:spcAft>
-                <a:spcPts val="200"/>
+                <a:spcPts val="600"/>
               </a:spcAft>
             </a:pPr>
             <a:r>
@@ -7765,25 +9289,7 @@
                 <a:cs typeface="Georgia"/>
                 <a:ea typeface="Georgia"/>
               </a:rPr>
-              <a:t>Sonho</a:t>
-            </a:r>
-          </a:p>
-          <a:p>
-            <a:pPr algn="ctr">
-              <a:spcAft>
-                <a:spcPts val="200"/>
-              </a:spcAft>
-            </a:pPr>
-            <a:r>
-              <a:rPr sz="1200" b="0">
-                <a:solidFill>
-                  <a:srgbClr val="ECE1D1"/>
-                </a:solidFill>
-                <a:latin typeface="Georgia"/>
-                <a:cs typeface="Georgia"/>
-                <a:ea typeface="Georgia"/>
-              </a:rPr>
-              <a:t>inicial</a:t>
+              <a:t>“E se tiver inimigos, loja, boss e online?” — ideias boas no momento errado.</a:t>
             </a:r>
           </a:p>
         </p:txBody>
@@ -7796,8 +9302,8 @@
         </p:nvSpPr>
         <p:spPr>
           <a:xfrm>
-            <a:off x="2103120" y="1280160"/>
-            <a:ext cx="1691640" cy="2377440"/>
+            <a:off x="3337560" y="1188720"/>
+            <a:ext cx="2743200" cy="2560320"/>
           </a:xfrm>
           <a:prstGeom prst="roundRect">
             <a:avLst/>
@@ -7841,8 +9347,8 @@
         </p:nvSpPr>
         <p:spPr>
           <a:xfrm>
-            <a:off x="2194560" y="1508760"/>
-            <a:ext cx="1508760" cy="2011680"/>
+            <a:off x="3520440" y="1417320"/>
+            <a:ext cx="2377440" cy="2194560"/>
           </a:xfrm>
           <a:prstGeom prst="rect">
             <a:avLst/>
@@ -7857,7 +9363,7 @@
           <a:p>
             <a:pPr algn="ctr">
               <a:spcAft>
-                <a:spcPts val="1000"/>
+                <a:spcPts val="1200"/>
               </a:spcAft>
             </a:pPr>
             <a:r>
@@ -7869,13 +9375,13 @@
                 <a:cs typeface="Cinzel"/>
                 <a:ea typeface="Cinzel"/>
               </a:rPr>
-              <a:t>MVP</a:t>
+              <a:t>MVP DESTA AULA</a:t>
             </a:r>
           </a:p>
           <a:p>
             <a:pPr algn="ctr">
               <a:spcAft>
-                <a:spcPts val="200"/>
+                <a:spcPts val="600"/>
               </a:spcAft>
             </a:pPr>
             <a:r>
@@ -7887,25 +9393,7 @@
                 <a:cs typeface="Georgia"/>
                 <a:ea typeface="Georgia"/>
               </a:rPr>
-              <a:t>Escopo</a:t>
-            </a:r>
-          </a:p>
-          <a:p>
-            <a:pPr algn="ctr">
-              <a:spcAft>
-                <a:spcPts val="200"/>
-              </a:spcAft>
-            </a:pPr>
-            <a:r>
-              <a:rPr sz="1200" b="0">
-                <a:solidFill>
-                  <a:srgbClr val="ECE1D1"/>
-                </a:solidFill>
-                <a:latin typeface="Georgia"/>
-                <a:cs typeface="Georgia"/>
-                <a:ea typeface="Georgia"/>
-              </a:rPr>
-              <a:t>fechado</a:t>
+              <a:t>E1: sprite LibreSprite · E2: Player + coleta. Só isso.</a:t>
             </a:r>
           </a:p>
         </p:txBody>
@@ -7918,8 +9406,8 @@
         </p:nvSpPr>
         <p:spPr>
           <a:xfrm>
-            <a:off x="3886200" y="1280160"/>
-            <a:ext cx="1691640" cy="2377440"/>
+            <a:off x="6217920" y="1188720"/>
+            <a:ext cx="2743200" cy="2560320"/>
           </a:xfrm>
           <a:prstGeom prst="roundRect">
             <a:avLst/>
@@ -7963,8 +9451,8 @@
         </p:nvSpPr>
         <p:spPr>
           <a:xfrm>
-            <a:off x="3977640" y="1508760"/>
-            <a:ext cx="1508760" cy="2011680"/>
+            <a:off x="6400800" y="1417320"/>
+            <a:ext cx="2377440" cy="2194560"/>
           </a:xfrm>
           <a:prstGeom prst="rect">
             <a:avLst/>
@@ -7979,7 +9467,7 @@
           <a:p>
             <a:pPr algn="ctr">
               <a:spcAft>
-                <a:spcPts val="1000"/>
+                <a:spcPts val="1200"/>
               </a:spcAft>
             </a:pPr>
             <a:r>
@@ -7991,13 +9479,13 @@
                 <a:cs typeface="Cinzel"/>
                 <a:ea typeface="Cinzel"/>
               </a:rPr>
-              <a:t>PRODUÇÃO</a:t>
+              <a:t>ANTÍDOTO</a:t>
             </a:r>
           </a:p>
           <a:p>
             <a:pPr algn="ctr">
               <a:spcAft>
-                <a:spcPts val="200"/>
+                <a:spcPts val="600"/>
               </a:spcAft>
             </a:pPr>
             <a:r>
@@ -8009,276 +9497,14 @@
                 <a:cs typeface="Georgia"/>
                 <a:ea typeface="Georgia"/>
               </a:rPr>
-              <a:t>Por</a:t>
-            </a:r>
-          </a:p>
-          <a:p>
-            <a:pPr algn="ctr">
-              <a:spcAft>
-                <a:spcPts val="200"/>
-              </a:spcAft>
-            </a:pPr>
-            <a:r>
-              <a:rPr sz="1200" b="0">
-                <a:solidFill>
-                  <a:srgbClr val="ECE1D1"/>
-                </a:solidFill>
-                <a:latin typeface="Georgia"/>
-                <a:cs typeface="Georgia"/>
-                <a:ea typeface="Georgia"/>
-              </a:rPr>
-              <a:t>papel</a:t>
-            </a:r>
-          </a:p>
-        </p:txBody>
-      </p:sp>
-      <p:sp>
-        <p:nvSpPr>
-          <p:cNvPr id="13" name="Rounded Rectangle 12"/>
-          <p:cNvSpPr/>
-          <p:nvPr/>
-        </p:nvSpPr>
-        <p:spPr>
-          <a:xfrm>
-            <a:off x="5669279" y="1280160"/>
-            <a:ext cx="1691640" cy="2377440"/>
-          </a:xfrm>
-          <a:prstGeom prst="roundRect">
-            <a:avLst/>
-          </a:prstGeom>
-          <a:solidFill>
-            <a:srgbClr val="18121A"/>
-          </a:solidFill>
-          <a:ln w="15875">
-            <a:solidFill>
-              <a:srgbClr val="7A5C2E"/>
-            </a:solidFill>
-          </a:ln>
-        </p:spPr>
-        <p:style>
-          <a:lnRef idx="1">
-            <a:schemeClr val="accent1"/>
-          </a:lnRef>
-          <a:fillRef idx="3">
-            <a:schemeClr val="accent1"/>
-          </a:fillRef>
-          <a:effectRef idx="2">
-            <a:schemeClr val="accent1"/>
-          </a:effectRef>
-          <a:fontRef idx="minor">
-            <a:schemeClr val="lt1"/>
-          </a:fontRef>
-        </p:style>
-        <p:txBody>
-          <a:bodyPr rtlCol="0" anchor="ctr"/>
-          <a:lstStyle/>
-          <a:p>
-            <a:pPr algn="ctr"/>
-          </a:p>
-        </p:txBody>
-      </p:sp>
-      <p:sp>
-        <p:nvSpPr>
-          <p:cNvPr id="14" name="TextBox 13"/>
-          <p:cNvSpPr txBox="1"/>
-          <p:nvPr/>
-        </p:nvSpPr>
-        <p:spPr>
-          <a:xfrm>
-            <a:off x="5760719" y="1508760"/>
-            <a:ext cx="1508760" cy="2011680"/>
-          </a:xfrm>
-          <a:prstGeom prst="rect">
-            <a:avLst/>
-          </a:prstGeom>
-          <a:noFill/>
-        </p:spPr>
-        <p:txBody>
-          <a:bodyPr wrap="square">
-            <a:spAutoFit/>
-          </a:bodyPr>
-          <a:lstStyle/>
-          <a:p>
-            <a:pPr algn="ctr">
-              <a:spcAft>
-                <a:spcPts val="1000"/>
-              </a:spcAft>
-            </a:pPr>
-            <a:r>
-              <a:rPr sz="1200" b="1">
-                <a:solidFill>
-                  <a:srgbClr val="F2D59A"/>
-                </a:solidFill>
-                <a:latin typeface="Cinzel"/>
-                <a:cs typeface="Cinzel"/>
-                <a:ea typeface="Cinzel"/>
-              </a:rPr>
-              <a:t>INTEGRAÇÃO</a:t>
-            </a:r>
-          </a:p>
-          <a:p>
-            <a:pPr algn="ctr">
-              <a:spcAft>
-                <a:spcPts val="200"/>
-              </a:spcAft>
-            </a:pPr>
-            <a:r>
-              <a:rPr sz="1200" b="0">
-                <a:solidFill>
-                  <a:srgbClr val="ECE1D1"/>
-                </a:solidFill>
-                <a:latin typeface="Georgia"/>
-                <a:cs typeface="Georgia"/>
-                <a:ea typeface="Georgia"/>
-              </a:rPr>
-              <a:t>Juntar</a:t>
-            </a:r>
-          </a:p>
-          <a:p>
-            <a:pPr algn="ctr">
-              <a:spcAft>
-                <a:spcPts val="200"/>
-              </a:spcAft>
-            </a:pPr>
-            <a:r>
-              <a:rPr sz="1200" b="0">
-                <a:solidFill>
-                  <a:srgbClr val="ECE1D1"/>
-                </a:solidFill>
-                <a:latin typeface="Georgia"/>
-                <a:cs typeface="Georgia"/>
-                <a:ea typeface="Georgia"/>
-              </a:rPr>
-              <a:t>cedo</a:t>
-            </a:r>
-          </a:p>
-        </p:txBody>
-      </p:sp>
-      <p:sp>
-        <p:nvSpPr>
-          <p:cNvPr id="15" name="Rounded Rectangle 14"/>
-          <p:cNvSpPr/>
-          <p:nvPr/>
-        </p:nvSpPr>
-        <p:spPr>
-          <a:xfrm>
-            <a:off x="7452360" y="1280160"/>
-            <a:ext cx="1691640" cy="2377440"/>
-          </a:xfrm>
-          <a:prstGeom prst="roundRect">
-            <a:avLst/>
-          </a:prstGeom>
-          <a:solidFill>
-            <a:srgbClr val="18121A"/>
-          </a:solidFill>
-          <a:ln w="15875">
-            <a:solidFill>
-              <a:srgbClr val="7A5C2E"/>
-            </a:solidFill>
-          </a:ln>
-        </p:spPr>
-        <p:style>
-          <a:lnRef idx="1">
-            <a:schemeClr val="accent1"/>
-          </a:lnRef>
-          <a:fillRef idx="3">
-            <a:schemeClr val="accent1"/>
-          </a:fillRef>
-          <a:effectRef idx="2">
-            <a:schemeClr val="accent1"/>
-          </a:effectRef>
-          <a:fontRef idx="minor">
-            <a:schemeClr val="lt1"/>
-          </a:fontRef>
-        </p:style>
-        <p:txBody>
-          <a:bodyPr rtlCol="0" anchor="ctr"/>
-          <a:lstStyle/>
-          <a:p>
-            <a:pPr algn="ctr"/>
-          </a:p>
-        </p:txBody>
-      </p:sp>
-      <p:sp>
-        <p:nvSpPr>
-          <p:cNvPr id="16" name="TextBox 15"/>
-          <p:cNvSpPr txBox="1"/>
-          <p:nvPr/>
-        </p:nvSpPr>
-        <p:spPr>
-          <a:xfrm>
-            <a:off x="7543800" y="1508760"/>
-            <a:ext cx="1508760" cy="2011680"/>
-          </a:xfrm>
-          <a:prstGeom prst="rect">
-            <a:avLst/>
-          </a:prstGeom>
-          <a:noFill/>
-        </p:spPr>
-        <p:txBody>
-          <a:bodyPr wrap="square">
-            <a:spAutoFit/>
-          </a:bodyPr>
-          <a:lstStyle/>
-          <a:p>
-            <a:pPr algn="ctr">
-              <a:spcAft>
-                <a:spcPts val="1000"/>
-              </a:spcAft>
-            </a:pPr>
-            <a:r>
-              <a:rPr sz="1200" b="1">
-                <a:solidFill>
-                  <a:srgbClr val="F2D59A"/>
-                </a:solidFill>
-                <a:latin typeface="Cinzel"/>
-                <a:cs typeface="Cinzel"/>
-                <a:ea typeface="Cinzel"/>
-              </a:rPr>
-              <a:t>PLAYTEST</a:t>
-            </a:r>
-          </a:p>
-          <a:p>
-            <a:pPr algn="ctr">
-              <a:spcAft>
-                <a:spcPts val="200"/>
-              </a:spcAft>
-            </a:pPr>
-            <a:r>
-              <a:rPr sz="1200" b="0">
-                <a:solidFill>
-                  <a:srgbClr val="ECE1D1"/>
-                </a:solidFill>
-                <a:latin typeface="Georgia"/>
-                <a:cs typeface="Georgia"/>
-                <a:ea typeface="Georgia"/>
-              </a:rPr>
-              <a:t>Cortar</a:t>
-            </a:r>
-          </a:p>
-          <a:p>
-            <a:pPr algn="ctr">
-              <a:spcAft>
-                <a:spcPts val="200"/>
-              </a:spcAft>
-            </a:pPr>
-            <a:r>
-              <a:rPr sz="1200" b="0">
-                <a:solidFill>
-                  <a:srgbClr val="ECE1D1"/>
-                </a:solidFill>
-                <a:latin typeface="Georgia"/>
-                <a:cs typeface="Georgia"/>
-                <a:ea typeface="Georgia"/>
-              </a:rPr>
-              <a:t>ou seguir</a:t>
-            </a:r>
-          </a:p>
-        </p:txBody>
-      </p:sp>
-      <p:sp>
-        <p:nvSpPr>
-          <p:cNvPr id="17" name="TextBox 16"/>
+              <a:t>Lista FORA DO ESCOPO no diário · dizer não · loja Aula 06 fica fora.</a:t>
+            </a:r>
+          </a:p>
+        </p:txBody>
+      </p:sp>
+      <p:sp>
+        <p:nvSpPr>
+          <p:cNvPr id="13" name="TextBox 12"/>
           <p:cNvSpPr txBox="1"/>
           <p:nvPr/>
         </p:nvSpPr>
@@ -8556,21 +9782,45 @@
                 <a:cs typeface="Cinzel"/>
                 <a:ea typeface="Cinzel"/>
               </a:rPr>
-              <a:t>Scope Creep — o monstro amigável</a:t>
-            </a:r>
-          </a:p>
-        </p:txBody>
-      </p:sp>
-      <p:sp>
-        <p:nvSpPr>
-          <p:cNvPr id="7" name="Rounded Rectangle 6"/>
+              <a:t>Caso: Hytale — visão enorme</a:t>
+            </a:r>
+          </a:p>
+        </p:txBody>
+      </p:sp>
+      <p:pic>
+        <p:nvPicPr>
+          <p:cNvPr id="7" name="Picture 6" descr="hytale-scope.jpg"/>
+          <p:cNvPicPr>
+            <a:picLocks noChangeAspect="1"/>
+          </p:cNvPicPr>
+          <p:nvPr/>
+        </p:nvPicPr>
+        <p:blipFill>
+          <a:blip r:embed="rId2"/>
+          <a:stretch>
+            <a:fillRect/>
+          </a:stretch>
+        </p:blipFill>
+        <p:spPr>
+          <a:xfrm>
+            <a:off x="411480" y="1005840"/>
+            <a:ext cx="4709160" cy="2648902"/>
+          </a:xfrm>
+          <a:prstGeom prst="rect">
+            <a:avLst/>
+          </a:prstGeom>
+        </p:spPr>
+      </p:pic>
+      <p:sp>
+        <p:nvSpPr>
+          <p:cNvPr id="8" name="Rounded Rectangle 7"/>
           <p:cNvSpPr/>
           <p:nvPr/>
         </p:nvSpPr>
         <p:spPr>
           <a:xfrm>
-            <a:off x="457200" y="1188720"/>
-            <a:ext cx="2743200" cy="2560320"/>
+            <a:off x="5257800" y="1005840"/>
+            <a:ext cx="3474720" cy="3063240"/>
           </a:xfrm>
           <a:prstGeom prst="roundRect">
             <a:avLst/>
@@ -8608,14 +9858,14 @@
       </p:sp>
       <p:sp>
         <p:nvSpPr>
-          <p:cNvPr id="8" name="TextBox 7"/>
+          <p:cNvPr id="9" name="TextBox 8"/>
           <p:cNvSpPr txBox="1"/>
           <p:nvPr/>
         </p:nvSpPr>
         <p:spPr>
           <a:xfrm>
-            <a:off x="640080" y="1417320"/>
-            <a:ext cx="2377440" cy="2194560"/>
+            <a:off x="5440680" y="1143000"/>
+            <a:ext cx="3108960" cy="2788920"/>
           </a:xfrm>
           <a:prstGeom prst="rect">
             <a:avLst/>
@@ -8628,13 +9878,13 @@
           </a:bodyPr>
           <a:lstStyle/>
           <a:p>
-            <a:pPr algn="ctr">
-              <a:spcAft>
-                <a:spcPts val="1200"/>
-              </a:spcAft>
-            </a:pPr>
-            <a:r>
-              <a:rPr sz="1300" b="1">
+            <a:pPr algn="l">
+              <a:spcAft>
+                <a:spcPts val="1000"/>
+              </a:spcAft>
+            </a:pPr>
+            <a:r>
+              <a:rPr sz="1200" b="1">
                 <a:solidFill>
                   <a:srgbClr val="F2D59A"/>
                 </a:solidFill>
@@ -8642,17 +9892,17 @@
                 <a:cs typeface="Cinzel"/>
                 <a:ea typeface="Cinzel"/>
               </a:rPr>
-              <a:t>O QUE É</a:t>
-            </a:r>
-          </a:p>
-          <a:p>
-            <a:pPr algn="ctr">
+              <a:t>LINHA DO TEMPO</a:t>
+            </a:r>
+          </a:p>
+          <a:p>
+            <a:pPr algn="l">
               <a:spcAft>
                 <a:spcPts val="600"/>
               </a:spcAft>
             </a:pPr>
             <a:r>
-              <a:rPr sz="1200" b="0">
+              <a:rPr sz="1100" b="0">
                 <a:solidFill>
                   <a:srgbClr val="ECE1D1"/>
                 </a:solidFill>
@@ -8660,103 +9910,17 @@
                 <a:cs typeface="Georgia"/>
                 <a:ea typeface="Georgia"/>
               </a:rPr>
-              <a:t>O projeto cresce em ideias sem cortar tempo, pessoas ou features.</a:t>
-            </a:r>
-          </a:p>
-        </p:txBody>
-      </p:sp>
-      <p:sp>
-        <p:nvSpPr>
-          <p:cNvPr id="9" name="Rounded Rectangle 8"/>
-          <p:cNvSpPr/>
-          <p:nvPr/>
-        </p:nvSpPr>
-        <p:spPr>
-          <a:xfrm>
-            <a:off x="3337560" y="1188720"/>
-            <a:ext cx="2743200" cy="2560320"/>
-          </a:xfrm>
-          <a:prstGeom prst="roundRect">
-            <a:avLst/>
-          </a:prstGeom>
-          <a:solidFill>
-            <a:srgbClr val="18121A"/>
-          </a:solidFill>
-          <a:ln w="15875">
-            <a:solidFill>
-              <a:srgbClr val="7A5C2E"/>
-            </a:solidFill>
-          </a:ln>
-        </p:spPr>
-        <p:style>
-          <a:lnRef idx="1">
-            <a:schemeClr val="accent1"/>
-          </a:lnRef>
-          <a:fillRef idx="3">
-            <a:schemeClr val="accent1"/>
-          </a:fillRef>
-          <a:effectRef idx="2">
-            <a:schemeClr val="accent1"/>
-          </a:effectRef>
-          <a:fontRef idx="minor">
-            <a:schemeClr val="lt1"/>
-          </a:fontRef>
-        </p:style>
-        <p:txBody>
-          <a:bodyPr rtlCol="0" anchor="ctr"/>
-          <a:lstStyle/>
-          <a:p>
-            <a:pPr algn="ctr"/>
-          </a:p>
-        </p:txBody>
-      </p:sp>
-      <p:sp>
-        <p:nvSpPr>
-          <p:cNvPr id="10" name="TextBox 9"/>
-          <p:cNvSpPr txBox="1"/>
-          <p:nvPr/>
-        </p:nvSpPr>
-        <p:spPr>
-          <a:xfrm>
-            <a:off x="3520440" y="1417320"/>
-            <a:ext cx="2377440" cy="2194560"/>
-          </a:xfrm>
-          <a:prstGeom prst="rect">
-            <a:avLst/>
-          </a:prstGeom>
-          <a:noFill/>
-        </p:spPr>
-        <p:txBody>
-          <a:bodyPr wrap="square">
-            <a:spAutoFit/>
-          </a:bodyPr>
-          <a:lstStyle/>
-          <a:p>
-            <a:pPr algn="ctr">
-              <a:spcAft>
-                <a:spcPts val="1200"/>
-              </a:spcAft>
-            </a:pPr>
-            <a:r>
-              <a:rPr sz="1300" b="1">
-                <a:solidFill>
-                  <a:srgbClr val="F2D59A"/>
-                </a:solidFill>
-                <a:latin typeface="Cinzel"/>
-                <a:cs typeface="Cinzel"/>
-                <a:ea typeface="Cinzel"/>
-              </a:rPr>
-              <a:t>SINTOMAS</a:t>
-            </a:r>
-          </a:p>
-          <a:p>
-            <a:pPr algn="ctr">
+              <a:t>2018 — Trailer: sandbox + RPG + tools + multiplayer…</a:t>
+            </a:r>
+          </a:p>
+          <a:p>
+            <a:pPr algn="l">
               <a:spcAft>
                 <a:spcPts val="600"/>
               </a:spcAft>
             </a:pPr>
             <a:r>
-              <a:rPr sz="1200" b="0">
+              <a:rPr sz="1100" b="0">
                 <a:solidFill>
                   <a:srgbClr val="ECE1D1"/>
                 </a:solidFill>
@@ -8764,103 +9928,17 @@
                 <a:cs typeface="Georgia"/>
                 <a:ea typeface="Georgia"/>
               </a:rPr>
-              <a:t>“Só mais um inimigo” · “e se tiver loja?” · “e se for online?”</a:t>
-            </a:r>
-          </a:p>
-        </p:txBody>
-      </p:sp>
-      <p:sp>
-        <p:nvSpPr>
-          <p:cNvPr id="11" name="Rounded Rectangle 10"/>
-          <p:cNvSpPr/>
-          <p:nvPr/>
-        </p:nvSpPr>
-        <p:spPr>
-          <a:xfrm>
-            <a:off x="6217920" y="1188720"/>
-            <a:ext cx="2743200" cy="2560320"/>
-          </a:xfrm>
-          <a:prstGeom prst="roundRect">
-            <a:avLst/>
-          </a:prstGeom>
-          <a:solidFill>
-            <a:srgbClr val="18121A"/>
-          </a:solidFill>
-          <a:ln w="15875">
-            <a:solidFill>
-              <a:srgbClr val="7A5C2E"/>
-            </a:solidFill>
-          </a:ln>
-        </p:spPr>
-        <p:style>
-          <a:lnRef idx="1">
-            <a:schemeClr val="accent1"/>
-          </a:lnRef>
-          <a:fillRef idx="3">
-            <a:schemeClr val="accent1"/>
-          </a:fillRef>
-          <a:effectRef idx="2">
-            <a:schemeClr val="accent1"/>
-          </a:effectRef>
-          <a:fontRef idx="minor">
-            <a:schemeClr val="lt1"/>
-          </a:fontRef>
-        </p:style>
-        <p:txBody>
-          <a:bodyPr rtlCol="0" anchor="ctr"/>
-          <a:lstStyle/>
-          <a:p>
-            <a:pPr algn="ctr"/>
-          </a:p>
-        </p:txBody>
-      </p:sp>
-      <p:sp>
-        <p:nvSpPr>
-          <p:cNvPr id="12" name="TextBox 11"/>
-          <p:cNvSpPr txBox="1"/>
-          <p:nvPr/>
-        </p:nvSpPr>
-        <p:spPr>
-          <a:xfrm>
-            <a:off x="6400800" y="1417320"/>
-            <a:ext cx="2377440" cy="2194560"/>
-          </a:xfrm>
-          <a:prstGeom prst="rect">
-            <a:avLst/>
-          </a:prstGeom>
-          <a:noFill/>
-        </p:spPr>
-        <p:txBody>
-          <a:bodyPr wrap="square">
-            <a:spAutoFit/>
-          </a:bodyPr>
-          <a:lstStyle/>
-          <a:p>
-            <a:pPr algn="ctr">
-              <a:spcAft>
-                <a:spcPts val="1200"/>
-              </a:spcAft>
-            </a:pPr>
-            <a:r>
-              <a:rPr sz="1300" b="1">
-                <a:solidFill>
-                  <a:srgbClr val="F2D59A"/>
-                </a:solidFill>
-                <a:latin typeface="Cinzel"/>
-                <a:cs typeface="Cinzel"/>
-                <a:ea typeface="Cinzel"/>
-              </a:rPr>
-              <a:t>ANTÍDOTO</a:t>
-            </a:r>
-          </a:p>
-          <a:p>
-            <a:pPr algn="ctr">
+              <a:t>2020 — Riot Games compra a Hypixel Studios.</a:t>
+            </a:r>
+          </a:p>
+          <a:p>
+            <a:pPr algn="l">
               <a:spcAft>
                 <a:spcPts val="600"/>
               </a:spcAft>
             </a:pPr>
             <a:r>
-              <a:rPr sz="1200" b="0">
+              <a:rPr sz="1100" b="0">
                 <a:solidFill>
                   <a:srgbClr val="ECE1D1"/>
                 </a:solidFill>
@@ -8868,14 +9946,50 @@
                 <a:cs typeface="Georgia"/>
                 <a:ea typeface="Georgia"/>
               </a:rPr>
-              <a:t>Lista do que está fora · produção guarda o cercado · dizer não.</a:t>
-            </a:r>
-          </a:p>
-        </p:txBody>
-      </p:sp>
-      <p:sp>
-        <p:nvSpPr>
-          <p:cNvPr id="13" name="TextBox 12"/>
+              <a:t>2021+ — Beta não chega; reboot de engine; ambição cresce.</a:t>
+            </a:r>
+          </a:p>
+          <a:p>
+            <a:pPr algn="l">
+              <a:spcAft>
+                <a:spcPts val="1000"/>
+              </a:spcAft>
+            </a:pPr>
+            <a:r>
+              <a:rPr sz="1100" b="0">
+                <a:solidFill>
+                  <a:srgbClr val="ECE1D1"/>
+                </a:solidFill>
+                <a:latin typeface="Georgia"/>
+                <a:cs typeface="Georgia"/>
+                <a:ea typeface="Georgia"/>
+              </a:rPr>
+              <a:t>2025 — Projeto cancelado (depois reaberto com escopo cortado).</a:t>
+            </a:r>
+          </a:p>
+          <a:p>
+            <a:pPr algn="l">
+              <a:spcAft>
+                <a:spcPts val="0"/>
+              </a:spcAft>
+            </a:pPr>
+            <a:r>
+              <a:rPr sz="1100" b="1">
+                <a:solidFill>
+                  <a:srgbClr val="CFA759"/>
+                </a:solidFill>
+                <a:latin typeface="Georgia"/>
+                <a:cs typeface="Georgia"/>
+                <a:ea typeface="Georgia"/>
+              </a:rPr>
+              <a:t>Dinheiro e talento ≠ cercado fechado.</a:t>
+            </a:r>
+          </a:p>
+        </p:txBody>
+      </p:sp>
+      <p:sp>
+        <p:nvSpPr>
+          <p:cNvPr id="10" name="TextBox 9"/>
           <p:cNvSpPr txBox="1"/>
           <p:nvPr/>
         </p:nvSpPr>
@@ -9153,7 +10267,7 @@
                 <a:cs typeface="Cinzel"/>
                 <a:ea typeface="Cinzel"/>
               </a:rPr>
-              <a:t>Cercado do Labirinto</a:t>
+              <a:t>Riot × Hytale — lição de escopo</a:t>
             </a:r>
           </a:p>
         </p:txBody>
@@ -9166,8 +10280,8 @@
         </p:nvSpPr>
         <p:spPr>
           <a:xfrm>
-            <a:off x="502920" y="1097280"/>
-            <a:ext cx="3931920" cy="2834640"/>
+            <a:off x="502920" y="1051560"/>
+            <a:ext cx="2926080" cy="2926080"/>
           </a:xfrm>
           <a:prstGeom prst="roundRect">
             <a:avLst/>
@@ -9203,83 +10317,30 @@
           </a:p>
         </p:txBody>
       </p:sp>
-      <p:sp>
-        <p:nvSpPr>
-          <p:cNvPr id="8" name="TextBox 7"/>
-          <p:cNvSpPr txBox="1"/>
-          <p:nvPr/>
-        </p:nvSpPr>
-        <p:spPr>
-          <a:xfrm>
-            <a:off x="731520" y="1280160"/>
-            <a:ext cx="3474720" cy="2560320"/>
-          </a:xfrm>
-          <a:prstGeom prst="rect">
-            <a:avLst/>
-          </a:prstGeom>
-          <a:noFill/>
-        </p:spPr>
-        <p:txBody>
-          <a:bodyPr wrap="square">
-            <a:spAutoFit/>
-          </a:bodyPr>
-          <a:lstStyle/>
-          <a:p>
-            <a:pPr algn="ctr">
-              <a:spcAft>
-                <a:spcPts val="1000"/>
-              </a:spcAft>
-            </a:pPr>
-            <a:r>
-              <a:rPr sz="1600" b="1">
-                <a:solidFill>
-                  <a:srgbClr val="CFA759"/>
-                </a:solidFill>
-                <a:latin typeface="Cinzel"/>
-                <a:cs typeface="Cinzel"/>
-                <a:ea typeface="Cinzel"/>
-              </a:rPr>
-              <a:t>ENTRA</a:t>
-            </a:r>
-          </a:p>
-          <a:p>
-            <a:pPr algn="ctr">
-              <a:spcAft>
-                <a:spcPts val="600"/>
-              </a:spcAft>
-            </a:pPr>
-            <a:r>
-              <a:rPr sz="1200" b="0">
-                <a:solidFill>
-                  <a:srgbClr val="ECE1D1"/>
-                </a:solidFill>
-                <a:latin typeface="Georgia"/>
-                <a:cs typeface="Georgia"/>
-                <a:ea typeface="Georgia"/>
-              </a:rPr>
-              <a:t>Hoje: papéis + pastas + stubs</a:t>
-            </a:r>
-          </a:p>
-          <a:p>
-            <a:pPr algn="ctr">
-              <a:spcAft>
-                <a:spcPts val="600"/>
-              </a:spcAft>
-            </a:pPr>
-            <a:r>
-              <a:rPr sz="1200" b="0">
-                <a:solidFill>
-                  <a:srgbClr val="ECE1D1"/>
-                </a:solidFill>
-                <a:latin typeface="Georgia"/>
-                <a:cs typeface="Georgia"/>
-                <a:ea typeface="Georgia"/>
-              </a:rPr>
-              <a:t>08+: player 4 dirs · moedas · 1 fase</a:t>
-            </a:r>
-          </a:p>
-        </p:txBody>
-      </p:sp>
+      <p:pic>
+        <p:nvPicPr>
+          <p:cNvPr id="8" name="Picture 7" descr="riot-games-logo.png"/>
+          <p:cNvPicPr>
+            <a:picLocks noChangeAspect="1"/>
+          </p:cNvPicPr>
+          <p:nvPr/>
+        </p:nvPicPr>
+        <p:blipFill>
+          <a:blip r:embed="rId2"/>
+          <a:stretch>
+            <a:fillRect/>
+          </a:stretch>
+        </p:blipFill>
+        <p:spPr>
+          <a:xfrm>
+            <a:off x="868680" y="1691640"/>
+            <a:ext cx="2194560" cy="1234440"/>
+          </a:xfrm>
+          <a:prstGeom prst="rect">
+            <a:avLst/>
+          </a:prstGeom>
+        </p:spPr>
+      </p:pic>
       <p:sp>
         <p:nvSpPr>
           <p:cNvPr id="9" name="Rounded Rectangle 8"/>
@@ -9288,8 +10349,8 @@
         </p:nvSpPr>
         <p:spPr>
           <a:xfrm>
-            <a:off x="4709160" y="1097280"/>
-            <a:ext cx="3931920" cy="2834640"/>
+            <a:off x="3611880" y="1051560"/>
+            <a:ext cx="5029200" cy="2926080"/>
           </a:xfrm>
           <a:prstGeom prst="roundRect">
             <a:avLst/>
@@ -9333,8 +10394,8 @@
         </p:nvSpPr>
         <p:spPr>
           <a:xfrm>
-            <a:off x="4937760" y="1280160"/>
-            <a:ext cx="3474720" cy="2560320"/>
+            <a:off x="3840480" y="1234440"/>
+            <a:ext cx="4617720" cy="2606040"/>
           </a:xfrm>
           <a:prstGeom prst="rect">
             <a:avLst/>
@@ -9347,27 +10408,27 @@
           </a:bodyPr>
           <a:lstStyle/>
           <a:p>
-            <a:pPr algn="ctr">
-              <a:spcAft>
-                <a:spcPts val="1000"/>
-              </a:spcAft>
-            </a:pPr>
-            <a:r>
-              <a:rPr sz="1600" b="1">
-                <a:solidFill>
-                  <a:srgbClr val="7A1F2B"/>
+            <a:pPr algn="l">
+              <a:spcAft>
+                <a:spcPts val="800"/>
+              </a:spcAft>
+            </a:pPr>
+            <a:r>
+              <a:rPr sz="1200" b="1">
+                <a:solidFill>
+                  <a:srgbClr val="F2D59A"/>
                 </a:solidFill>
                 <a:latin typeface="Cinzel"/>
                 <a:cs typeface="Cinzel"/>
                 <a:ea typeface="Cinzel"/>
               </a:rPr>
-              <a:t>FICA FORA</a:t>
-            </a:r>
-          </a:p>
-          <a:p>
-            <a:pPr algn="ctr">
-              <a:spcAft>
-                <a:spcPts val="600"/>
+              <a:t>O QUE ACONTECEU</a:t>
+            </a:r>
+          </a:p>
+          <a:p>
+            <a:pPr algn="l">
+              <a:spcAft>
+                <a:spcPts val="800"/>
               </a:spcAft>
             </a:pPr>
             <a:r>
@@ -9379,13 +10440,13 @@
                 <a:cs typeface="Georgia"/>
                 <a:ea typeface="Georgia"/>
               </a:rPr>
-              <a:t>Loja Aula 06 · combate · NPCs</a:t>
-            </a:r>
-          </a:p>
-          <a:p>
-            <a:pPr algn="ctr">
-              <a:spcAft>
-                <a:spcPts val="600"/>
+              <a:t>A visão era tão grande que cada “só mais isso” empurrava o jogo para longe do lançável.</a:t>
+            </a:r>
+          </a:p>
+          <a:p>
+            <a:pPr algn="l">
+              <a:spcAft>
+                <a:spcPts val="1000"/>
               </a:spcAft>
             </a:pPr>
             <a:r>
@@ -9397,7 +10458,43 @@
                 <a:cs typeface="Georgia"/>
                 <a:ea typeface="Georgia"/>
               </a:rPr>
-              <a:t>Multiplayer · bosses · shaders</a:t>
+              <a:t>Até com backing da Riot, falta de MVP claro virou anos sem build pública estável.</a:t>
+            </a:r>
+          </a:p>
+          <a:p>
+            <a:pPr algn="l">
+              <a:spcAft>
+                <a:spcPts val="800"/>
+              </a:spcAft>
+            </a:pPr>
+            <a:r>
+              <a:rPr sz="1200" b="1">
+                <a:solidFill>
+                  <a:srgbClr val="F2D59A"/>
+                </a:solidFill>
+                <a:latin typeface="Cinzel"/>
+                <a:cs typeface="Cinzel"/>
+                <a:ea typeface="Cinzel"/>
+              </a:rPr>
+              <a:t>NA NOSSA SALA</a:t>
+            </a:r>
+          </a:p>
+          <a:p>
+            <a:pPr algn="l">
+              <a:spcAft>
+                <a:spcPts val="0"/>
+              </a:spcAft>
+            </a:pPr>
+            <a:r>
+              <a:rPr sz="1200" b="0">
+                <a:solidFill>
+                  <a:srgbClr val="ECE1D1"/>
+                </a:solidFill>
+                <a:latin typeface="Georgia"/>
+                <a:cs typeface="Georgia"/>
+                <a:ea typeface="Georgia"/>
+              </a:rPr>
+              <a:t>Labirinto = sprite + coleta. Loja, boss e online ficam FORA — senão viramos Hytale de 120 minutos.</a:t>
             </a:r>
           </a:p>
         </p:txBody>
@@ -9682,7 +10779,7 @@
                 <a:cs typeface="Cinzel"/>
                 <a:ea typeface="Cinzel"/>
               </a:rPr>
-              <a:t>Ponte prática</a:t>
+              <a:t>Versionamento visual</a:t>
             </a:r>
           </a:p>
         </p:txBody>
@@ -9695,8 +10792,8 @@
         </p:nvSpPr>
         <p:spPr>
           <a:xfrm>
-            <a:off x="502920" y="1143000"/>
-            <a:ext cx="8138160" cy="2880360"/>
+            <a:off x="502920" y="1051560"/>
+            <a:ext cx="8138160" cy="530352"/>
           </a:xfrm>
           <a:prstGeom prst="roundRect">
             <a:avLst/>
@@ -9740,8 +10837,8 @@
         </p:nvSpPr>
         <p:spPr>
           <a:xfrm>
-            <a:off x="822960" y="1554480"/>
-            <a:ext cx="7498079" cy="2286000"/>
+            <a:off x="777240" y="1143000"/>
+            <a:ext cx="7680960" cy="365760"/>
           </a:xfrm>
           <a:prstGeom prst="rect">
             <a:avLst/>
@@ -9754,31 +10851,13 @@
           </a:bodyPr>
           <a:lstStyle/>
           <a:p>
-            <a:pPr algn="ctr">
-              <a:spcAft>
-                <a:spcPts val="1600"/>
-              </a:spcAft>
-            </a:pPr>
-            <a:r>
-              <a:rPr sz="2000" b="1">
-                <a:solidFill>
-                  <a:srgbClr val="F2D59A"/>
-                </a:solidFill>
-                <a:latin typeface="Cinzel"/>
-                <a:cs typeface="Cinzel"/>
-                <a:ea typeface="Cinzel"/>
-              </a:rPr>
-              <a:t>Minha Equipe, Meu Escopo</a:t>
-            </a:r>
-          </a:p>
-          <a:p>
-            <a:pPr algn="ctr">
-              <a:spcAft>
-                <a:spcPts val="1000"/>
-              </a:spcAft>
-            </a:pPr>
-            <a:r>
-              <a:rPr sz="1500" b="0">
+            <a:pPr algn="l">
+              <a:spcAft>
+                <a:spcPts val="600"/>
+              </a:spcAft>
+            </a:pPr>
+            <a:r>
+              <a:rPr sz="1400" b="0">
                 <a:solidFill>
                   <a:srgbClr val="ECE1D1"/>
                 </a:solidFill>
@@ -9786,11 +10865,79 @@
                 <a:cs typeface="Georgia"/>
                 <a:ea typeface="Georgia"/>
               </a:rPr>
-              <a:t>Equipes de 3 · quadro · projeto LabirintoDeMoedas</a:t>
-            </a:r>
-          </a:p>
-          <a:p>
-            <a:pPr algn="ctr">
+              <a:t>◆  Nome canônico de pasta/cena = contrato (moeda.tscn ≠ MoedaFinal2).</a:t>
+            </a:r>
+          </a:p>
+        </p:txBody>
+      </p:sp>
+      <p:sp>
+        <p:nvSpPr>
+          <p:cNvPr id="9" name="Rounded Rectangle 8"/>
+          <p:cNvSpPr/>
+          <p:nvPr/>
+        </p:nvSpPr>
+        <p:spPr>
+          <a:xfrm>
+            <a:off x="502920" y="1691639"/>
+            <a:ext cx="8138160" cy="530352"/>
+          </a:xfrm>
+          <a:prstGeom prst="roundRect">
+            <a:avLst/>
+          </a:prstGeom>
+          <a:solidFill>
+            <a:srgbClr val="18121A"/>
+          </a:solidFill>
+          <a:ln w="15875">
+            <a:solidFill>
+              <a:srgbClr val="7A5C2E"/>
+            </a:solidFill>
+          </a:ln>
+        </p:spPr>
+        <p:style>
+          <a:lnRef idx="1">
+            <a:schemeClr val="accent1"/>
+          </a:lnRef>
+          <a:fillRef idx="3">
+            <a:schemeClr val="accent1"/>
+          </a:fillRef>
+          <a:effectRef idx="2">
+            <a:schemeClr val="accent1"/>
+          </a:effectRef>
+          <a:fontRef idx="minor">
+            <a:schemeClr val="lt1"/>
+          </a:fontRef>
+        </p:style>
+        <p:txBody>
+          <a:bodyPr rtlCol="0" anchor="ctr"/>
+          <a:lstStyle/>
+          <a:p>
+            <a:pPr algn="ctr"/>
+          </a:p>
+        </p:txBody>
+      </p:sp>
+      <p:sp>
+        <p:nvSpPr>
+          <p:cNvPr id="10" name="TextBox 9"/>
+          <p:cNvSpPr txBox="1"/>
+          <p:nvPr/>
+        </p:nvSpPr>
+        <p:spPr>
+          <a:xfrm>
+            <a:off x="777240" y="1783079"/>
+            <a:ext cx="7680960" cy="365760"/>
+          </a:xfrm>
+          <a:prstGeom prst="rect">
+            <a:avLst/>
+          </a:prstGeom>
+          <a:noFill/>
+        </p:spPr>
+        <p:txBody>
+          <a:bodyPr wrap="square">
+            <a:spAutoFit/>
+          </a:bodyPr>
+          <a:lstStyle/>
+          <a:p>
+            <a:pPr algn="l">
               <a:spcAft>
                 <a:spcPts val="600"/>
               </a:spcAft>
@@ -9798,20 +10945,192 @@
             <a:r>
               <a:rPr sz="1400" b="0">
                 <a:solidFill>
-                  <a:srgbClr val="AB9C8A"/>
+                  <a:srgbClr val="ECE1D1"/>
                 </a:solidFill>
                 <a:latin typeface="Georgia"/>
                 <a:cs typeface="Georgia"/>
                 <a:ea typeface="Georgia"/>
               </a:rPr>
-              <a:t>Sem labirinto jogável completo hoje — só organização.</a:t>
-            </a:r>
-          </a:p>
-        </p:txBody>
-      </p:sp>
-      <p:sp>
-        <p:nvSpPr>
-          <p:cNvPr id="9" name="TextBox 8"/>
+              <a:t>◆  Projeto Godot só na máquina local — sem pasta sync / Drive.</a:t>
+            </a:r>
+          </a:p>
+        </p:txBody>
+      </p:sp>
+      <p:sp>
+        <p:nvSpPr>
+          <p:cNvPr id="11" name="Rounded Rectangle 10"/>
+          <p:cNvSpPr/>
+          <p:nvPr/>
+        </p:nvSpPr>
+        <p:spPr>
+          <a:xfrm>
+            <a:off x="502920" y="2331720"/>
+            <a:ext cx="8138160" cy="530352"/>
+          </a:xfrm>
+          <a:prstGeom prst="roundRect">
+            <a:avLst/>
+          </a:prstGeom>
+          <a:solidFill>
+            <a:srgbClr val="18121A"/>
+          </a:solidFill>
+          <a:ln w="15875">
+            <a:solidFill>
+              <a:srgbClr val="7A5C2E"/>
+            </a:solidFill>
+          </a:ln>
+        </p:spPr>
+        <p:style>
+          <a:lnRef idx="1">
+            <a:schemeClr val="accent1"/>
+          </a:lnRef>
+          <a:fillRef idx="3">
+            <a:schemeClr val="accent1"/>
+          </a:fillRef>
+          <a:effectRef idx="2">
+            <a:schemeClr val="accent1"/>
+          </a:effectRef>
+          <a:fontRef idx="minor">
+            <a:schemeClr val="lt1"/>
+          </a:fontRef>
+        </p:style>
+        <p:txBody>
+          <a:bodyPr rtlCol="0" anchor="ctr"/>
+          <a:lstStyle/>
+          <a:p>
+            <a:pPr algn="ctr"/>
+          </a:p>
+        </p:txBody>
+      </p:sp>
+      <p:sp>
+        <p:nvSpPr>
+          <p:cNvPr id="12" name="TextBox 11"/>
+          <p:cNvSpPr txBox="1"/>
+          <p:nvPr/>
+        </p:nvSpPr>
+        <p:spPr>
+          <a:xfrm>
+            <a:off x="777240" y="2423160"/>
+            <a:ext cx="7680960" cy="365760"/>
+          </a:xfrm>
+          <a:prstGeom prst="rect">
+            <a:avLst/>
+          </a:prstGeom>
+          <a:noFill/>
+        </p:spPr>
+        <p:txBody>
+          <a:bodyPr wrap="square">
+            <a:spAutoFit/>
+          </a:bodyPr>
+          <a:lstStyle/>
+          <a:p>
+            <a:pPr algn="l">
+              <a:spcAft>
+                <a:spcPts val="600"/>
+              </a:spcAft>
+            </a:pPr>
+            <a:r>
+              <a:rPr sz="1400" b="0">
+                <a:solidFill>
+                  <a:srgbClr val="ECE1D1"/>
+                </a:solidFill>
+                <a:latin typeface="Georgia"/>
+                <a:cs typeface="Georgia"/>
+                <a:ea typeface="Georgia"/>
+              </a:rPr>
+              <a:t>◆  PNG do LibreSprite entra em sprites/ no Encontro 2.</a:t>
+            </a:r>
+          </a:p>
+        </p:txBody>
+      </p:sp>
+      <p:sp>
+        <p:nvSpPr>
+          <p:cNvPr id="13" name="Rounded Rectangle 12"/>
+          <p:cNvSpPr/>
+          <p:nvPr/>
+        </p:nvSpPr>
+        <p:spPr>
+          <a:xfrm>
+            <a:off x="502920" y="2971799"/>
+            <a:ext cx="8138160" cy="530352"/>
+          </a:xfrm>
+          <a:prstGeom prst="roundRect">
+            <a:avLst/>
+          </a:prstGeom>
+          <a:solidFill>
+            <a:srgbClr val="18121A"/>
+          </a:solidFill>
+          <a:ln w="15875">
+            <a:solidFill>
+              <a:srgbClr val="7A5C2E"/>
+            </a:solidFill>
+          </a:ln>
+        </p:spPr>
+        <p:style>
+          <a:lnRef idx="1">
+            <a:schemeClr val="accent1"/>
+          </a:lnRef>
+          <a:fillRef idx="3">
+            <a:schemeClr val="accent1"/>
+          </a:fillRef>
+          <a:effectRef idx="2">
+            <a:schemeClr val="accent1"/>
+          </a:effectRef>
+          <a:fontRef idx="minor">
+            <a:schemeClr val="lt1"/>
+          </a:fontRef>
+        </p:style>
+        <p:txBody>
+          <a:bodyPr rtlCol="0" anchor="ctr"/>
+          <a:lstStyle/>
+          <a:p>
+            <a:pPr algn="ctr"/>
+          </a:p>
+        </p:txBody>
+      </p:sp>
+      <p:sp>
+        <p:nvSpPr>
+          <p:cNvPr id="14" name="TextBox 13"/>
+          <p:cNvSpPr txBox="1"/>
+          <p:nvPr/>
+        </p:nvSpPr>
+        <p:spPr>
+          <a:xfrm>
+            <a:off x="777240" y="3063239"/>
+            <a:ext cx="7680960" cy="365760"/>
+          </a:xfrm>
+          <a:prstGeom prst="rect">
+            <a:avLst/>
+          </a:prstGeom>
+          <a:noFill/>
+        </p:spPr>
+        <p:txBody>
+          <a:bodyPr wrap="square">
+            <a:spAutoFit/>
+          </a:bodyPr>
+          <a:lstStyle/>
+          <a:p>
+            <a:pPr algn="l">
+              <a:spcAft>
+                <a:spcPts val="600"/>
+              </a:spcAft>
+            </a:pPr>
+            <a:r>
+              <a:rPr sz="1400" b="0">
+                <a:solidFill>
+                  <a:srgbClr val="ECE1D1"/>
+                </a:solidFill>
+                <a:latin typeface="Georgia"/>
+                <a:cs typeface="Georgia"/>
+                <a:ea typeface="Georgia"/>
+              </a:rPr>
+              <a:t>◆  Sem dono de arquivo, alguém apaga o trabalho do outro sem perceber.</a:t>
+            </a:r>
+          </a:p>
+        </p:txBody>
+      </p:sp>
+      <p:sp>
+        <p:nvSpPr>
+          <p:cNvPr id="15" name="TextBox 14"/>
           <p:cNvSpPr txBox="1"/>
           <p:nvPr/>
         </p:nvSpPr>
